--- a/slides/exact/exact_slides_neurips.pptx
+++ b/slides/exact/exact_slides_neurips.pptx
@@ -506,7 +506,7 @@
           <a:lstStyle/>
           <a:p>
             <a:r>
-              <a:t>The task: given the measurements of n consecutive vertebral bodies, seven per body, recover which levels they are. Because the bodies are consecutive, the whole labelling is one discrete latent variable, the field's place k, with 23 minus n values over the 22 levels from C3 to L5. Data come from a generative model fitted to nothing: Panjabi's published per-level means and spreads, with a patient-size factor, a within-column correlation and measurement noise. We score 2,000 columns, every place of every column, and ask three questions: what is the best any function can do, can it say when it is right, and what can a single body say for certain. Headline numbers to come: 47% named exactly from one body, 73% from three.</a:t>
+              <a:t>The task: given the measurements of n consecutive vertebral bodies, seven per body, recover which levels they are. Because the bodies are consecutive, the whole labelling is one discrete latent variable, the field's place k: body i is level k + i - 1, with C3 = 1 and L5 = 22, so k takes 23 minus n values. Data come from a generative model fitted to nothing: Panjabi's published per-level means and spreads, with a column-size factor, a within-column correlation and measurement noise. We score 2,000 synthetic columns, every place of every column, and ask three questions: what is the best any function can do, can it say when it is right, and what can a single body say for certain. Headline numbers to come, on these synthetic columns: 47% named exactly from one body, 73% from three.</a:t>
             </a:r>
           </a:p>
         </p:txBody>
@@ -576,7 +576,7 @@
           <a:lstStyle/>
           <a:p>
             <a:r>
-              <a:t>Exact inference by enumeration. For a field of n bodies there are 23 minus n places. Given the patient's size s, each measure's n values are jointly Gaussian with covariance Delta plus u u-transpose, so the likelihood needs no matrix inverse (Sherman-Morrison); measures are independent given s; log s is Gaussian with SD 0.07 and is integrated by 161-node Gauss-Hermite quadrature, whose error we measured. Under a uniform prior the posterior is the normalised likelihood, shown right for one column chosen by a stated rule: the median three-body posterior at T12 among 2,000. Because this is the generator's own posterior it is the Bayes-optimal classifier: a network can match it, never beat it, which turns 'can a network do this' into 'how far is this ceiling from one'.</a:t>
+              <a:t>Exact inference by enumeration. For a field of n bodies there are 23 minus n places, each with prior 1 over 23 minus n. Given the column's size s, each measure's n values are jointly Gaussian with mean s times the table means at levels k to k plus n minus 1, and covariance s squared rho squared sigma sigma-transpose plus a diagonal of s squared times 1 minus rho squared times sigma squared, plus the error variance, with rho 0.5 and 1 mm of error; the rank-one term means the likelihood needs no matrix inverse (Sherman-Morrison). Measures are independent given s; log s is Gaussian with SD 0.07 and is integrated by 161-node Gauss-Hermite quadrature, whose error we measured. Under the uniform prior the posterior is the normalised likelihood, shown right for one column chosen by a stated rule: of 2,000, the column whose posterior at T12 sits nearest the median at one, three and nine bodies together. Because this is the generator's own posterior it is the Bayes-optimal classifier: a network can match it in expectation, never beat it, which turns 'can a network do this' into 'how far is this ceiling from one'.</a:t>
             </a:r>
           </a:p>
         </p:txBody>
@@ -646,7 +646,7 @@
           <a:lstStyle/>
           <a:p>
             <a:r>
-              <a:t>Left: exact-match accuracy of the Bayes rule against the number of bodies, 47.3% at one, 73.1% at three, 96.1% at nine; the crosses are a linear classifier fitted on separate synthetic columns, 10.7 to 12.8 points below on the same columns. Dashed: the share answered under selective prediction at posterior 0.99, 17.1% at three bodies and 71.8% at nine. Right: calibration on held-out draws, error predicted against error counted, on the diagonal down to one in ten thousand. The guarantee is one line: among answers with max posterior at least 1 minus epsilon, accuracy equals the mean posterior, hence at least 1 minus epsilon, and it holds within any group chosen by the measurements, not within groups chosen by the truth. Observed: 99.78% at three bodies, 99.93% at nine.</a:t>
+              <a:t>Left: exact-match accuracy of the Bayes rule against the number of bodies, 47.3% at one, 73.1% at three, 96.1% at nine; the crosses are a linear classifier fitted on separate synthetic columns, 10.8 to 15.3 points below on the same first 1,000 columns. On three bodies a fitted network reaches 71.6% and the best fitted rule 72.2%, against the rule's 73.1% on the same fields. Dashed: the share answered under selective prediction at posterior 0.99, 17.1% at three bodies and 71.8% at nine. Right: calibration, error predicted against error counted, on the diagonal to about 1 in 1,000; at 1 in 10,000 the agreement rests on 2 errors counted in 15,038 nine-body fields with posterior above 0.999, and the top bins at one and three bodies counted none. The guarantee is one line: among answers with max posterior at least 1 minus epsilon, accuracy equals the mean posterior, hence at least 1 minus epsilon, in expectation under the generator; it holds within any group chosen by the measurements, not within groups chosen by the truth. Observed: 99.78% at three bodies (15 wrong of 6,848), 99.93% at nine (15 wrong of 20,112).</a:t>
             </a:r>
           </a:p>
         </p:txBody>
@@ -716,7 +716,7 @@
           <a:lstStyle/>
           <a:p>
             <a:r>
-              <a:t>Weaker statements inherit the guarantee: P(level at or below c) is a sum of the same posterior, so a claim made at 0.99 is right at least 99 per cent of the time, over all fields. The figure conditions on the truth, fields whose middle body lies within two levels of each border, where no guarantee applies, so these are measurements. One body: the side of C7/T1 for 56.4%, precision 99.84%; the side of T12/L1 for only 7.1%, precision 97.89%, below the nominal level because the group is chosen by the truth; the region for 60.9% of all single bodies, 21 wrong of 26,786, 2 of them far from both junctions. Nine bodies settle T12/L1 for 88.0%.</a:t>
+              <a:t>Weaker statements inherit the guarantee. With l = k + floor((n - 1)/2) the middle body, P(l at or caudal to c) is a sum of the same posterior over k, so a claim made at 0.99 on either side is right at least 99 per cent of the time over all fields, in expectation: at T12/L1 from one body, 99.96%, 13 wrong of 30,943. The figure conditions on the truth, fields whose middle body lies within two levels of each border, where no guarantee applies, so these are measurements. One body: the side of C7/T1 for 56.4%, precision 99.84%; the side of T12/L1 for only 7.1%, precision 97.89%, below the nominal level because the group is chosen by the truth; the region for 60.9% of all single bodies, 21 wrong of 26,786, 2 of them far from both junctions. Nine bodies settle T12/L1 for 88.0% of fields whose middle body is T11 to L1, the levels a nine-body field can centre on near it.</a:t>
             </a:r>
           </a:p>
         </p:txBody>
@@ -786,7 +786,7 @@
           <a:lstStyle/>
           <a:p>
             <a:r>
-              <a:t>Robustness, three bodies. Under the generator the printed-table rule is right 99.64% at 0.99. When the rule's table is itself estimated from 12 specimens, the setting Panjabi's tables come from, precision drops to 95.5%; with 3 mm of measurement error, 82.6%. The fix that needs no new data inflates each spread by the root of 1 plus 1 over 12 and assumes 2 mm of error: precision returns to 99.3% (and 96.8% at 3 mm), at the cost of coverage, 5.5% answered instead of 19.5%, and unevenly, lumbar names 96.7%. The posterior is only as good as the table, so the open problems are a table from full-spine CT counted from C2, a prior from a real series, and anomalous phenotypes as additional places.</a:t>
+              <a:t>Robustness, three bodies. On the main scoring columns the printed-table rule is right 99.78% at 0.99, naming 17.1% of fields. The rows here are scored on separate synthetic columns, 500 per error world and 40 worlds of 100 columns for a table world. When the rule's table is itself estimated from 12 specimens, the setting Panjabi's tables come from, precision drops to 95.5%; with 3 mm of measurement error, 82.6%. Inflating each spread by the root of 1 plus 1 over 12 and assuming 2 mm of error, the 2 mm chosen on a separate pilot, brings precision back to 99.3% in the twelve-spine worlds, at the cost of coverage, 5.5% answered instead of 19.5%, and unevenly, lumbar names 96.7%. With 3 mm of error on the printed table it reaches only 96.8%, so it fails there. The predictive rule, with nothing tuned, reaches 97.6% at 14.8% named in the same twelve-spine worlds. The posterior is only as good as the table, so the open problems are a table measured on full-spine CT counted from C2 and a prior from a real series.</a:t>
             </a:r>
           </a:p>
         </p:txBody>
@@ -3827,7 +3827,7 @@
       </p:sp>
       <p:pic>
         <p:nvPicPr>
-          <p:cNvPr id="3" name="Figure: exact_slide_view" descr="A field of view: three consecutive vertebral bodies seen, the rest of the column unseen, and no C2 or sacrum to count from. Bodies drawn to Panjabi's mean upper end-plate width, canal width hatched, C3 to L5, the tables' range."/>
+          <p:cNvPr id="3" name="Figure: exact_slide_view" descr="A field of view: three consecutive vertebral bodies seen, the rest of the column unseen, and no C2 or sacrum to count from. Bodies drawn to Panjabi's mean upper end-plate width, C3 to L5, the tables' range."/>
           <p:cNvPicPr>
             <a:picLocks noChangeAspect="1"/>
           </p:cNvPicPr>
@@ -3882,7 +3882,7 @@
         <p:spPr>
           <a:xfrm>
             <a:off x="6446520" y="1325880"/>
-            <a:ext cx="5193792" cy="566928"/>
+            <a:ext cx="5193792" cy="777240"/>
           </a:xfrm>
           <a:prstGeom prst="rect">
             <a:avLst/>
@@ -3901,7 +3901,7 @@
               </a:spcAft>
             </a:pPr>
             <a:r>
-              <a:rPr sz="1200" b="1" i="0">
+              <a:rPr sz="1400" b="1" i="0">
                 <a:solidFill>
                   <a:srgbClr val="595959"/>
                 </a:solidFill>
@@ -3917,13 +3917,23 @@
               </a:spcAft>
             </a:pPr>
             <a:r>
-              <a:rPr sz="1200" b="0" i="0">
+              <a:rPr sz="1400" b="0" i="0">
                 <a:solidFill>
                   <a:srgbClr val="595959"/>
                 </a:solidFill>
                 <a:latin typeface="Cambria"/>
               </a:rPr>
-              <a:t>General Surgery, Wayne State University School of Medicine / Detroit Medical Center</a:t>
+              <a:t>General Surgery (Wayne State University School of Medicine /</a:t>
+            </a:r>
+            <a:br/>
+            <a:r>
+              <a:rPr sz="1400" b="0" i="0">
+                <a:solidFill>
+                  <a:srgbClr val="595959"/>
+                </a:solidFill>
+                <a:latin typeface="Cambria"/>
+              </a:rPr>
+              <a:t>Detroit Medical Center)</a:t>
             </a:r>
           </a:p>
         </p:txBody>
@@ -3936,8 +3946,8 @@
         </p:nvSpPr>
         <p:spPr>
           <a:xfrm>
-            <a:off x="6446520" y="2148840"/>
-            <a:ext cx="5193792" cy="1097280"/>
+            <a:off x="6446520" y="2286000"/>
+            <a:ext cx="5193792" cy="1051560"/>
           </a:xfrm>
           <a:prstGeom prst="rect">
             <a:avLst/>
@@ -4462,7 +4472,118 @@
         </p:nvSpPr>
         <p:spPr>
           <a:xfrm>
-            <a:off x="6446520" y="3977639"/>
+            <a:off x="6446520" y="3931920"/>
+            <a:ext cx="5193792" cy="868680"/>
+          </a:xfrm>
+          <a:prstGeom prst="rect">
+            <a:avLst/>
+          </a:prstGeom>
+          <a:noFill/>
+        </p:spPr>
+        <p:txBody>
+          <a:bodyPr wrap="square" anchor="t" lIns="18288" rIns="18288" tIns="18288" bIns="18288">
+            <a:spAutoFit/>
+          </a:bodyPr>
+          <a:lstStyle/>
+          <a:p>
+            <a:pPr algn="l">
+              <a:spcAft>
+                <a:spcPts val="600"/>
+              </a:spcAft>
+            </a:pPr>
+            <a:r>
+              <a:rPr sz="1600" b="0" i="0">
+                <a:solidFill>
+                  <a:srgbClr val="111111"/>
+                </a:solidFill>
+                <a:latin typeface="Cambria"/>
+              </a:rPr>
+              <a:t>Seven measures per body. Body </a:t>
+            </a:r>
+            <a:r>
+              <a:rPr sz="1600" b="0" i="1">
+                <a:solidFill>
+                  <a:srgbClr val="111111"/>
+                </a:solidFill>
+                <a:latin typeface="Cambria"/>
+              </a:rPr>
+              <a:t>i</a:t>
+            </a:r>
+            <a:r>
+              <a:rPr sz="1600" b="0" i="0">
+                <a:solidFill>
+                  <a:srgbClr val="111111"/>
+                </a:solidFill>
+                <a:latin typeface="Cambria"/>
+              </a:rPr>
+              <a:t> of the field is level </a:t>
+            </a:r>
+            <a:r>
+              <a:rPr sz="1600" b="0" i="1">
+                <a:solidFill>
+                  <a:srgbClr val="111111"/>
+                </a:solidFill>
+                <a:latin typeface="Cambria"/>
+              </a:rPr>
+              <a:t>k</a:t>
+            </a:r>
+            <a:r>
+              <a:rPr sz="1600" b="0" i="0">
+                <a:solidFill>
+                  <a:srgbClr val="111111"/>
+                </a:solidFill>
+                <a:latin typeface="Cambria"/>
+              </a:rPr>
+              <a:t> + </a:t>
+            </a:r>
+            <a:r>
+              <a:rPr sz="1600" b="0" i="1">
+                <a:solidFill>
+                  <a:srgbClr val="111111"/>
+                </a:solidFill>
+                <a:latin typeface="Cambria"/>
+              </a:rPr>
+              <a:t>i</a:t>
+            </a:r>
+            <a:r>
+              <a:rPr sz="1600" b="0" i="0">
+                <a:solidFill>
+                  <a:srgbClr val="111111"/>
+                </a:solidFill>
+                <a:latin typeface="Cambria"/>
+              </a:rPr>
+              <a:t> − 1, with C3 = 1 and L5 = 22, so the place </a:t>
+            </a:r>
+            <a:r>
+              <a:rPr sz="1600" b="0" i="1">
+                <a:solidFill>
+                  <a:srgbClr val="111111"/>
+                </a:solidFill>
+                <a:latin typeface="Cambria"/>
+              </a:rPr>
+              <a:t>k</a:t>
+            </a:r>
+            <a:r>
+              <a:rPr sz="1600" b="0" i="0">
+                <a:solidFill>
+                  <a:srgbClr val="111111"/>
+                </a:solidFill>
+                <a:latin typeface="Cambria"/>
+              </a:rPr>
+              <a:t> names every body in it.</a:t>
+            </a:r>
+          </a:p>
+        </p:txBody>
+      </p:sp>
+      <p:sp>
+        <p:nvSpPr>
+          <p:cNvPr id="9" name="Text: data"/>
+          <p:cNvSpPr txBox="1"/>
+          <p:nvPr/>
+        </p:nvSpPr>
+        <p:spPr>
+          <a:xfrm>
+            <a:off x="6446520" y="4892040"/>
             <a:ext cx="5193792" cy="914400"/>
           </a:xfrm>
           <a:prstGeom prst="rect">
@@ -4482,45 +4603,27 @@
               </a:spcAft>
             </a:pPr>
             <a:r>
-              <a:rPr sz="1600" b="0" i="0">
+              <a:rPr sz="1400" b="0" i="0">
                 <a:solidFill>
-                  <a:srgbClr val="111111"/>
+                  <a:srgbClr val="595959"/>
                 </a:solidFill>
                 <a:latin typeface="Cambria"/>
               </a:rPr>
-              <a:t>Seven measures per body. The view's place </a:t>
-            </a:r>
-            <a:r>
-              <a:rPr sz="1600" b="0" i="1">
-                <a:solidFill>
-                  <a:srgbClr val="111111"/>
-                </a:solidFill>
-                <a:latin typeface="Cambria"/>
-              </a:rPr>
-              <a:t>k</a:t>
-            </a:r>
-            <a:r>
-              <a:rPr sz="1600" b="0" i="0">
-                <a:solidFill>
-                  <a:srgbClr val="111111"/>
-                </a:solidFill>
-                <a:latin typeface="Cambria"/>
-              </a:rPr>
-              <a:t> among the 22 levels from C3 to L5 names every body in it.</a:t>
+              <a:t>2,000 synthetic columns drawn from Panjabi's published means and spreads; every place of every column scored, so most rates below are over tens of thousands of fields.</a:t>
             </a:r>
           </a:p>
         </p:txBody>
       </p:sp>
       <p:sp>
         <p:nvSpPr>
-          <p:cNvPr id="9" name="Text: data"/>
+          <p:cNvPr id="10" name="Text: footer"/>
           <p:cNvSpPr txBox="1"/>
           <p:nvPr/>
         </p:nvSpPr>
         <p:spPr>
           <a:xfrm>
-            <a:off x="6446520" y="4983480"/>
-            <a:ext cx="5193792" cy="1097280"/>
+            <a:off x="548640" y="6272784"/>
+            <a:ext cx="9966960" cy="411480"/>
           </a:xfrm>
           <a:prstGeom prst="rect">
             <a:avLst/>
@@ -4535,31 +4638,47 @@
           <a:p>
             <a:pPr algn="l">
               <a:spcAft>
-                <a:spcPts val="600"/>
+                <a:spcPts val="0"/>
               </a:spcAft>
             </a:pPr>
             <a:r>
-              <a:rPr sz="1400" b="0" i="0">
+              <a:rPr sz="1100" b="0" i="0">
                 <a:solidFill>
                   <a:srgbClr val="595959"/>
                 </a:solidFill>
                 <a:latin typeface="Cambria"/>
               </a:rPr>
-              <a:t>2,000 synthetic columns drawn from Panjabi's published means and spreads; every place of every column scored, so each rate below is over tens of thousands of fields.</a:t>
+              <a:t>Synthetic columns from Panjabi's published tables (Spine 1991;16:861, 888; 1992;17:299); no patient data.</a:t>
+            </a:r>
+          </a:p>
+          <a:p>
+            <a:pPr algn="l">
+              <a:spcAft>
+                <a:spcPts val="0"/>
+              </a:spcAft>
+            </a:pPr>
+            <a:r>
+              <a:rPr sz="1100" b="1" i="0">
+                <a:solidFill>
+                  <a:srgbClr val="111111"/>
+                </a:solidFill>
+                <a:latin typeface="Cambria"/>
+              </a:rPr>
+              <a:t>Confidential: pre-filing draft, not for distribution</a:t>
             </a:r>
           </a:p>
         </p:txBody>
       </p:sp>
       <p:sp>
         <p:nvSpPr>
-          <p:cNvPr id="10" name="Text: citation"/>
+          <p:cNvPr id="11" name="Text: slide number"/>
           <p:cNvSpPr txBox="1"/>
           <p:nvPr/>
         </p:nvSpPr>
         <p:spPr>
           <a:xfrm>
-            <a:off x="548640" y="6327648"/>
-            <a:ext cx="9692640" cy="365760"/>
+            <a:off x="10725912" y="6272784"/>
+            <a:ext cx="914400" cy="274320"/>
           </a:xfrm>
           <a:prstGeom prst="rect">
             <a:avLst/>
@@ -4572,52 +4691,13 @@
           </a:bodyPr>
           <a:lstStyle/>
           <a:p>
-            <a:pPr algn="l">
-              <a:spcAft>
-                <a:spcPts val="0"/>
-              </a:spcAft>
-            </a:pPr>
-            <a:r>
-              <a:rPr sz="900" b="0" i="0">
-                <a:solidFill>
-                  <a:srgbClr val="595959"/>
-                </a:solidFill>
-                <a:latin typeface="Cambria"/>
-              </a:rPr>
-              <a:t>Synthetic columns drawn from Panjabi's published means and spreads (Spine 1991;16:861, 888; 1992;17:299); no patient data. Retrospective modelling, 2026.</a:t>
-            </a:r>
-          </a:p>
-        </p:txBody>
-      </p:sp>
-      <p:sp>
-        <p:nvSpPr>
-          <p:cNvPr id="11" name="Text: slide number"/>
-          <p:cNvSpPr txBox="1"/>
-          <p:nvPr/>
-        </p:nvSpPr>
-        <p:spPr>
-          <a:xfrm>
-            <a:off x="10725912" y="6327648"/>
-            <a:ext cx="914400" cy="365760"/>
-          </a:xfrm>
-          <a:prstGeom prst="rect">
-            <a:avLst/>
-          </a:prstGeom>
-          <a:noFill/>
-        </p:spPr>
-        <p:txBody>
-          <a:bodyPr wrap="square" anchor="t" lIns="18288" rIns="18288" tIns="18288" bIns="18288">
-            <a:spAutoFit/>
-          </a:bodyPr>
-          <a:lstStyle/>
-          <a:p>
             <a:pPr algn="r">
               <a:spcAft>
                 <a:spcPts val="0"/>
               </a:spcAft>
             </a:pPr>
             <a:r>
-              <a:rPr sz="900" b="0" i="0">
+              <a:rPr sz="1100" b="0" i="0">
                 <a:solidFill>
                   <a:srgbClr val="595959"/>
                 </a:solidFill>
@@ -4683,14 +4763,14 @@
         <mc:Choice xmlns:a14="http://schemas.microsoft.com/office/drawing/2010/main" Requires="a14">
           <p:sp>
             <p:nvSpPr>
-              <p:cNvPr id="3" name="Equation: bayes" descr="LaTeX: p(k \mid x_{1:n}) = \dfrac{p(x_{1:n} \mid k)\, p(k)}{\sum_{k'=1}^{23-n} p(x_{1:n} \mid k')\, p(k')}"/>
+              <p:cNvPr id="3" name="Equation: bayes" descr="LaTeX: p(k \mid x_{1:n}) = \dfrac{p(x_{1:n} \mid k)\, p(k)}{\sum_{k'}\; p(x_{1:n} \mid k')\, p(k')}"/>
               <p:cNvSpPr txBox="1"/>
               <p:nvPr/>
             </p:nvSpPr>
             <p:spPr>
               <a:xfrm>
                 <a:off x="548640" y="1371600"/>
-                <a:ext cx="4547616" cy="1356360"/>
+                <a:ext cx="4447032" cy="1152144"/>
               </a:xfrm>
               <a:prstGeom prst="rect">
                 <a:avLst/>
@@ -4959,7 +5039,7 @@
                               <m:chr m:val="∑"/>
                               <m:limLoc m:val="undOvr"/>
                               <m:subHide m:val="off"/>
-                              <m:supHide m:val="off"/>
+                              <m:supHide m:val="on"/>
                             </m:naryPr>
                             <m:sub>
                               <m:r>
@@ -4985,29 +5065,6 @@
                                 </a:rPr>
                                 <m:t>′</m:t>
                               </m:r>
-                              <m:r>
-                                <m:rPr>
-                                  <m:sty m:val="p"/>
-                                </m:rPr>
-                                <a:rPr lang="en-US" i="1" sz="2400">
-                                  <a:solidFill>
-                                    <a:srgbClr val="111111"/>
-                                  </a:solidFill>
-                                  <a:latin typeface="Cambria Math"/>
-                                  <a:cs typeface="Cambria Math"/>
-                                </a:rPr>
-                                <m:t>=</m:t>
-                              </m:r>
-                              <m:r>
-                                <a:rPr lang="en-US" i="1" sz="2400">
-                                  <a:solidFill>
-                                    <a:srgbClr val="111111"/>
-                                  </a:solidFill>
-                                  <a:latin typeface="Cambria Math"/>
-                                  <a:cs typeface="Cambria Math"/>
-                                </a:rPr>
-                                <m:t>1</m:t>
-                              </m:r>
                             </m:sub>
                             <m:sup>
                               <m:r>
@@ -5018,30 +5075,7 @@
                                   <a:latin typeface="Cambria Math"/>
                                   <a:cs typeface="Cambria Math"/>
                                 </a:rPr>
-                                <m:t>23</m:t>
-                              </m:r>
-                              <m:r>
-                                <m:rPr>
-                                  <m:sty m:val="p"/>
-                                </m:rPr>
-                                <a:rPr lang="en-US" i="1" sz="2400">
-                                  <a:solidFill>
-                                    <a:srgbClr val="111111"/>
-                                  </a:solidFill>
-                                  <a:latin typeface="Cambria Math"/>
-                                  <a:cs typeface="Cambria Math"/>
-                                </a:rPr>
-                                <m:t>−</m:t>
-                              </m:r>
-                              <m:r>
-                                <a:rPr lang="en-US" i="1" sz="2400">
-                                  <a:solidFill>
-                                    <a:srgbClr val="111111"/>
-                                  </a:solidFill>
-                                  <a:latin typeface="Cambria Math"/>
-                                  <a:cs typeface="Cambria Math"/>
-                                </a:rPr>
-                                <m:t>n</m:t>
+                                <m:t>​</m:t>
                               </m:r>
                             </m:sup>
                             <m:e>
@@ -5053,10 +5087,20 @@
                                   <a:latin typeface="Cambria Math"/>
                                   <a:cs typeface="Cambria Math"/>
                                 </a:rPr>
-                                <m:t>p</m:t>
+                                <m:t> </m:t>
                               </m:r>
                             </m:e>
                           </m:nary>
+                          <m:r>
+                            <a:rPr lang="en-US" i="1" sz="2400">
+                              <a:solidFill>
+                                <a:srgbClr val="111111"/>
+                              </a:solidFill>
+                              <a:latin typeface="Cambria Math"/>
+                              <a:cs typeface="Cambria Math"/>
+                            </a:rPr>
+                            <m:t>p</m:t>
+                          </m:r>
                           <m:d>
                             <m:dPr>
                               <m:begChr m:val="("/>
@@ -5218,7 +5262,7 @@
         <mc:Fallback>
           <p:sp>
             <p:nvSpPr>
-              <p:cNvPr id="3" name="Equation: bayes" descr="LaTeX: p(k \mid x_{1:n}) = \dfrac{p(x_{1:n} \mid k)\, p(k)}{\sum_{k'=1}^{23-n} p(x_{1:n} \mid k')\, p(k')}"/>
+              <p:cNvPr id="3" name="Equation: bayes" descr="LaTeX: p(k \mid x_{1:n}) = \dfrac{p(x_{1:n} \mid k)\, p(k)}{\sum_{k'}\; p(x_{1:n} \mid k')\, p(k')}"/>
               <p:cNvSpPr txBox="1">
                 <a:spLocks noRot="1" noChangeAspect="1" noMove="1" noResize="1" noEditPoints="1" noAdjustHandles="1" noChangeArrowheads="1" noChangeShapeType="1" noTextEdit="1"/>
               </p:cNvSpPr>
@@ -5227,7 +5271,7 @@
             <p:spPr>
               <a:xfrm>
                 <a:off x="548640" y="1371600"/>
-                <a:ext cx="4547616" cy="1356360"/>
+                <a:ext cx="4447032" cy="1152144"/>
               </a:xfrm>
               <a:prstGeom prst="rect">
                 <a:avLst/>
@@ -5262,8 +5306,8 @@
         </p:nvSpPr>
         <p:spPr>
           <a:xfrm>
-            <a:off x="548640" y="2773680"/>
-            <a:ext cx="5257800" cy="457200"/>
+            <a:off x="548640" y="2569463"/>
+            <a:ext cx="5257800" cy="384048"/>
           </a:xfrm>
           <a:prstGeom prst="rect">
             <a:avLst/>
@@ -5278,7 +5322,7 @@
           <a:p>
             <a:pPr algn="l">
               <a:spcAft>
-                <a:spcPts val="600"/>
+                <a:spcPts val="0"/>
               </a:spcAft>
             </a:pPr>
             <a:r>
@@ -5297,7 +5341,25 @@
                 </a:solidFill>
                 <a:latin typeface="Cambria"/>
               </a:rPr>
-              <a:t>  ∝  likelihood  ×  </a:t>
+              <a:t>  ∝  </a:t>
+            </a:r>
+            <a:r>
+              <a:rPr sz="1800" b="1" i="0">
+                <a:solidFill>
+                  <a:srgbClr val="111111"/>
+                </a:solidFill>
+                <a:latin typeface="Cambria"/>
+              </a:rPr>
+              <a:t>likelihood</a:t>
+            </a:r>
+            <a:r>
+              <a:rPr sz="1800" b="0" i="0">
+                <a:solidFill>
+                  <a:srgbClr val="111111"/>
+                </a:solidFill>
+                <a:latin typeface="Cambria"/>
+              </a:rPr>
+              <a:t>  ×  </a:t>
             </a:r>
             <a:r>
               <a:rPr sz="1800" b="1" i="0">
@@ -5308,15 +5370,6 @@
               </a:rPr>
               <a:t>prior</a:t>
             </a:r>
-            <a:r>
-              <a:rPr sz="1800" b="0" i="0">
-                <a:solidFill>
-                  <a:srgbClr val="111111"/>
-                </a:solidFill>
-                <a:latin typeface="Cambria"/>
-              </a:rPr>
-              <a:t>,  over all 23 − n places</a:t>
-            </a:r>
           </a:p>
         </p:txBody>
       </p:sp>
@@ -5324,14 +5377,14 @@
         <mc:Choice xmlns:a14="http://schemas.microsoft.com/office/drawing/2010/main" Requires="a14">
           <p:sp>
             <p:nvSpPr>
-              <p:cNvPr id="5" name="Equation: likelihood" descr="LaTeX: p(x_{1:n} \mid k) = \int \prod_{m=1}^{7} \mathcal{N}\left(x_{m,1:n} \mid s\,\mu_{m,k},\;\Sigma_{m,k}(s)\right)\, p(s)\, ds"/>
+              <p:cNvPr id="5" name="Equation: likelihood" descr="LaTeX: p(x_{1:n} \mid k) = \int \prod_{m=1}^{7} \mathcal{N}\left(x_{m,1:n} \mid s\,\mu_{m,k:k+n-1},\;\Sigma_{m,k:k+n-1}(s)\right) p(s)\, ds"/>
               <p:cNvSpPr txBox="1"/>
               <p:nvPr/>
             </p:nvSpPr>
             <p:spPr>
               <a:xfrm>
-                <a:off x="548640" y="3413760"/>
-                <a:ext cx="5257800" cy="677099"/>
+                <a:off x="548640" y="3072384"/>
+                <a:ext cx="5257800" cy="536753"/>
               </a:xfrm>
               <a:prstGeom prst="rect">
                 <a:avLst/>
@@ -5352,7 +5405,7 @@
                     </m:oMathParaPr>
                     <m:oMath>
                       <m:r>
-                        <a:rPr lang="en-US" i="1" sz="1799">
+                        <a:rPr lang="en-US" i="1" sz="1409">
                           <a:solidFill>
                             <a:srgbClr val="111111"/>
                           </a:solidFill>
@@ -5372,7 +5425,7 @@
                           <m:sSub>
                             <m:e>
                               <m:r>
-                                <a:rPr lang="en-US" i="1" sz="1799">
+                                <a:rPr lang="en-US" i="1" sz="1409">
                                   <a:solidFill>
                                     <a:srgbClr val="111111"/>
                                   </a:solidFill>
@@ -5384,7 +5437,7 @@
                             </m:e>
                             <m:sub>
                               <m:r>
-                                <a:rPr lang="en-US" i="1" sz="1799">
+                                <a:rPr lang="en-US" i="1" sz="1409">
                                   <a:solidFill>
                                     <a:srgbClr val="111111"/>
                                   </a:solidFill>
@@ -5397,7 +5450,7 @@
                                 <m:rPr>
                                   <m:sty m:val="p"/>
                                 </m:rPr>
-                                <a:rPr lang="en-US" i="1" sz="1799">
+                                <a:rPr lang="en-US" i="1" sz="1409">
                                   <a:solidFill>
                                     <a:srgbClr val="111111"/>
                                   </a:solidFill>
@@ -5407,7 +5460,7 @@
                                 <m:t>:</m:t>
                               </m:r>
                               <m:r>
-                                <a:rPr lang="en-US" i="1" sz="1799">
+                                <a:rPr lang="en-US" i="1" sz="1409">
                                   <a:solidFill>
                                     <a:srgbClr val="111111"/>
                                   </a:solidFill>
@@ -5422,7 +5475,7 @@
                             <m:rPr>
                               <m:sty m:val="p"/>
                             </m:rPr>
-                            <a:rPr lang="en-US" i="1" sz="1799">
+                            <a:rPr lang="en-US" i="1" sz="1409">
                               <a:solidFill>
                                 <a:srgbClr val="111111"/>
                               </a:solidFill>
@@ -5432,7 +5485,7 @@
                             <m:t>∣</m:t>
                           </m:r>
                           <m:r>
-                            <a:rPr lang="en-US" i="1" sz="1799">
+                            <a:rPr lang="en-US" i="1" sz="1409">
                               <a:solidFill>
                                 <a:srgbClr val="111111"/>
                               </a:solidFill>
@@ -5447,7 +5500,7 @@
                         <m:rPr>
                           <m:sty m:val="p"/>
                         </m:rPr>
-                        <a:rPr lang="en-US" i="1" sz="1799">
+                        <a:rPr lang="en-US" i="1" sz="1409">
                           <a:solidFill>
                             <a:srgbClr val="111111"/>
                           </a:solidFill>
@@ -5460,7 +5513,7 @@
                         <m:rPr>
                           <m:sty m:val="p"/>
                         </m:rPr>
-                        <a:rPr lang="en-US" i="1" sz="1799">
+                        <a:rPr lang="en-US" i="1" sz="1409">
                           <a:solidFill>
                             <a:srgbClr val="111111"/>
                           </a:solidFill>
@@ -5478,7 +5531,7 @@
                         </m:naryPr>
                         <m:sub>
                           <m:r>
-                            <a:rPr lang="en-US" i="1" sz="1799">
+                            <a:rPr lang="en-US" i="1" sz="1409">
                               <a:solidFill>
                                 <a:srgbClr val="111111"/>
                               </a:solidFill>
@@ -5491,7 +5544,7 @@
                             <m:rPr>
                               <m:sty m:val="p"/>
                             </m:rPr>
-                            <a:rPr lang="en-US" i="1" sz="1799">
+                            <a:rPr lang="en-US" i="1" sz="1409">
                               <a:solidFill>
                                 <a:srgbClr val="111111"/>
                               </a:solidFill>
@@ -5501,7 +5554,7 @@
                             <m:t>=</m:t>
                           </m:r>
                           <m:r>
-                            <a:rPr lang="en-US" i="1" sz="1799">
+                            <a:rPr lang="en-US" i="1" sz="1409">
                               <a:solidFill>
                                 <a:srgbClr val="111111"/>
                               </a:solidFill>
@@ -5513,7 +5566,7 @@
                         </m:sub>
                         <m:sup>
                           <m:r>
-                            <a:rPr lang="en-US" i="1" sz="1799">
+                            <a:rPr lang="en-US" i="1" sz="1409">
                               <a:solidFill>
                                 <a:srgbClr val="111111"/>
                               </a:solidFill>
@@ -5529,7 +5582,7 @@
                               <m:sty m:val="p"/>
                               <m:scr m:val="script"/>
                             </m:rPr>
-                            <a:rPr lang="en-US" i="1" sz="1799">
+                            <a:rPr lang="en-US" i="1" sz="1409">
                               <a:solidFill>
                                 <a:srgbClr val="111111"/>
                               </a:solidFill>
@@ -5551,7 +5604,7 @@
                           <m:sSub>
                             <m:e>
                               <m:r>
-                                <a:rPr lang="en-US" i="1" sz="1799">
+                                <a:rPr lang="en-US" i="1" sz="1409">
                                   <a:solidFill>
                                     <a:srgbClr val="111111"/>
                                   </a:solidFill>
@@ -5563,7 +5616,7 @@
                             </m:e>
                             <m:sub>
                               <m:r>
-                                <a:rPr lang="en-US" i="1" sz="1799">
+                                <a:rPr lang="en-US" i="1" sz="1409">
                                   <a:solidFill>
                                     <a:srgbClr val="111111"/>
                                   </a:solidFill>
@@ -5576,7 +5629,7 @@
                                 <m:rPr>
                                   <m:sty m:val="p"/>
                                 </m:rPr>
-                                <a:rPr lang="en-US" i="1" sz="1799">
+                                <a:rPr lang="en-US" i="1" sz="1409">
                                   <a:solidFill>
                                     <a:srgbClr val="111111"/>
                                   </a:solidFill>
@@ -5586,7 +5639,7 @@
                                 <m:t>,</m:t>
                               </m:r>
                               <m:r>
-                                <a:rPr lang="en-US" i="1" sz="1799">
+                                <a:rPr lang="en-US" i="1" sz="1409">
                                   <a:solidFill>
                                     <a:srgbClr val="111111"/>
                                   </a:solidFill>
@@ -5599,7 +5652,7 @@
                                 <m:rPr>
                                   <m:sty m:val="p"/>
                                 </m:rPr>
-                                <a:rPr lang="en-US" i="1" sz="1799">
+                                <a:rPr lang="en-US" i="1" sz="1409">
                                   <a:solidFill>
                                     <a:srgbClr val="111111"/>
                                   </a:solidFill>
@@ -5609,7 +5662,7 @@
                                 <m:t>:</m:t>
                               </m:r>
                               <m:r>
-                                <a:rPr lang="en-US" i="1" sz="1799">
+                                <a:rPr lang="en-US" i="1" sz="1409">
                                   <a:solidFill>
                                     <a:srgbClr val="111111"/>
                                   </a:solidFill>
@@ -5624,7 +5677,7 @@
                             <m:rPr>
                               <m:sty m:val="p"/>
                             </m:rPr>
-                            <a:rPr lang="en-US" i="1" sz="1799">
+                            <a:rPr lang="en-US" i="1" sz="1409">
                               <a:solidFill>
                                 <a:srgbClr val="111111"/>
                               </a:solidFill>
@@ -5634,7 +5687,7 @@
                             <m:t>∣</m:t>
                           </m:r>
                           <m:r>
-                            <a:rPr lang="en-US" i="1" sz="1799">
+                            <a:rPr lang="en-US" i="1" sz="1409">
                               <a:solidFill>
                                 <a:srgbClr val="111111"/>
                               </a:solidFill>
@@ -5644,7 +5697,7 @@
                             <m:t>s</m:t>
                           </m:r>
                           <m:r>
-                            <a:rPr lang="en-US" i="1" sz="1799">
+                            <a:rPr lang="en-US" i="1" sz="1409">
                               <a:solidFill>
                                 <a:srgbClr val="111111"/>
                               </a:solidFill>
@@ -5656,7 +5709,7 @@
                           <m:sSub>
                             <m:e>
                               <m:r>
-                                <a:rPr lang="en-US" i="1" sz="1799">
+                                <a:rPr lang="en-US" i="1" sz="1409">
                                   <a:solidFill>
                                     <a:srgbClr val="111111"/>
                                   </a:solidFill>
@@ -5668,7 +5721,7 @@
                             </m:e>
                             <m:sub>
                               <m:r>
-                                <a:rPr lang="en-US" i="1" sz="1799">
+                                <a:rPr lang="en-US" i="1" sz="1409">
                                   <a:solidFill>
                                     <a:srgbClr val="111111"/>
                                   </a:solidFill>
@@ -5681,7 +5734,7 @@
                                 <m:rPr>
                                   <m:sty m:val="p"/>
                                 </m:rPr>
-                                <a:rPr lang="en-US" i="1" sz="1799">
+                                <a:rPr lang="en-US" i="1" sz="1409">
                                   <a:solidFill>
                                     <a:srgbClr val="111111"/>
                                   </a:solidFill>
@@ -5691,7 +5744,7 @@
                                 <m:t>,</m:t>
                               </m:r>
                               <m:r>
-                                <a:rPr lang="en-US" i="1" sz="1799">
+                                <a:rPr lang="en-US" i="1" sz="1409">
                                   <a:solidFill>
                                     <a:srgbClr val="111111"/>
                                   </a:solidFill>
@@ -5700,13 +5753,82 @@
                                 </a:rPr>
                                 <m:t>k</m:t>
                               </m:r>
+                              <m:r>
+                                <m:rPr>
+                                  <m:sty m:val="p"/>
+                                </m:rPr>
+                                <a:rPr lang="en-US" i="1" sz="1409">
+                                  <a:solidFill>
+                                    <a:srgbClr val="111111"/>
+                                  </a:solidFill>
+                                  <a:latin typeface="Cambria Math"/>
+                                  <a:cs typeface="Cambria Math"/>
+                                </a:rPr>
+                                <m:t>:</m:t>
+                              </m:r>
+                              <m:r>
+                                <a:rPr lang="en-US" i="1" sz="1409">
+                                  <a:solidFill>
+                                    <a:srgbClr val="111111"/>
+                                  </a:solidFill>
+                                  <a:latin typeface="Cambria Math"/>
+                                  <a:cs typeface="Cambria Math"/>
+                                </a:rPr>
+                                <m:t>k</m:t>
+                              </m:r>
+                              <m:r>
+                                <m:rPr>
+                                  <m:sty m:val="p"/>
+                                </m:rPr>
+                                <a:rPr lang="en-US" i="1" sz="1409">
+                                  <a:solidFill>
+                                    <a:srgbClr val="111111"/>
+                                  </a:solidFill>
+                                  <a:latin typeface="Cambria Math"/>
+                                  <a:cs typeface="Cambria Math"/>
+                                </a:rPr>
+                                <m:t>+</m:t>
+                              </m:r>
+                              <m:r>
+                                <a:rPr lang="en-US" i="1" sz="1409">
+                                  <a:solidFill>
+                                    <a:srgbClr val="111111"/>
+                                  </a:solidFill>
+                                  <a:latin typeface="Cambria Math"/>
+                                  <a:cs typeface="Cambria Math"/>
+                                </a:rPr>
+                                <m:t>n</m:t>
+                              </m:r>
+                              <m:r>
+                                <m:rPr>
+                                  <m:sty m:val="p"/>
+                                </m:rPr>
+                                <a:rPr lang="en-US" i="1" sz="1409">
+                                  <a:solidFill>
+                                    <a:srgbClr val="111111"/>
+                                  </a:solidFill>
+                                  <a:latin typeface="Cambria Math"/>
+                                  <a:cs typeface="Cambria Math"/>
+                                </a:rPr>
+                                <m:t>−</m:t>
+                              </m:r>
+                              <m:r>
+                                <a:rPr lang="en-US" i="1" sz="1409">
+                                  <a:solidFill>
+                                    <a:srgbClr val="111111"/>
+                                  </a:solidFill>
+                                  <a:latin typeface="Cambria Math"/>
+                                  <a:cs typeface="Cambria Math"/>
+                                </a:rPr>
+                                <m:t>1</m:t>
+                              </m:r>
                             </m:sub>
                           </m:sSub>
                           <m:r>
                             <m:rPr>
                               <m:sty m:val="p"/>
                             </m:rPr>
-                            <a:rPr lang="en-US" i="1" sz="1799">
+                            <a:rPr lang="en-US" i="1" sz="1409">
                               <a:solidFill>
                                 <a:srgbClr val="111111"/>
                               </a:solidFill>
@@ -5716,7 +5838,7 @@
                             <m:t>,</m:t>
                           </m:r>
                           <m:r>
-                            <a:rPr lang="en-US" i="1" sz="1799">
+                            <a:rPr lang="en-US" i="1" sz="1409">
                               <a:solidFill>
                                 <a:srgbClr val="111111"/>
                               </a:solidFill>
@@ -5728,7 +5850,7 @@
                           <m:sSub>
                             <m:e>
                               <m:r>
-                                <a:rPr lang="en-US" i="1" sz="1799">
+                                <a:rPr lang="en-US" i="1" sz="1409">
                                   <a:solidFill>
                                     <a:srgbClr val="111111"/>
                                   </a:solidFill>
@@ -5740,7 +5862,7 @@
                             </m:e>
                             <m:sub>
                               <m:r>
-                                <a:rPr lang="en-US" i="1" sz="1799">
+                                <a:rPr lang="en-US" i="1" sz="1409">
                                   <a:solidFill>
                                     <a:srgbClr val="111111"/>
                                   </a:solidFill>
@@ -5753,7 +5875,7 @@
                                 <m:rPr>
                                   <m:sty m:val="p"/>
                                 </m:rPr>
-                                <a:rPr lang="en-US" i="1" sz="1799">
+                                <a:rPr lang="en-US" i="1" sz="1409">
                                   <a:solidFill>
                                     <a:srgbClr val="111111"/>
                                   </a:solidFill>
@@ -5763,7 +5885,7 @@
                                 <m:t>,</m:t>
                               </m:r>
                               <m:r>
-                                <a:rPr lang="en-US" i="1" sz="1799">
+                                <a:rPr lang="en-US" i="1" sz="1409">
                                   <a:solidFill>
                                     <a:srgbClr val="111111"/>
                                   </a:solidFill>
@@ -5771,6 +5893,75 @@
                                   <a:cs typeface="Cambria Math"/>
                                 </a:rPr>
                                 <m:t>k</m:t>
+                              </m:r>
+                              <m:r>
+                                <m:rPr>
+                                  <m:sty m:val="p"/>
+                                </m:rPr>
+                                <a:rPr lang="en-US" i="1" sz="1409">
+                                  <a:solidFill>
+                                    <a:srgbClr val="111111"/>
+                                  </a:solidFill>
+                                  <a:latin typeface="Cambria Math"/>
+                                  <a:cs typeface="Cambria Math"/>
+                                </a:rPr>
+                                <m:t>:</m:t>
+                              </m:r>
+                              <m:r>
+                                <a:rPr lang="en-US" i="1" sz="1409">
+                                  <a:solidFill>
+                                    <a:srgbClr val="111111"/>
+                                  </a:solidFill>
+                                  <a:latin typeface="Cambria Math"/>
+                                  <a:cs typeface="Cambria Math"/>
+                                </a:rPr>
+                                <m:t>k</m:t>
+                              </m:r>
+                              <m:r>
+                                <m:rPr>
+                                  <m:sty m:val="p"/>
+                                </m:rPr>
+                                <a:rPr lang="en-US" i="1" sz="1409">
+                                  <a:solidFill>
+                                    <a:srgbClr val="111111"/>
+                                  </a:solidFill>
+                                  <a:latin typeface="Cambria Math"/>
+                                  <a:cs typeface="Cambria Math"/>
+                                </a:rPr>
+                                <m:t>+</m:t>
+                              </m:r>
+                              <m:r>
+                                <a:rPr lang="en-US" i="1" sz="1409">
+                                  <a:solidFill>
+                                    <a:srgbClr val="111111"/>
+                                  </a:solidFill>
+                                  <a:latin typeface="Cambria Math"/>
+                                  <a:cs typeface="Cambria Math"/>
+                                </a:rPr>
+                                <m:t>n</m:t>
+                              </m:r>
+                              <m:r>
+                                <m:rPr>
+                                  <m:sty m:val="p"/>
+                                </m:rPr>
+                                <a:rPr lang="en-US" i="1" sz="1409">
+                                  <a:solidFill>
+                                    <a:srgbClr val="111111"/>
+                                  </a:solidFill>
+                                  <a:latin typeface="Cambria Math"/>
+                                  <a:cs typeface="Cambria Math"/>
+                                </a:rPr>
+                                <m:t>−</m:t>
+                              </m:r>
+                              <m:r>
+                                <a:rPr lang="en-US" i="1" sz="1409">
+                                  <a:solidFill>
+                                    <a:srgbClr val="111111"/>
+                                  </a:solidFill>
+                                  <a:latin typeface="Cambria Math"/>
+                                  <a:cs typeface="Cambria Math"/>
+                                </a:rPr>
+                                <m:t>1</m:t>
                               </m:r>
                             </m:sub>
                           </m:sSub>
@@ -5783,7 +5974,7 @@
                             </m:dPr>
                             <m:e>
                               <m:r>
-                                <a:rPr lang="en-US" i="1" sz="1799">
+                                <a:rPr lang="en-US" i="1" sz="1409">
                                   <a:solidFill>
                                     <a:srgbClr val="111111"/>
                                   </a:solidFill>
@@ -5797,17 +5988,7 @@
                         </m:e>
                       </m:d>
                       <m:r>
-                        <a:rPr lang="en-US" i="1" sz="1799">
-                          <a:solidFill>
-                            <a:srgbClr val="111111"/>
-                          </a:solidFill>
-                          <a:latin typeface="Cambria Math"/>
-                          <a:cs typeface="Cambria Math"/>
-                        </a:rPr>
-                        <m:t> </m:t>
-                      </m:r>
-                      <m:r>
-                        <a:rPr lang="en-US" i="1" sz="1799">
+                        <a:rPr lang="en-US" i="1" sz="1409">
                           <a:solidFill>
                             <a:srgbClr val="111111"/>
                           </a:solidFill>
@@ -5825,7 +6006,7 @@
                         </m:dPr>
                         <m:e>
                           <m:r>
-                            <a:rPr lang="en-US" i="1" sz="1799">
+                            <a:rPr lang="en-US" i="1" sz="1409">
                               <a:solidFill>
                                 <a:srgbClr val="111111"/>
                               </a:solidFill>
@@ -5837,7 +6018,7 @@
                         </m:e>
                       </m:d>
                       <m:r>
-                        <a:rPr lang="en-US" i="1" sz="1799">
+                        <a:rPr lang="en-US" i="1" sz="1409">
                           <a:solidFill>
                             <a:srgbClr val="111111"/>
                           </a:solidFill>
@@ -5847,7 +6028,7 @@
                         <m:t> </m:t>
                       </m:r>
                       <m:r>
-                        <a:rPr lang="en-US" i="1" sz="1799">
+                        <a:rPr lang="en-US" i="1" sz="1409">
                           <a:solidFill>
                             <a:srgbClr val="111111"/>
                           </a:solidFill>
@@ -5857,7 +6038,7 @@
                         <m:t>d</m:t>
                       </m:r>
                       <m:r>
-                        <a:rPr lang="en-US" i="1" sz="1799">
+                        <a:rPr lang="en-US" i="1" sz="1409">
                           <a:solidFill>
                             <a:srgbClr val="111111"/>
                           </a:solidFill>
@@ -5869,7 +6050,7 @@
                     </m:oMath>
                   </m:oMathPara>
                 </a14:m>
-                <a:endParaRPr lang="en-US" sz="1799"/>
+                <a:endParaRPr lang="en-US" sz="1409"/>
               </a:p>
             </p:txBody>
           </p:sp>
@@ -5877,7 +6058,7 @@
         <mc:Fallback>
           <p:sp>
             <p:nvSpPr>
-              <p:cNvPr id="5" name="Equation: likelihood" descr="LaTeX: p(x_{1:n} \mid k) = \int \prod_{m=1}^{7} \mathcal{N}\left(x_{m,1:n} \mid s\,\mu_{m,k},\;\Sigma_{m,k}(s)\right)\, p(s)\, ds"/>
+              <p:cNvPr id="5" name="Equation: likelihood" descr="LaTeX: p(x_{1:n} \mid k) = \int \prod_{m=1}^{7} \mathcal{N}\left(x_{m,1:n} \mid s\,\mu_{m,k:k+n-1},\;\Sigma_{m,k:k+n-1}(s)\right) p(s)\, ds"/>
               <p:cNvSpPr txBox="1">
                 <a:spLocks noRot="1" noChangeAspect="1" noMove="1" noResize="1" noEditPoints="1" noAdjustHandles="1" noChangeArrowheads="1" noChangeShapeType="1" noTextEdit="1"/>
               </p:cNvSpPr>
@@ -5885,8 +6066,8 @@
             </p:nvSpPr>
             <p:spPr>
               <a:xfrm>
-                <a:off x="548640" y="3413760"/>
-                <a:ext cx="5257800" cy="677099"/>
+                <a:off x="548640" y="3072384"/>
+                <a:ext cx="5257800" cy="536753"/>
               </a:xfrm>
               <a:prstGeom prst="rect">
                 <a:avLst/>
@@ -5913,509 +6094,18 @@
           </p:sp>
         </mc:Fallback>
       </mc:AlternateContent>
-      <p:sp>
-        <p:nvSpPr>
-          <p:cNvPr id="6" name="Text: how"/>
-          <p:cNvSpPr txBox="1"/>
-          <p:nvPr/>
-        </p:nvSpPr>
-        <p:spPr>
-          <a:xfrm>
-            <a:off x="548640" y="4273739"/>
-            <a:ext cx="5257800" cy="1944180"/>
-          </a:xfrm>
-          <a:prstGeom prst="rect">
-            <a:avLst/>
-          </a:prstGeom>
-          <a:noFill/>
-        </p:spPr>
-        <p:txBody>
-          <a:bodyPr wrap="square" anchor="t" lIns="18288" rIns="18288" tIns="18288" bIns="18288">
-            <a:spAutoFit/>
-          </a:bodyPr>
-          <a:lstStyle/>
-          <a:p>
-            <a:pPr algn="l">
-              <a:spcAft>
-                <a:spcPts val="800"/>
-              </a:spcAft>
-            </a:pPr>
-            <a:r>
-              <a:rPr sz="1500" b="0" i="0">
-                <a:solidFill>
-                  <a:srgbClr val="111111"/>
-                </a:solidFill>
-                <a:latin typeface="Cambria"/>
-              </a:rPr>
-              <a:t>Every place is scored; nothing is fitted.</a:t>
-            </a:r>
-          </a:p>
-          <a:p>
-            <a:pPr algn="l">
-              <a:spcAft>
-                <a:spcPts val="800"/>
-              </a:spcAft>
-            </a:pPr>
-            <a:r>
-              <a:rPr sz="1500" b="0" i="0">
-                <a:solidFill>
-                  <a:srgbClr val="111111"/>
-                </a:solidFill>
-                <a:latin typeface="Cambria"/>
-              </a:rPr>
-              <a:t>Given the patient's size </a:t>
-            </a:r>
-            <a:r>
-              <a:rPr sz="1500" b="0" i="1">
-                <a:solidFill>
-                  <a:srgbClr val="111111"/>
-                </a:solidFill>
-                <a:latin typeface="Cambria"/>
-              </a:rPr>
-              <a:t>s</a:t>
-            </a:r>
-            <a:r>
-              <a:rPr sz="1500" b="0" i="0">
-                <a:solidFill>
-                  <a:srgbClr val="111111"/>
-                </a:solidFill>
-                <a:latin typeface="Cambria"/>
-              </a:rPr>
-              <a:t>, each measure's values are Gaussian with a diagonal-plus-rank-one covariance, inverted in closed form; </a:t>
-            </a:r>
-            <a:r>
-              <a:rPr sz="1500" b="0" i="1">
-                <a:solidFill>
-                  <a:srgbClr val="111111"/>
-                </a:solidFill>
-                <a:latin typeface="Cambria"/>
-              </a:rPr>
-              <a:t>log s</a:t>
-            </a:r>
-            <a:r>
-              <a:rPr sz="1500" b="0" i="0">
-                <a:solidFill>
-                  <a:srgbClr val="111111"/>
-                </a:solidFill>
-                <a:latin typeface="Cambria"/>
-              </a:rPr>
-              <a:t> ~ N(0, 0.07²) is integrated by 161-node Gauss–Hermite quadrature.</a:t>
-            </a:r>
-          </a:p>
-          <a:p>
-            <a:pPr algn="l">
-              <a:spcAft>
-                <a:spcPts val="800"/>
-              </a:spcAft>
-            </a:pPr>
-            <a:r>
-              <a:rPr sz="1500" b="0" i="0">
-                <a:solidFill>
-                  <a:srgbClr val="111111"/>
-                </a:solidFill>
-                <a:latin typeface="Cambria"/>
-              </a:rPr>
-              <a:t>So it is the Bayes rule for this generator: no formula or network on the same measures names more fields correctly on average.</a:t>
-            </a:r>
-          </a:p>
-        </p:txBody>
-      </p:sp>
-      <p:pic>
-        <p:nvPicPr>
-          <p:cNvPr id="7" name="Figure: exact_slide_posterior" descr="Bayes' rule over every place. Top, the prior over the middle body's level; below, its posterior from one, three and nine bodies centred on T12, for the scoring column whose three-body posterior at T12 is the median of 2000. Uniform prior, so the posterior is the normalised likelihood. Synthetic columns."/>
-          <p:cNvPicPr>
-            <a:picLocks noChangeAspect="1"/>
-          </p:cNvPicPr>
-          <p:nvPr/>
-        </p:nvPicPr>
-        <p:blipFill>
-          <a:blip r:embed="rId4"/>
-          <a:stretch>
-            <a:fillRect/>
-          </a:stretch>
-        </p:blipFill>
-        <p:spPr>
-          <a:xfrm>
-            <a:off x="5897880" y="1371600"/>
-            <a:ext cx="5760720" cy="4800600"/>
-          </a:xfrm>
-          <a:prstGeom prst="rect">
-            <a:avLst/>
-          </a:prstGeom>
-        </p:spPr>
-      </p:pic>
-      <p:sp>
-        <p:nvSpPr>
-          <p:cNvPr id="8" name="Text: citation"/>
-          <p:cNvSpPr txBox="1"/>
-          <p:nvPr/>
-        </p:nvSpPr>
-        <p:spPr>
-          <a:xfrm>
-            <a:off x="548640" y="6327648"/>
-            <a:ext cx="9692640" cy="365760"/>
-          </a:xfrm>
-          <a:prstGeom prst="rect">
-            <a:avLst/>
-          </a:prstGeom>
-          <a:noFill/>
-        </p:spPr>
-        <p:txBody>
-          <a:bodyPr wrap="square" anchor="t" lIns="18288" rIns="18288" tIns="18288" bIns="18288">
-            <a:spAutoFit/>
-          </a:bodyPr>
-          <a:lstStyle/>
-          <a:p>
-            <a:pPr algn="l">
-              <a:spcAft>
-                <a:spcPts val="0"/>
-              </a:spcAft>
-            </a:pPr>
-            <a:r>
-              <a:rPr sz="900" b="0" i="0">
-                <a:solidFill>
-                  <a:srgbClr val="595959"/>
-                </a:solidFill>
-                <a:latin typeface="Cambria"/>
-              </a:rPr>
-              <a:t>Synthetic columns drawn from Panjabi's published means and spreads (Spine 1991;16:861, 888; 1992;17:299); no patient data. Retrospective modelling, 2026.</a:t>
-            </a:r>
-          </a:p>
-        </p:txBody>
-      </p:sp>
-      <p:sp>
-        <p:nvSpPr>
-          <p:cNvPr id="9" name="Text: slide number"/>
-          <p:cNvSpPr txBox="1"/>
-          <p:nvPr/>
-        </p:nvSpPr>
-        <p:spPr>
-          <a:xfrm>
-            <a:off x="10725912" y="6327648"/>
-            <a:ext cx="914400" cy="365760"/>
-          </a:xfrm>
-          <a:prstGeom prst="rect">
-            <a:avLst/>
-          </a:prstGeom>
-          <a:noFill/>
-        </p:spPr>
-        <p:txBody>
-          <a:bodyPr wrap="square" anchor="t" lIns="18288" rIns="18288" tIns="18288" bIns="18288">
-            <a:spAutoFit/>
-          </a:bodyPr>
-          <a:lstStyle/>
-          <a:p>
-            <a:pPr algn="r">
-              <a:spcAft>
-                <a:spcPts val="0"/>
-              </a:spcAft>
-            </a:pPr>
-            <a:r>
-              <a:rPr sz="900" b="0" i="0">
-                <a:solidFill>
-                  <a:srgbClr val="595959"/>
-                </a:solidFill>
-                <a:latin typeface="Cambria"/>
-              </a:rPr>
-              <a:t>2 / 5</a:t>
-            </a:r>
-          </a:p>
-        </p:txBody>
-      </p:sp>
-    </p:spTree>
-  </p:cSld>
-  <p:clrMapOvr>
-    <a:masterClrMapping/>
-  </p:clrMapOvr>
-</p:sld>
-</file>
-
-<file path=ppt/slides/slide3.xml><?xml version="1.0" encoding="utf-8"?>
-<p:sld xmlns:a="http://schemas.openxmlformats.org/drawingml/2006/main" xmlns:p="http://schemas.openxmlformats.org/presentationml/2006/main" xmlns:r="http://schemas.openxmlformats.org/officeDocument/2006/relationships">
-  <p:cSld>
-    <p:spTree>
-      <p:nvGrpSpPr>
-        <p:cNvPr id="1" name=""/>
-        <p:cNvGrpSpPr/>
-        <p:nvPr/>
-      </p:nvGrpSpPr>
-      <p:grpSpPr/>
-      <p:sp>
-        <p:nvSpPr>
-          <p:cNvPr id="2" name="Title 1"/>
-          <p:cNvSpPr>
-            <a:spLocks noGrp="1"/>
-          </p:cNvSpPr>
-          <p:nvPr>
-            <p:ph type="title"/>
-          </p:nvPr>
-        </p:nvSpPr>
-        <p:spPr>
-          <a:xfrm>
-            <a:off x="548640" y="274320"/>
-            <a:ext cx="11091672" cy="960120"/>
-          </a:xfrm>
-        </p:spPr>
-        <p:txBody>
-          <a:bodyPr wrap="square" anchor="b"/>
-          <a:lstStyle/>
-          <a:p>
-            <a:pPr algn="l"/>
-            <a:r>
-              <a:rPr sz="2800" b="1">
-                <a:solidFill>
-                  <a:srgbClr val="111111"/>
-                </a:solidFill>
-                <a:latin typeface="Cambria"/>
-              </a:rPr>
-              <a:t>Three bodies name 73% exactly; when sure, the name is right 99.8%</a:t>
-            </a:r>
-          </a:p>
-        </p:txBody>
-      </p:sp>
-      <p:pic>
-        <p:nvPicPr>
-          <p:cNvPr id="3" name="Figure: exact_slide_ceiling" descr="Share of fields named exactly by the exact rule (solid) and named at posterior 0.99 (dashed), both planes, by consecutive bodies in view; crosses, a linear classifier fitted on other synthetic columns, scored on the first 1,000. 2000 synthetic columns."/>
-          <p:cNvPicPr>
-            <a:picLocks noChangeAspect="1"/>
-          </p:cNvPicPr>
-          <p:nvPr/>
-        </p:nvPicPr>
-        <p:blipFill>
-          <a:blip r:embed="rId2"/>
-          <a:stretch>
-            <a:fillRect/>
-          </a:stretch>
-        </p:blipFill>
-        <p:spPr>
-          <a:xfrm>
-            <a:off x="548640" y="1325880"/>
-            <a:ext cx="5120640" cy="3794760"/>
-          </a:xfrm>
-          <a:prstGeom prst="rect">
-            <a:avLst/>
-          </a:prstGeom>
-        </p:spPr>
-      </p:pic>
-      <p:pic>
-        <p:nvPicPr>
-          <p:cNvPr id="4" name="Figure: exact_slide_calibration" descr="The posterior is the chance of being right: error the posterior predicts against error counted, by posterior bin, one, three and nine bodies, both planes; dotted, exact agreement; a bin with no error counted sits on the floor. 2000 synthetic columns."/>
-          <p:cNvPicPr>
-            <a:picLocks noChangeAspect="1"/>
-          </p:cNvPicPr>
-          <p:nvPr/>
-        </p:nvPicPr>
-        <p:blipFill>
-          <a:blip r:embed="rId3"/>
-          <a:stretch>
-            <a:fillRect/>
-          </a:stretch>
-        </p:blipFill>
-        <p:spPr>
-          <a:xfrm>
-            <a:off x="5715000" y="1371600"/>
-            <a:ext cx="3337560" cy="3291840"/>
-          </a:xfrm>
-          <a:prstGeom prst="rect">
-            <a:avLst/>
-          </a:prstGeom>
-        </p:spPr>
-      </p:pic>
-      <p:sp>
-        <p:nvSpPr>
-          <p:cNvPr id="5" name="Text: stat three bodies"/>
-          <p:cNvSpPr txBox="1"/>
-          <p:nvPr/>
-        </p:nvSpPr>
-        <p:spPr>
-          <a:xfrm>
-            <a:off x="9189720" y="1371600"/>
-            <a:ext cx="2450592" cy="1051560"/>
-          </a:xfrm>
-          <a:prstGeom prst="rect">
-            <a:avLst/>
-          </a:prstGeom>
-          <a:noFill/>
-        </p:spPr>
-        <p:txBody>
-          <a:bodyPr wrap="square" anchor="t" lIns="18288" rIns="18288" tIns="18288" bIns="18288">
-            <a:spAutoFit/>
-          </a:bodyPr>
-          <a:lstStyle/>
-          <a:p>
-            <a:pPr algn="l">
-              <a:lnSpc>
-                <a:spcPct val="95000"/>
-              </a:lnSpc>
-              <a:spcAft>
-                <a:spcPts val="100"/>
-              </a:spcAft>
-            </a:pPr>
-            <a:r>
-              <a:rPr sz="3600" b="1" i="0">
-                <a:solidFill>
-                  <a:srgbClr val="1B4F8C"/>
-                </a:solidFill>
-                <a:latin typeface="Cambria"/>
-              </a:rPr>
-              <a:t>73.1%</a:t>
-            </a:r>
-          </a:p>
-          <a:p>
-            <a:pPr algn="l">
-              <a:lnSpc>
-                <a:spcPct val="95000"/>
-              </a:lnSpc>
-              <a:spcAft>
-                <a:spcPts val="100"/>
-              </a:spcAft>
-            </a:pPr>
-            <a:r>
-              <a:rPr sz="1400" b="0" i="0">
-                <a:solidFill>
-                  <a:srgbClr val="111111"/>
-                </a:solidFill>
-                <a:latin typeface="Cambria"/>
-              </a:rPr>
-              <a:t>of three-body fields named exactly (a fitted classifier: 58.2%)</a:t>
-            </a:r>
-          </a:p>
-        </p:txBody>
-      </p:sp>
-      <p:sp>
-        <p:nvSpPr>
-          <p:cNvPr id="6" name="Text: stat precision"/>
-          <p:cNvSpPr txBox="1"/>
-          <p:nvPr/>
-        </p:nvSpPr>
-        <p:spPr>
-          <a:xfrm>
-            <a:off x="9189720" y="2606040"/>
-            <a:ext cx="2450592" cy="1051560"/>
-          </a:xfrm>
-          <a:prstGeom prst="rect">
-            <a:avLst/>
-          </a:prstGeom>
-          <a:noFill/>
-        </p:spPr>
-        <p:txBody>
-          <a:bodyPr wrap="square" anchor="t" lIns="18288" rIns="18288" tIns="18288" bIns="18288">
-            <a:spAutoFit/>
-          </a:bodyPr>
-          <a:lstStyle/>
-          <a:p>
-            <a:pPr algn="l">
-              <a:lnSpc>
-                <a:spcPct val="95000"/>
-              </a:lnSpc>
-              <a:spcAft>
-                <a:spcPts val="100"/>
-              </a:spcAft>
-            </a:pPr>
-            <a:r>
-              <a:rPr sz="3600" b="1" i="0">
-                <a:solidFill>
-                  <a:srgbClr val="1B4F8C"/>
-                </a:solidFill>
-                <a:latin typeface="Cambria"/>
-              </a:rPr>
-              <a:t>99.78%</a:t>
-            </a:r>
-          </a:p>
-          <a:p>
-            <a:pPr algn="l">
-              <a:lnSpc>
-                <a:spcPct val="95000"/>
-              </a:lnSpc>
-              <a:spcAft>
-                <a:spcPts val="100"/>
-              </a:spcAft>
-            </a:pPr>
-            <a:r>
-              <a:rPr sz="1400" b="0" i="0">
-                <a:solidFill>
-                  <a:srgbClr val="111111"/>
-                </a:solidFill>
-                <a:latin typeface="Cambria"/>
-              </a:rPr>
-              <a:t>of names given at posterior 0.99 right (15 wrong of 6,848)</a:t>
-            </a:r>
-          </a:p>
-        </p:txBody>
-      </p:sp>
-      <p:sp>
-        <p:nvSpPr>
-          <p:cNvPr id="7" name="Text: stat nine bodies"/>
-          <p:cNvSpPr txBox="1"/>
-          <p:nvPr/>
-        </p:nvSpPr>
-        <p:spPr>
-          <a:xfrm>
-            <a:off x="9189720" y="3840480"/>
-            <a:ext cx="2450592" cy="1051560"/>
-          </a:xfrm>
-          <a:prstGeom prst="rect">
-            <a:avLst/>
-          </a:prstGeom>
-          <a:noFill/>
-        </p:spPr>
-        <p:txBody>
-          <a:bodyPr wrap="square" anchor="t" lIns="18288" rIns="18288" tIns="18288" bIns="18288">
-            <a:spAutoFit/>
-          </a:bodyPr>
-          <a:lstStyle/>
-          <a:p>
-            <a:pPr algn="l">
-              <a:lnSpc>
-                <a:spcPct val="95000"/>
-              </a:lnSpc>
-              <a:spcAft>
-                <a:spcPts val="100"/>
-              </a:spcAft>
-            </a:pPr>
-            <a:r>
-              <a:rPr sz="3600" b="1" i="0">
-                <a:solidFill>
-                  <a:srgbClr val="1B4F8C"/>
-                </a:solidFill>
-                <a:latin typeface="Cambria"/>
-              </a:rPr>
-              <a:t>96.1%</a:t>
-            </a:r>
-          </a:p>
-          <a:p>
-            <a:pPr algn="l">
-              <a:lnSpc>
-                <a:spcPct val="95000"/>
-              </a:lnSpc>
-              <a:spcAft>
-                <a:spcPts val="100"/>
-              </a:spcAft>
-            </a:pPr>
-            <a:r>
-              <a:rPr sz="1400" b="0" i="0">
-                <a:solidFill>
-                  <a:srgbClr val="111111"/>
-                </a:solidFill>
-                <a:latin typeface="Cambria"/>
-              </a:rPr>
-              <a:t>named exactly from nine bodies</a:t>
-            </a:r>
-          </a:p>
-        </p:txBody>
-      </p:sp>
       <mc:AlternateContent xmlns:mc="http://schemas.openxmlformats.org/markup-compatibility/2006">
         <mc:Choice xmlns:a14="http://schemas.microsoft.com/office/drawing/2010/main" Requires="a14">
           <p:sp>
             <p:nvSpPr>
-              <p:cNvPr id="8" name="Equation: selective" descr="LaTeX: \Pr\left(\hat{k} = k \mid \hat{p} \geq 1-\varepsilon\right) = \mathbb{E}\left[\hat{p} \mid \hat{p} \geq 1-\varepsilon\right] \geq 1-\varepsilon"/>
+              <p:cNvPr id="6" name="Equation: covariance" descr="LaTeX: \Sigma_{m,k:k+n-1}(s) = s^2 \rho^2\, \sigma \sigma^{\mathrm{T}} + \mathrm{diag}\left(s^2 (1-\rho^2)\, \sigma^2 + \sigma_{\mathrm{err}}^2\right)"/>
               <p:cNvSpPr txBox="1"/>
               <p:nvPr/>
             </p:nvSpPr>
             <p:spPr>
               <a:xfrm>
-                <a:off x="548640" y="5230368"/>
-                <a:ext cx="4532376" cy="338328"/>
+                <a:off x="548640" y="3682289"/>
+                <a:ext cx="4949952" cy="310896"/>
               </a:xfrm>
               <a:prstGeom prst="rect">
                 <a:avLst/>
@@ -6435,59 +6125,45 @@
                       <m:jc m:val="left"/>
                     </m:oMathParaPr>
                     <m:oMath>
-                      <m:r>
-                        <m:rPr>
-                          <m:sty m:val="p"/>
-                        </m:rPr>
-                        <a:rPr lang="en-US" i="1" sz="1800">
-                          <a:solidFill>
-                            <a:srgbClr val="111111"/>
-                          </a:solidFill>
-                          <a:latin typeface="Cambria Math"/>
-                          <a:cs typeface="Cambria Math"/>
-                        </a:rPr>
-                        <m:t>Pr</m:t>
-                      </m:r>
-                      <m:d>
-                        <m:dPr>
-                          <m:begChr m:val="("/>
-                          <m:endChr m:val=")"/>
-                          <m:sepChr m:val=""/>
-                          <m:grow/>
-                        </m:dPr>
+                      <m:sSub>
                         <m:e>
-                          <m:acc>
-                            <m:accPr>
-                              <m:chr m:val="̂"/>
-                            </m:accPr>
-                            <m:e>
-                              <m:r>
-                                <a:rPr lang="en-US" i="1" sz="1800">
-                                  <a:solidFill>
-                                    <a:srgbClr val="111111"/>
-                                  </a:solidFill>
-                                  <a:latin typeface="Cambria Math"/>
-                                  <a:cs typeface="Cambria Math"/>
-                                </a:rPr>
-                                <m:t>k</m:t>
-                              </m:r>
-                            </m:e>
-                          </m:acc>
                           <m:r>
-                            <m:rPr>
-                              <m:sty m:val="p"/>
-                            </m:rPr>
-                            <a:rPr lang="en-US" i="1" sz="1800">
+                            <a:rPr lang="en-US" i="1" sz="1600">
                               <a:solidFill>
                                 <a:srgbClr val="111111"/>
                               </a:solidFill>
                               <a:latin typeface="Cambria Math"/>
                               <a:cs typeface="Cambria Math"/>
                             </a:rPr>
-                            <m:t>=</m:t>
+                            <m:t>Σ</m:t>
+                          </m:r>
+                        </m:e>
+                        <m:sub>
+                          <m:r>
+                            <a:rPr lang="en-US" i="1" sz="1600">
+                              <a:solidFill>
+                                <a:srgbClr val="111111"/>
+                              </a:solidFill>
+                              <a:latin typeface="Cambria Math"/>
+                              <a:cs typeface="Cambria Math"/>
+                            </a:rPr>
+                            <m:t>m</m:t>
                           </m:r>
                           <m:r>
-                            <a:rPr lang="en-US" i="1" sz="1800">
+                            <m:rPr>
+                              <m:sty m:val="p"/>
+                            </m:rPr>
+                            <a:rPr lang="en-US" i="1" sz="1600">
+                              <a:solidFill>
+                                <a:srgbClr val="111111"/>
+                              </a:solidFill>
+                              <a:latin typeface="Cambria Math"/>
+                              <a:cs typeface="Cambria Math"/>
+                            </a:rPr>
+                            <m:t>,</m:t>
+                          </m:r>
+                          <m:r>
+                            <a:rPr lang="en-US" i="1" sz="1600">
                               <a:solidFill>
                                 <a:srgbClr val="111111"/>
                               </a:solidFill>
@@ -6500,60 +6176,53 @@
                             <m:rPr>
                               <m:sty m:val="p"/>
                             </m:rPr>
-                            <a:rPr lang="en-US" i="1" sz="1800">
+                            <a:rPr lang="en-US" i="1" sz="1600">
                               <a:solidFill>
                                 <a:srgbClr val="111111"/>
                               </a:solidFill>
                               <a:latin typeface="Cambria Math"/>
                               <a:cs typeface="Cambria Math"/>
                             </a:rPr>
-                            <m:t>∣</m:t>
+                            <m:t>:</m:t>
                           </m:r>
-                          <m:acc>
-                            <m:accPr>
-                              <m:chr m:val="̂"/>
-                            </m:accPr>
-                            <m:e>
-                              <m:r>
-                                <a:rPr lang="en-US" i="1" sz="1800">
-                                  <a:solidFill>
-                                    <a:srgbClr val="111111"/>
-                                  </a:solidFill>
-                                  <a:latin typeface="Cambria Math"/>
-                                  <a:cs typeface="Cambria Math"/>
-                                </a:rPr>
-                                <m:t>p</m:t>
-                              </m:r>
-                            </m:e>
-                          </m:acc>
                           <m:r>
-                            <m:rPr>
-                              <m:sty m:val="p"/>
-                            </m:rPr>
-                            <a:rPr lang="en-US" i="1" sz="1800">
+                            <a:rPr lang="en-US" i="1" sz="1600">
                               <a:solidFill>
                                 <a:srgbClr val="111111"/>
                               </a:solidFill>
                               <a:latin typeface="Cambria Math"/>
                               <a:cs typeface="Cambria Math"/>
                             </a:rPr>
-                            <m:t>≥</m:t>
+                            <m:t>k</m:t>
                           </m:r>
                           <m:r>
-                            <a:rPr lang="en-US" i="1" sz="1800">
+                            <m:rPr>
+                              <m:sty m:val="p"/>
+                            </m:rPr>
+                            <a:rPr lang="en-US" i="1" sz="1600">
                               <a:solidFill>
                                 <a:srgbClr val="111111"/>
                               </a:solidFill>
                               <a:latin typeface="Cambria Math"/>
                               <a:cs typeface="Cambria Math"/>
                             </a:rPr>
-                            <m:t>1</m:t>
+                            <m:t>+</m:t>
+                          </m:r>
+                          <m:r>
+                            <a:rPr lang="en-US" i="1" sz="1600">
+                              <a:solidFill>
+                                <a:srgbClr val="111111"/>
+                              </a:solidFill>
+                              <a:latin typeface="Cambria Math"/>
+                              <a:cs typeface="Cambria Math"/>
+                            </a:rPr>
+                            <m:t>n</m:t>
                           </m:r>
                           <m:r>
                             <m:rPr>
                               <m:sty m:val="p"/>
                             </m:rPr>
-                            <a:rPr lang="en-US" i="1" sz="1800">
+                            <a:rPr lang="en-US" i="1" sz="1600">
                               <a:solidFill>
                                 <a:srgbClr val="111111"/>
                               </a:solidFill>
@@ -6563,14 +6232,34 @@
                             <m:t>−</m:t>
                           </m:r>
                           <m:r>
-                            <a:rPr lang="en-US" i="1" sz="1800">
+                            <a:rPr lang="en-US" i="1" sz="1600">
                               <a:solidFill>
                                 <a:srgbClr val="111111"/>
                               </a:solidFill>
                               <a:latin typeface="Cambria Math"/>
                               <a:cs typeface="Cambria Math"/>
                             </a:rPr>
-                            <m:t>ε</m:t>
+                            <m:t>1</m:t>
+                          </m:r>
+                        </m:sub>
+                      </m:sSub>
+                      <m:d>
+                        <m:dPr>
+                          <m:begChr m:val="("/>
+                          <m:endChr m:val=")"/>
+                          <m:sepChr m:val=""/>
+                          <m:grow/>
+                        </m:dPr>
+                        <m:e>
+                          <m:r>
+                            <a:rPr lang="en-US" i="1" sz="1600">
+                              <a:solidFill>
+                                <a:srgbClr val="111111"/>
+                              </a:solidFill>
+                              <a:latin typeface="Cambria Math"/>
+                              <a:cs typeface="Cambria Math"/>
+                            </a:rPr>
+                            <m:t>s</m:t>
                           </m:r>
                         </m:e>
                       </m:d>
@@ -6578,7 +6267,7 @@
                         <m:rPr>
                           <m:sty m:val="p"/>
                         </m:rPr>
-                        <a:rPr lang="en-US" i="1" sz="1800">
+                        <a:rPr lang="en-US" i="1" sz="1600">
                           <a:solidFill>
                             <a:srgbClr val="111111"/>
                           </a:solidFill>
@@ -6587,173 +6276,387 @@
                         </a:rPr>
                         <m:t>=</m:t>
                       </m:r>
+                      <m:sSup>
+                        <m:e>
+                          <m:r>
+                            <a:rPr lang="en-US" i="1" sz="1600">
+                              <a:solidFill>
+                                <a:srgbClr val="111111"/>
+                              </a:solidFill>
+                              <a:latin typeface="Cambria Math"/>
+                              <a:cs typeface="Cambria Math"/>
+                            </a:rPr>
+                            <m:t>s</m:t>
+                          </m:r>
+                        </m:e>
+                        <m:sup>
+                          <m:r>
+                            <a:rPr lang="en-US" i="1" sz="1600">
+                              <a:solidFill>
+                                <a:srgbClr val="111111"/>
+                              </a:solidFill>
+                              <a:latin typeface="Cambria Math"/>
+                              <a:cs typeface="Cambria Math"/>
+                            </a:rPr>
+                            <m:t>2</m:t>
+                          </m:r>
+                        </m:sup>
+                      </m:sSup>
+                      <m:sSup>
+                        <m:e>
+                          <m:r>
+                            <a:rPr lang="en-US" i="1" sz="1600">
+                              <a:solidFill>
+                                <a:srgbClr val="111111"/>
+                              </a:solidFill>
+                              <a:latin typeface="Cambria Math"/>
+                              <a:cs typeface="Cambria Math"/>
+                            </a:rPr>
+                            <m:t>ρ</m:t>
+                          </m:r>
+                        </m:e>
+                        <m:sup>
+                          <m:r>
+                            <a:rPr lang="en-US" i="1" sz="1600">
+                              <a:solidFill>
+                                <a:srgbClr val="111111"/>
+                              </a:solidFill>
+                              <a:latin typeface="Cambria Math"/>
+                              <a:cs typeface="Cambria Math"/>
+                            </a:rPr>
+                            <m:t>2</m:t>
+                          </m:r>
+                        </m:sup>
+                      </m:sSup>
                       <m:r>
-                        <m:rPr>
-                          <m:sty m:val="p"/>
-                          <m:scr m:val="double-struck"/>
-                        </m:rPr>
-                        <a:rPr lang="en-US" i="1" sz="1800">
+                        <a:rPr lang="en-US" i="1" sz="1600">
                           <a:solidFill>
                             <a:srgbClr val="111111"/>
                           </a:solidFill>
                           <a:latin typeface="Cambria Math"/>
                           <a:cs typeface="Cambria Math"/>
                         </a:rPr>
-                        <m:t>E</m:t>
+                        <m:t> </m:t>
+                      </m:r>
+                      <m:r>
+                        <a:rPr lang="en-US" i="1" sz="1600">
+                          <a:solidFill>
+                            <a:srgbClr val="111111"/>
+                          </a:solidFill>
+                          <a:latin typeface="Cambria Math"/>
+                          <a:cs typeface="Cambria Math"/>
+                        </a:rPr>
+                        <m:t>σ</m:t>
+                      </m:r>
+                      <m:sSup>
+                        <m:e>
+                          <m:r>
+                            <a:rPr lang="en-US" i="1" sz="1600">
+                              <a:solidFill>
+                                <a:srgbClr val="111111"/>
+                              </a:solidFill>
+                              <a:latin typeface="Cambria Math"/>
+                              <a:cs typeface="Cambria Math"/>
+                            </a:rPr>
+                            <m:t>σ</m:t>
+                          </m:r>
+                        </m:e>
+                        <m:sup>
+                          <m:r>
+                            <m:rPr>
+                              <m:sty m:val="p"/>
+                            </m:rPr>
+                            <a:rPr lang="en-US" i="1" sz="1600">
+                              <a:solidFill>
+                                <a:srgbClr val="111111"/>
+                              </a:solidFill>
+                              <a:latin typeface="Cambria Math"/>
+                              <a:cs typeface="Cambria Math"/>
+                            </a:rPr>
+                            <m:t>T</m:t>
+                          </m:r>
+                        </m:sup>
+                      </m:sSup>
+                      <m:r>
+                        <m:rPr>
+                          <m:sty m:val="p"/>
+                        </m:rPr>
+                        <a:rPr lang="en-US" i="1" sz="1600">
+                          <a:solidFill>
+                            <a:srgbClr val="111111"/>
+                          </a:solidFill>
+                          <a:latin typeface="Cambria Math"/>
+                          <a:cs typeface="Cambria Math"/>
+                        </a:rPr>
+                        <m:t>+</m:t>
+                      </m:r>
+                      <m:r>
+                        <m:rPr>
+                          <m:sty m:val="p"/>
+                        </m:rPr>
+                        <a:rPr lang="en-US" i="1" sz="1600">
+                          <a:solidFill>
+                            <a:srgbClr val="111111"/>
+                          </a:solidFill>
+                          <a:latin typeface="Cambria Math"/>
+                          <a:cs typeface="Cambria Math"/>
+                        </a:rPr>
+                        <m:t>d</m:t>
+                      </m:r>
+                      <m:r>
+                        <m:rPr>
+                          <m:sty m:val="p"/>
+                        </m:rPr>
+                        <a:rPr lang="en-US" i="1" sz="1600">
+                          <a:solidFill>
+                            <a:srgbClr val="111111"/>
+                          </a:solidFill>
+                          <a:latin typeface="Cambria Math"/>
+                          <a:cs typeface="Cambria Math"/>
+                        </a:rPr>
+                        <m:t>i</m:t>
+                      </m:r>
+                      <m:r>
+                        <m:rPr>
+                          <m:sty m:val="p"/>
+                        </m:rPr>
+                        <a:rPr lang="en-US" i="1" sz="1600">
+                          <a:solidFill>
+                            <a:srgbClr val="111111"/>
+                          </a:solidFill>
+                          <a:latin typeface="Cambria Math"/>
+                          <a:cs typeface="Cambria Math"/>
+                        </a:rPr>
+                        <m:t>a</m:t>
+                      </m:r>
+                      <m:r>
+                        <m:rPr>
+                          <m:sty m:val="p"/>
+                        </m:rPr>
+                        <a:rPr lang="en-US" i="1" sz="1600">
+                          <a:solidFill>
+                            <a:srgbClr val="111111"/>
+                          </a:solidFill>
+                          <a:latin typeface="Cambria Math"/>
+                          <a:cs typeface="Cambria Math"/>
+                        </a:rPr>
+                        <m:t>g</m:t>
                       </m:r>
                       <m:d>
                         <m:dPr>
-                          <m:begChr m:val="["/>
-                          <m:endChr m:val="]"/>
+                          <m:begChr m:val="("/>
+                          <m:endChr m:val=")"/>
                           <m:sepChr m:val=""/>
                           <m:grow/>
                         </m:dPr>
                         <m:e>
-                          <m:acc>
-                            <m:accPr>
-                              <m:chr m:val="̂"/>
-                            </m:accPr>
+                          <m:sSup>
                             <m:e>
                               <m:r>
-                                <a:rPr lang="en-US" i="1" sz="1800">
+                                <a:rPr lang="en-US" i="1" sz="1600">
                                   <a:solidFill>
                                     <a:srgbClr val="111111"/>
                                   </a:solidFill>
                                   <a:latin typeface="Cambria Math"/>
                                   <a:cs typeface="Cambria Math"/>
                                 </a:rPr>
-                                <m:t>p</m:t>
+                                <m:t>s</m:t>
                               </m:r>
                             </m:e>
-                          </m:acc>
+                            <m:sup>
+                              <m:r>
+                                <a:rPr lang="en-US" i="1" sz="1600">
+                                  <a:solidFill>
+                                    <a:srgbClr val="111111"/>
+                                  </a:solidFill>
+                                  <a:latin typeface="Cambria Math"/>
+                                  <a:cs typeface="Cambria Math"/>
+                                </a:rPr>
+                                <m:t>2</m:t>
+                              </m:r>
+                            </m:sup>
+                          </m:sSup>
+                          <m:d>
+                            <m:dPr>
+                              <m:begChr m:val="("/>
+                              <m:endChr m:val=")"/>
+                              <m:sepChr m:val=""/>
+                              <m:grow/>
+                            </m:dPr>
+                            <m:e>
+                              <m:r>
+                                <a:rPr lang="en-US" i="1" sz="1600">
+                                  <a:solidFill>
+                                    <a:srgbClr val="111111"/>
+                                  </a:solidFill>
+                                  <a:latin typeface="Cambria Math"/>
+                                  <a:cs typeface="Cambria Math"/>
+                                </a:rPr>
+                                <m:t>1</m:t>
+                              </m:r>
+                              <m:r>
+                                <m:rPr>
+                                  <m:sty m:val="p"/>
+                                </m:rPr>
+                                <a:rPr lang="en-US" i="1" sz="1600">
+                                  <a:solidFill>
+                                    <a:srgbClr val="111111"/>
+                                  </a:solidFill>
+                                  <a:latin typeface="Cambria Math"/>
+                                  <a:cs typeface="Cambria Math"/>
+                                </a:rPr>
+                                <m:t>−</m:t>
+                              </m:r>
+                              <m:sSup>
+                                <m:e>
+                                  <m:r>
+                                    <a:rPr lang="en-US" i="1" sz="1600">
+                                      <a:solidFill>
+                                        <a:srgbClr val="111111"/>
+                                      </a:solidFill>
+                                      <a:latin typeface="Cambria Math"/>
+                                      <a:cs typeface="Cambria Math"/>
+                                    </a:rPr>
+                                    <m:t>ρ</m:t>
+                                  </m:r>
+                                </m:e>
+                                <m:sup>
+                                  <m:r>
+                                    <a:rPr lang="en-US" i="1" sz="1600">
+                                      <a:solidFill>
+                                        <a:srgbClr val="111111"/>
+                                      </a:solidFill>
+                                      <a:latin typeface="Cambria Math"/>
+                                      <a:cs typeface="Cambria Math"/>
+                                    </a:rPr>
+                                    <m:t>2</m:t>
+                                  </m:r>
+                                </m:sup>
+                              </m:sSup>
+                            </m:e>
+                          </m:d>
                           <m:r>
-                            <m:rPr>
-                              <m:sty m:val="p"/>
-                            </m:rPr>
-                            <a:rPr lang="en-US" i="1" sz="1800">
+                            <a:rPr lang="en-US" i="1" sz="1600">
                               <a:solidFill>
                                 <a:srgbClr val="111111"/>
                               </a:solidFill>
                               <a:latin typeface="Cambria Math"/>
                               <a:cs typeface="Cambria Math"/>
                             </a:rPr>
-                            <m:t>∣</m:t>
+                            <m:t> </m:t>
                           </m:r>
-                          <m:acc>
-                            <m:accPr>
-                              <m:chr m:val="̂"/>
-                            </m:accPr>
+                          <m:sSup>
                             <m:e>
                               <m:r>
-                                <a:rPr lang="en-US" i="1" sz="1800">
+                                <a:rPr lang="en-US" i="1" sz="1600">
                                   <a:solidFill>
                                     <a:srgbClr val="111111"/>
                                   </a:solidFill>
                                   <a:latin typeface="Cambria Math"/>
                                   <a:cs typeface="Cambria Math"/>
                                 </a:rPr>
-                                <m:t>p</m:t>
+                                <m:t>σ</m:t>
                               </m:r>
                             </m:e>
-                          </m:acc>
+                            <m:sup>
+                              <m:r>
+                                <a:rPr lang="en-US" i="1" sz="1600">
+                                  <a:solidFill>
+                                    <a:srgbClr val="111111"/>
+                                  </a:solidFill>
+                                  <a:latin typeface="Cambria Math"/>
+                                  <a:cs typeface="Cambria Math"/>
+                                </a:rPr>
+                                <m:t>2</m:t>
+                              </m:r>
+                            </m:sup>
+                          </m:sSup>
                           <m:r>
                             <m:rPr>
                               <m:sty m:val="p"/>
                             </m:rPr>
-                            <a:rPr lang="en-US" i="1" sz="1800">
+                            <a:rPr lang="en-US" i="1" sz="1600">
                               <a:solidFill>
                                 <a:srgbClr val="111111"/>
                               </a:solidFill>
                               <a:latin typeface="Cambria Math"/>
                               <a:cs typeface="Cambria Math"/>
                             </a:rPr>
-                            <m:t>≥</m:t>
+                            <m:t>+</m:t>
                           </m:r>
-                          <m:r>
-                            <a:rPr lang="en-US" i="1" sz="1800">
-                              <a:solidFill>
-                                <a:srgbClr val="111111"/>
-                              </a:solidFill>
-                              <a:latin typeface="Cambria Math"/>
-                              <a:cs typeface="Cambria Math"/>
-                            </a:rPr>
-                            <m:t>1</m:t>
-                          </m:r>
-                          <m:r>
-                            <m:rPr>
-                              <m:sty m:val="p"/>
-                            </m:rPr>
-                            <a:rPr lang="en-US" i="1" sz="1800">
-                              <a:solidFill>
-                                <a:srgbClr val="111111"/>
-                              </a:solidFill>
-                              <a:latin typeface="Cambria Math"/>
-                              <a:cs typeface="Cambria Math"/>
-                            </a:rPr>
-                            <m:t>−</m:t>
-                          </m:r>
-                          <m:r>
-                            <a:rPr lang="en-US" i="1" sz="1800">
-                              <a:solidFill>
-                                <a:srgbClr val="111111"/>
-                              </a:solidFill>
-                              <a:latin typeface="Cambria Math"/>
-                              <a:cs typeface="Cambria Math"/>
-                            </a:rPr>
-                            <m:t>ε</m:t>
-                          </m:r>
+                          <m:sSubSup>
+                            <m:e>
+                              <m:r>
+                                <a:rPr lang="en-US" i="1" sz="1600">
+                                  <a:solidFill>
+                                    <a:srgbClr val="111111"/>
+                                  </a:solidFill>
+                                  <a:latin typeface="Cambria Math"/>
+                                  <a:cs typeface="Cambria Math"/>
+                                </a:rPr>
+                                <m:t>σ</m:t>
+                              </m:r>
+                            </m:e>
+                            <m:sub>
+                              <m:r>
+                                <m:rPr>
+                                  <m:sty m:val="p"/>
+                                </m:rPr>
+                                <a:rPr lang="en-US" i="1" sz="1600">
+                                  <a:solidFill>
+                                    <a:srgbClr val="111111"/>
+                                  </a:solidFill>
+                                  <a:latin typeface="Cambria Math"/>
+                                  <a:cs typeface="Cambria Math"/>
+                                </a:rPr>
+                                <m:t>e</m:t>
+                              </m:r>
+                              <m:r>
+                                <m:rPr>
+                                  <m:sty m:val="p"/>
+                                </m:rPr>
+                                <a:rPr lang="en-US" i="1" sz="1600">
+                                  <a:solidFill>
+                                    <a:srgbClr val="111111"/>
+                                  </a:solidFill>
+                                  <a:latin typeface="Cambria Math"/>
+                                  <a:cs typeface="Cambria Math"/>
+                                </a:rPr>
+                                <m:t>r</m:t>
+                              </m:r>
+                              <m:r>
+                                <m:rPr>
+                                  <m:sty m:val="p"/>
+                                </m:rPr>
+                                <a:rPr lang="en-US" i="1" sz="1600">
+                                  <a:solidFill>
+                                    <a:srgbClr val="111111"/>
+                                  </a:solidFill>
+                                  <a:latin typeface="Cambria Math"/>
+                                  <a:cs typeface="Cambria Math"/>
+                                </a:rPr>
+                                <m:t>r</m:t>
+                              </m:r>
+                            </m:sub>
+                            <m:sup>
+                              <m:r>
+                                <a:rPr lang="en-US" i="1" sz="1600">
+                                  <a:solidFill>
+                                    <a:srgbClr val="111111"/>
+                                  </a:solidFill>
+                                  <a:latin typeface="Cambria Math"/>
+                                  <a:cs typeface="Cambria Math"/>
+                                </a:rPr>
+                                <m:t>2</m:t>
+                              </m:r>
+                            </m:sup>
+                          </m:sSubSup>
                         </m:e>
                       </m:d>
-                      <m:r>
-                        <m:rPr>
-                          <m:sty m:val="p"/>
-                        </m:rPr>
-                        <a:rPr lang="en-US" i="1" sz="1800">
-                          <a:solidFill>
-                            <a:srgbClr val="111111"/>
-                          </a:solidFill>
-                          <a:latin typeface="Cambria Math"/>
-                          <a:cs typeface="Cambria Math"/>
-                        </a:rPr>
-                        <m:t>≥</m:t>
-                      </m:r>
-                      <m:r>
-                        <a:rPr lang="en-US" i="1" sz="1800">
-                          <a:solidFill>
-                            <a:srgbClr val="111111"/>
-                          </a:solidFill>
-                          <a:latin typeface="Cambria Math"/>
-                          <a:cs typeface="Cambria Math"/>
-                        </a:rPr>
-                        <m:t>1</m:t>
-                      </m:r>
-                      <m:r>
-                        <m:rPr>
-                          <m:sty m:val="p"/>
-                        </m:rPr>
-                        <a:rPr lang="en-US" i="1" sz="1800">
-                          <a:solidFill>
-                            <a:srgbClr val="111111"/>
-                          </a:solidFill>
-                          <a:latin typeface="Cambria Math"/>
-                          <a:cs typeface="Cambria Math"/>
-                        </a:rPr>
-                        <m:t>−</m:t>
-                      </m:r>
-                      <m:r>
-                        <a:rPr lang="en-US" i="1" sz="1800">
-                          <a:solidFill>
-                            <a:srgbClr val="111111"/>
-                          </a:solidFill>
-                          <a:latin typeface="Cambria Math"/>
-                          <a:cs typeface="Cambria Math"/>
-                        </a:rPr>
-                        <m:t>ε</m:t>
-                      </m:r>
                     </m:oMath>
                   </m:oMathPara>
                 </a14:m>
-                <a:endParaRPr lang="en-US" sz="1800"/>
+                <a:endParaRPr lang="en-US" sz="1600"/>
               </a:p>
             </p:txBody>
           </p:sp>
@@ -6761,7 +6664,7 @@
         <mc:Fallback>
           <p:sp>
             <p:nvSpPr>
-              <p:cNvPr id="8" name="Equation: selective" descr="LaTeX: \Pr\left(\hat{k} = k \mid \hat{p} \geq 1-\varepsilon\right) = \mathbb{E}\left[\hat{p} \mid \hat{p} \geq 1-\varepsilon\right] \geq 1-\varepsilon"/>
+              <p:cNvPr id="6" name="Equation: covariance" descr="LaTeX: \Sigma_{m,k:k+n-1}(s) = s^2 \rho^2\, \sigma \sigma^{\mathrm{T}} + \mathrm{diag}\left(s^2 (1-\rho^2)\, \sigma^2 + \sigma_{\mathrm{err}}^2\right)"/>
               <p:cNvSpPr txBox="1">
                 <a:spLocks noRot="1" noChangeAspect="1" noMove="1" noResize="1" noEditPoints="1" noAdjustHandles="1" noChangeArrowheads="1" noChangeShapeType="1" noTextEdit="1"/>
               </p:cNvSpPr>
@@ -6769,8 +6672,8 @@
             </p:nvSpPr>
             <p:spPr>
               <a:xfrm>
-                <a:off x="548640" y="5230368"/>
-                <a:ext cx="4532376" cy="338328"/>
+                <a:off x="548640" y="3682289"/>
+                <a:ext cx="4949952" cy="310896"/>
               </a:xfrm>
               <a:prstGeom prst="rect">
                 <a:avLst/>
@@ -6797,16 +6700,406 @@
           </p:sp>
         </mc:Fallback>
       </mc:AlternateContent>
-      <p:sp>
-        <p:nvSpPr>
-          <p:cNvPr id="9" name="Text: guarantee"/>
+      <mc:AlternateContent xmlns:mc="http://schemas.openxmlformats.org/markup-compatibility/2006">
+        <mc:Choice xmlns:a14="http://schemas.microsoft.com/office/drawing/2010/main" Requires="a14">
+          <p:sp>
+            <p:nvSpPr>
+              <p:cNvPr id="7" name="Equation: size" descr="LaTeX: \log s \sim \mathcal{N}(0,\, 0.07^2),\qquad \rho = 0.5,\qquad \sigma_{\mathrm{err}} = 1\ \mathrm{mm}"/>
+              <p:cNvSpPr txBox="1"/>
+              <p:nvPr/>
+            </p:nvSpPr>
+            <p:spPr>
+              <a:xfrm>
+                <a:off x="548640" y="4066337"/>
+                <a:ext cx="4084320" cy="286512"/>
+              </a:xfrm>
+              <a:prstGeom prst="rect">
+                <a:avLst/>
+              </a:prstGeom>
+              <a:noFill/>
+            </p:spPr>
+            <p:txBody>
+              <a:bodyPr wrap="none" lIns="0" tIns="0" rIns="0" bIns="0" anchor="ctr">
+                <a:noAutofit/>
+              </a:bodyPr>
+              <a:lstStyle/>
+              <a:p>
+                <a:pPr algn="l"/>
+                <a14:m>
+                  <m:oMathPara xmlns:m="http://schemas.openxmlformats.org/officeDocument/2006/math">
+                    <m:oMathParaPr>
+                      <m:jc m:val="left"/>
+                    </m:oMathParaPr>
+                    <m:oMath>
+                      <m:r>
+                        <m:rPr>
+                          <m:sty m:val="p"/>
+                        </m:rPr>
+                        <a:rPr lang="en-US" i="1" sz="1500">
+                          <a:solidFill>
+                            <a:srgbClr val="111111"/>
+                          </a:solidFill>
+                          <a:latin typeface="Cambria Math"/>
+                          <a:cs typeface="Cambria Math"/>
+                        </a:rPr>
+                        <m:t>log</m:t>
+                      </m:r>
+                      <m:r>
+                        <a:rPr lang="en-US" i="1" sz="1500">
+                          <a:solidFill>
+                            <a:srgbClr val="111111"/>
+                          </a:solidFill>
+                          <a:latin typeface="Cambria Math"/>
+                          <a:cs typeface="Cambria Math"/>
+                        </a:rPr>
+                        <m:t>s</m:t>
+                      </m:r>
+                      <m:r>
+                        <m:rPr>
+                          <m:sty m:val="p"/>
+                        </m:rPr>
+                        <a:rPr lang="en-US" i="1" sz="1500">
+                          <a:solidFill>
+                            <a:srgbClr val="111111"/>
+                          </a:solidFill>
+                          <a:latin typeface="Cambria Math"/>
+                          <a:cs typeface="Cambria Math"/>
+                        </a:rPr>
+                        <m:t>∼</m:t>
+                      </m:r>
+                      <m:r>
+                        <m:rPr>
+                          <m:sty m:val="p"/>
+                          <m:scr m:val="script"/>
+                        </m:rPr>
+                        <a:rPr lang="en-US" i="1" sz="1500">
+                          <a:solidFill>
+                            <a:srgbClr val="111111"/>
+                          </a:solidFill>
+                          <a:latin typeface="Cambria Math"/>
+                          <a:cs typeface="Cambria Math"/>
+                        </a:rPr>
+                        <m:t>N</m:t>
+                      </m:r>
+                      <m:d>
+                        <m:dPr>
+                          <m:begChr m:val="("/>
+                          <m:endChr m:val=")"/>
+                          <m:sepChr m:val=""/>
+                          <m:grow/>
+                        </m:dPr>
+                        <m:e>
+                          <m:r>
+                            <a:rPr lang="en-US" i="1" sz="1500">
+                              <a:solidFill>
+                                <a:srgbClr val="111111"/>
+                              </a:solidFill>
+                              <a:latin typeface="Cambria Math"/>
+                              <a:cs typeface="Cambria Math"/>
+                            </a:rPr>
+                            <m:t>0</m:t>
+                          </m:r>
+                          <m:r>
+                            <m:rPr>
+                              <m:sty m:val="p"/>
+                            </m:rPr>
+                            <a:rPr lang="en-US" i="1" sz="1500">
+                              <a:solidFill>
+                                <a:srgbClr val="111111"/>
+                              </a:solidFill>
+                              <a:latin typeface="Cambria Math"/>
+                              <a:cs typeface="Cambria Math"/>
+                            </a:rPr>
+                            <m:t>,</m:t>
+                          </m:r>
+                          <m:r>
+                            <a:rPr lang="en-US" i="1" sz="1500">
+                              <a:solidFill>
+                                <a:srgbClr val="111111"/>
+                              </a:solidFill>
+                              <a:latin typeface="Cambria Math"/>
+                              <a:cs typeface="Cambria Math"/>
+                            </a:rPr>
+                            <m:t> </m:t>
+                          </m:r>
+                          <m:sSup>
+                            <m:e>
+                              <m:r>
+                                <a:rPr lang="en-US" i="1" sz="1500">
+                                  <a:solidFill>
+                                    <a:srgbClr val="111111"/>
+                                  </a:solidFill>
+                                  <a:latin typeface="Cambria Math"/>
+                                  <a:cs typeface="Cambria Math"/>
+                                </a:rPr>
+                                <m:t>0.07</m:t>
+                              </m:r>
+                            </m:e>
+                            <m:sup>
+                              <m:r>
+                                <a:rPr lang="en-US" i="1" sz="1500">
+                                  <a:solidFill>
+                                    <a:srgbClr val="111111"/>
+                                  </a:solidFill>
+                                  <a:latin typeface="Cambria Math"/>
+                                  <a:cs typeface="Cambria Math"/>
+                                </a:rPr>
+                                <m:t>2</m:t>
+                              </m:r>
+                            </m:sup>
+                          </m:sSup>
+                        </m:e>
+                      </m:d>
+                      <m:r>
+                        <m:rPr>
+                          <m:sty m:val="p"/>
+                        </m:rPr>
+                        <a:rPr lang="en-US" i="1" sz="1500">
+                          <a:solidFill>
+                            <a:srgbClr val="111111"/>
+                          </a:solidFill>
+                          <a:latin typeface="Cambria Math"/>
+                          <a:cs typeface="Cambria Math"/>
+                        </a:rPr>
+                        <m:t>,</m:t>
+                      </m:r>
+                      <m:r>
+                        <a:rPr lang="en-US" i="1" sz="1500">
+                          <a:solidFill>
+                            <a:srgbClr val="111111"/>
+                          </a:solidFill>
+                          <a:latin typeface="Cambria Math"/>
+                          <a:cs typeface="Cambria Math"/>
+                        </a:rPr>
+                        <m:t>  </m:t>
+                      </m:r>
+                      <m:r>
+                        <a:rPr lang="en-US" i="1" sz="1500">
+                          <a:solidFill>
+                            <a:srgbClr val="111111"/>
+                          </a:solidFill>
+                          <a:latin typeface="Cambria Math"/>
+                          <a:cs typeface="Cambria Math"/>
+                        </a:rPr>
+                        <m:t>ρ</m:t>
+                      </m:r>
+                      <m:r>
+                        <m:rPr>
+                          <m:sty m:val="p"/>
+                        </m:rPr>
+                        <a:rPr lang="en-US" i="1" sz="1500">
+                          <a:solidFill>
+                            <a:srgbClr val="111111"/>
+                          </a:solidFill>
+                          <a:latin typeface="Cambria Math"/>
+                          <a:cs typeface="Cambria Math"/>
+                        </a:rPr>
+                        <m:t>=</m:t>
+                      </m:r>
+                      <m:r>
+                        <a:rPr lang="en-US" i="1" sz="1500">
+                          <a:solidFill>
+                            <a:srgbClr val="111111"/>
+                          </a:solidFill>
+                          <a:latin typeface="Cambria Math"/>
+                          <a:cs typeface="Cambria Math"/>
+                        </a:rPr>
+                        <m:t>0.5</m:t>
+                      </m:r>
+                      <m:r>
+                        <m:rPr>
+                          <m:sty m:val="p"/>
+                        </m:rPr>
+                        <a:rPr lang="en-US" i="1" sz="1500">
+                          <a:solidFill>
+                            <a:srgbClr val="111111"/>
+                          </a:solidFill>
+                          <a:latin typeface="Cambria Math"/>
+                          <a:cs typeface="Cambria Math"/>
+                        </a:rPr>
+                        <m:t>,</m:t>
+                      </m:r>
+                      <m:r>
+                        <a:rPr lang="en-US" i="1" sz="1500">
+                          <a:solidFill>
+                            <a:srgbClr val="111111"/>
+                          </a:solidFill>
+                          <a:latin typeface="Cambria Math"/>
+                          <a:cs typeface="Cambria Math"/>
+                        </a:rPr>
+                        <m:t>  </m:t>
+                      </m:r>
+                      <m:sSub>
+                        <m:e>
+                          <m:r>
+                            <a:rPr lang="en-US" i="1" sz="1500">
+                              <a:solidFill>
+                                <a:srgbClr val="111111"/>
+                              </a:solidFill>
+                              <a:latin typeface="Cambria Math"/>
+                              <a:cs typeface="Cambria Math"/>
+                            </a:rPr>
+                            <m:t>σ</m:t>
+                          </m:r>
+                        </m:e>
+                        <m:sub>
+                          <m:r>
+                            <m:rPr>
+                              <m:sty m:val="p"/>
+                            </m:rPr>
+                            <a:rPr lang="en-US" i="1" sz="1500">
+                              <a:solidFill>
+                                <a:srgbClr val="111111"/>
+                              </a:solidFill>
+                              <a:latin typeface="Cambria Math"/>
+                              <a:cs typeface="Cambria Math"/>
+                            </a:rPr>
+                            <m:t>e</m:t>
+                          </m:r>
+                          <m:r>
+                            <m:rPr>
+                              <m:sty m:val="p"/>
+                            </m:rPr>
+                            <a:rPr lang="en-US" i="1" sz="1500">
+                              <a:solidFill>
+                                <a:srgbClr val="111111"/>
+                              </a:solidFill>
+                              <a:latin typeface="Cambria Math"/>
+                              <a:cs typeface="Cambria Math"/>
+                            </a:rPr>
+                            <m:t>r</m:t>
+                          </m:r>
+                          <m:r>
+                            <m:rPr>
+                              <m:sty m:val="p"/>
+                            </m:rPr>
+                            <a:rPr lang="en-US" i="1" sz="1500">
+                              <a:solidFill>
+                                <a:srgbClr val="111111"/>
+                              </a:solidFill>
+                              <a:latin typeface="Cambria Math"/>
+                              <a:cs typeface="Cambria Math"/>
+                            </a:rPr>
+                            <m:t>r</m:t>
+                          </m:r>
+                        </m:sub>
+                      </m:sSub>
+                      <m:r>
+                        <m:rPr>
+                          <m:sty m:val="p"/>
+                        </m:rPr>
+                        <a:rPr lang="en-US" i="1" sz="1500">
+                          <a:solidFill>
+                            <a:srgbClr val="111111"/>
+                          </a:solidFill>
+                          <a:latin typeface="Cambria Math"/>
+                          <a:cs typeface="Cambria Math"/>
+                        </a:rPr>
+                        <m:t>=</m:t>
+                      </m:r>
+                      <m:r>
+                        <a:rPr lang="en-US" i="1" sz="1500">
+                          <a:solidFill>
+                            <a:srgbClr val="111111"/>
+                          </a:solidFill>
+                          <a:latin typeface="Cambria Math"/>
+                          <a:cs typeface="Cambria Math"/>
+                        </a:rPr>
+                        <m:t>1</m:t>
+                      </m:r>
+                      <m:r>
+                        <a:rPr lang="en-US" i="1" sz="1500">
+                          <a:solidFill>
+                            <a:srgbClr val="111111"/>
+                          </a:solidFill>
+                          <a:latin typeface="Cambria Math"/>
+                          <a:cs typeface="Cambria Math"/>
+                        </a:rPr>
+                        <m:t> </m:t>
+                      </m:r>
+                      <m:r>
+                        <m:rPr>
+                          <m:sty m:val="p"/>
+                        </m:rPr>
+                        <a:rPr lang="en-US" i="1" sz="1500">
+                          <a:solidFill>
+                            <a:srgbClr val="111111"/>
+                          </a:solidFill>
+                          <a:latin typeface="Cambria Math"/>
+                          <a:cs typeface="Cambria Math"/>
+                        </a:rPr>
+                        <m:t>m</m:t>
+                      </m:r>
+                      <m:r>
+                        <m:rPr>
+                          <m:sty m:val="p"/>
+                        </m:rPr>
+                        <a:rPr lang="en-US" i="1" sz="1500">
+                          <a:solidFill>
+                            <a:srgbClr val="111111"/>
+                          </a:solidFill>
+                          <a:latin typeface="Cambria Math"/>
+                          <a:cs typeface="Cambria Math"/>
+                        </a:rPr>
+                        <m:t>m</m:t>
+                      </m:r>
+                    </m:oMath>
+                  </m:oMathPara>
+                </a14:m>
+                <a:endParaRPr lang="en-US" sz="1500"/>
+              </a:p>
+            </p:txBody>
+          </p:sp>
+        </mc:Choice>
+        <mc:Fallback>
+          <p:sp>
+            <p:nvSpPr>
+              <p:cNvPr id="7" name="Equation: size" descr="LaTeX: \log s \sim \mathcal{N}(0,\, 0.07^2),\qquad \rho = 0.5,\qquad \sigma_{\mathrm{err}} = 1\ \mathrm{mm}"/>
+              <p:cNvSpPr txBox="1">
+                <a:spLocks noRot="1" noChangeAspect="1" noMove="1" noResize="1" noEditPoints="1" noAdjustHandles="1" noChangeArrowheads="1" noChangeShapeType="1" noTextEdit="1"/>
+              </p:cNvSpPr>
+              <p:nvPr/>
+            </p:nvSpPr>
+            <p:spPr>
+              <a:xfrm>
+                <a:off x="548640" y="4066337"/>
+                <a:ext cx="4084320" cy="286512"/>
+              </a:xfrm>
+              <a:prstGeom prst="rect">
+                <a:avLst/>
+              </a:prstGeom>
+              <a:blipFill>
+                <a:blip r:embed="rId5"/>
+                <a:stretch>
+                  <a:fillRect/>
+                </a:stretch>
+              </a:blipFill>
+            </p:spPr>
+            <p:txBody>
+              <a:bodyPr/>
+              <a:lstStyle/>
+              <a:p>
+                <a:r>
+                  <a:rPr lang="en-US">
+                    <a:noFill/>
+                  </a:rPr>
+                  <a:t> </a:t>
+                </a:r>
+              </a:p>
+            </p:txBody>
+          </p:sp>
+        </mc:Fallback>
+      </mc:AlternateContent>
+      <p:sp>
+        <p:nvSpPr>
+          <p:cNvPr id="8" name="Text: how"/>
           <p:cNvSpPr txBox="1"/>
           <p:nvPr/>
         </p:nvSpPr>
         <p:spPr>
           <a:xfrm>
-            <a:off x="6812280" y="5120640"/>
-            <a:ext cx="4828032" cy="1097280"/>
+            <a:off x="548640" y="4462577"/>
+            <a:ext cx="5257800" cy="1755342"/>
           </a:xfrm>
           <a:prstGeom prst="rect">
             <a:avLst/>
@@ -6831,7 +7124,7 @@
                 </a:solidFill>
                 <a:latin typeface="Cambria"/>
               </a:rPr>
-              <a:t>Answer only when the posterior </a:t>
+              <a:t>Every one of the 23 − </a:t>
             </a:r>
             <a:r>
               <a:rPr sz="1400" b="0" i="1">
@@ -6840,7 +7133,7 @@
                 </a:solidFill>
                 <a:latin typeface="Cambria"/>
               </a:rPr>
-              <a:t>p̂</a:t>
+              <a:t>n</a:t>
             </a:r>
             <a:r>
               <a:rPr sz="1400" b="0" i="0">
@@ -6849,21 +7142,230 @@
                 </a:solidFill>
                 <a:latin typeface="Cambria"/>
               </a:rPr>
-              <a:t> reaches 0.99, and the name is right at least 99% of the times it is given, while the generator is the truth.</a:t>
+              <a:t> places is scored under the prior </a:t>
+            </a:r>
+            <a:r>
+              <a:rPr sz="1400" b="0" i="1">
+                <a:solidFill>
+                  <a:srgbClr val="111111"/>
+                </a:solidFill>
+                <a:latin typeface="Cambria"/>
+              </a:rPr>
+              <a:t>p</a:t>
+            </a:r>
+            <a:r>
+              <a:rPr sz="1400" b="0" i="0">
+                <a:solidFill>
+                  <a:srgbClr val="111111"/>
+                </a:solidFill>
+                <a:latin typeface="Cambria"/>
+              </a:rPr>
+              <a:t>(</a:t>
+            </a:r>
+            <a:r>
+              <a:rPr sz="1400" b="0" i="1">
+                <a:solidFill>
+                  <a:srgbClr val="111111"/>
+                </a:solidFill>
+                <a:latin typeface="Cambria"/>
+              </a:rPr>
+              <a:t>k</a:t>
+            </a:r>
+            <a:r>
+              <a:rPr sz="1400" b="0" i="0">
+                <a:solidFill>
+                  <a:srgbClr val="111111"/>
+                </a:solidFill>
+                <a:latin typeface="Cambria"/>
+              </a:rPr>
+              <a:t>) = 1/(23 − </a:t>
+            </a:r>
+            <a:r>
+              <a:rPr sz="1400" b="0" i="1">
+                <a:solidFill>
+                  <a:srgbClr val="111111"/>
+                </a:solidFill>
+                <a:latin typeface="Cambria"/>
+              </a:rPr>
+              <a:t>n</a:t>
+            </a:r>
+            <a:r>
+              <a:rPr sz="1400" b="0" i="0">
+                <a:solidFill>
+                  <a:srgbClr val="111111"/>
+                </a:solidFill>
+                <a:latin typeface="Cambria"/>
+              </a:rPr>
+              <a:t>); nothing is fitted.</a:t>
+            </a:r>
+          </a:p>
+          <a:p>
+            <a:pPr algn="l">
+              <a:spcAft>
+                <a:spcPts val="600"/>
+              </a:spcAft>
+            </a:pPr>
+            <a:r>
+              <a:rPr sz="1400" b="0" i="1">
+                <a:solidFill>
+                  <a:srgbClr val="111111"/>
+                </a:solidFill>
+                <a:latin typeface="Cambria"/>
+              </a:rPr>
+              <a:t>σ</a:t>
+            </a:r>
+            <a:r>
+              <a:rPr sz="1400" b="0" i="0">
+                <a:solidFill>
+                  <a:srgbClr val="111111"/>
+                </a:solidFill>
+                <a:latin typeface="Cambria"/>
+              </a:rPr>
+              <a:t>: the table's spreads at levels </a:t>
+            </a:r>
+            <a:r>
+              <a:rPr sz="1400" b="0" i="1">
+                <a:solidFill>
+                  <a:srgbClr val="111111"/>
+                </a:solidFill>
+                <a:latin typeface="Cambria"/>
+              </a:rPr>
+              <a:t>k</a:t>
+            </a:r>
+            <a:r>
+              <a:rPr sz="1400" b="0" i="0">
+                <a:solidFill>
+                  <a:srgbClr val="111111"/>
+                </a:solidFill>
+                <a:latin typeface="Cambria"/>
+              </a:rPr>
+              <a:t> to </a:t>
+            </a:r>
+            <a:r>
+              <a:rPr sz="1400" b="0" i="1">
+                <a:solidFill>
+                  <a:srgbClr val="111111"/>
+                </a:solidFill>
+                <a:latin typeface="Cambria"/>
+              </a:rPr>
+              <a:t>k</a:t>
+            </a:r>
+            <a:r>
+              <a:rPr sz="1400" b="0" i="0">
+                <a:solidFill>
+                  <a:srgbClr val="111111"/>
+                </a:solidFill>
+                <a:latin typeface="Cambria"/>
+              </a:rPr>
+              <a:t> + </a:t>
+            </a:r>
+            <a:r>
+              <a:rPr sz="1400" b="0" i="1">
+                <a:solidFill>
+                  <a:srgbClr val="111111"/>
+                </a:solidFill>
+                <a:latin typeface="Cambria"/>
+              </a:rPr>
+              <a:t>n</a:t>
+            </a:r>
+            <a:r>
+              <a:rPr sz="1400" b="0" i="0">
+                <a:solidFill>
+                  <a:srgbClr val="111111"/>
+                </a:solidFill>
+                <a:latin typeface="Cambria"/>
+              </a:rPr>
+              <a:t> − 1, scaled by the column's size </a:t>
+            </a:r>
+            <a:r>
+              <a:rPr sz="1400" b="0" i="1">
+                <a:solidFill>
+                  <a:srgbClr val="111111"/>
+                </a:solidFill>
+                <a:latin typeface="Cambria"/>
+              </a:rPr>
+              <a:t>s</a:t>
+            </a:r>
+            <a:r>
+              <a:rPr sz="1400" b="0" i="0">
+                <a:solidFill>
+                  <a:srgbClr val="111111"/>
+                </a:solidFill>
+                <a:latin typeface="Cambria"/>
+              </a:rPr>
+              <a:t>; the covariance is inverted in closed form and </a:t>
+            </a:r>
+            <a:r>
+              <a:rPr sz="1400" b="0" i="1">
+                <a:solidFill>
+                  <a:srgbClr val="111111"/>
+                </a:solidFill>
+                <a:latin typeface="Cambria"/>
+              </a:rPr>
+              <a:t>log s</a:t>
+            </a:r>
+            <a:r>
+              <a:rPr sz="1400" b="0" i="0">
+                <a:solidFill>
+                  <a:srgbClr val="111111"/>
+                </a:solidFill>
+                <a:latin typeface="Cambria"/>
+              </a:rPr>
+              <a:t> is integrated by Gauss–Hermite quadrature on 161 nodes.</a:t>
+            </a:r>
+          </a:p>
+          <a:p>
+            <a:pPr algn="l">
+              <a:spcAft>
+                <a:spcPts val="600"/>
+              </a:spcAft>
+            </a:pPr>
+            <a:r>
+              <a:rPr sz="1400" b="0" i="0">
+                <a:solidFill>
+                  <a:srgbClr val="111111"/>
+                </a:solidFill>
+                <a:latin typeface="Cambria"/>
+              </a:rPr>
+              <a:t>So it is the Bayes rule for this generator: no formula or network on the same measures names more fields correctly on average.</a:t>
             </a:r>
           </a:p>
         </p:txBody>
       </p:sp>
-      <p:sp>
-        <p:nvSpPr>
-          <p:cNvPr id="10" name="Text: citation"/>
+      <p:pic>
+        <p:nvPicPr>
+          <p:cNvPr id="9" name="Figure: exact_slide_posterior" descr="Bayes' rule over every place. Top, the prior over the middle body's level for one body (for n bodies, uniform over the 23 - n places); below, its posterior from one, three and nine bodies centred on T12, for the scoring column nearest the median of 2,000 at all three widths. Uniform prior, so the posterior is the normalised likelihood."/>
+          <p:cNvPicPr>
+            <a:picLocks noChangeAspect="1"/>
+          </p:cNvPicPr>
+          <p:nvPr/>
+        </p:nvPicPr>
+        <p:blipFill>
+          <a:blip r:embed="rId6"/>
+          <a:stretch>
+            <a:fillRect/>
+          </a:stretch>
+        </p:blipFill>
+        <p:spPr>
+          <a:xfrm>
+            <a:off x="5897880" y="1371600"/>
+            <a:ext cx="5760720" cy="4800600"/>
+          </a:xfrm>
+          <a:prstGeom prst="rect">
+            <a:avLst/>
+          </a:prstGeom>
+        </p:spPr>
+      </p:pic>
+      <p:sp>
+        <p:nvSpPr>
+          <p:cNvPr id="10" name="Text: footer"/>
           <p:cNvSpPr txBox="1"/>
           <p:nvPr/>
         </p:nvSpPr>
         <p:spPr>
           <a:xfrm>
-            <a:off x="548640" y="6327648"/>
-            <a:ext cx="9692640" cy="365760"/>
+            <a:off x="548640" y="6272784"/>
+            <a:ext cx="9966960" cy="411480"/>
           </a:xfrm>
           <a:prstGeom prst="rect">
             <a:avLst/>
@@ -6882,13 +7384,29 @@
               </a:spcAft>
             </a:pPr>
             <a:r>
-              <a:rPr sz="900" b="0" i="0">
+              <a:rPr sz="1100" b="0" i="0">
                 <a:solidFill>
                   <a:srgbClr val="595959"/>
                 </a:solidFill>
                 <a:latin typeface="Cambria"/>
               </a:rPr>
-              <a:t>Synthetic columns drawn from Panjabi's published means and spreads (Spine 1991;16:861, 888; 1992;17:299); no patient data. Retrospective modelling, 2026.</a:t>
+              <a:t>Synthetic columns from Panjabi's published tables (Spine 1991;16:861, 888; 1992;17:299); no patient data.</a:t>
+            </a:r>
+          </a:p>
+          <a:p>
+            <a:pPr algn="l">
+              <a:spcAft>
+                <a:spcPts val="0"/>
+              </a:spcAft>
+            </a:pPr>
+            <a:r>
+              <a:rPr sz="1100" b="1" i="0">
+                <a:solidFill>
+                  <a:srgbClr val="111111"/>
+                </a:solidFill>
+                <a:latin typeface="Cambria"/>
+              </a:rPr>
+              <a:t>Confidential: pre-filing draft, not for distribution</a:t>
             </a:r>
           </a:p>
         </p:txBody>
@@ -6901,8 +7419,8 @@
         </p:nvSpPr>
         <p:spPr>
           <a:xfrm>
-            <a:off x="10725912" y="6327648"/>
-            <a:ext cx="914400" cy="365760"/>
+            <a:off x="10725912" y="6272784"/>
+            <a:ext cx="914400" cy="274320"/>
           </a:xfrm>
           <a:prstGeom prst="rect">
             <a:avLst/>
@@ -6921,7 +7439,1237 @@
               </a:spcAft>
             </a:pPr>
             <a:r>
-              <a:rPr sz="900" b="0" i="0">
+              <a:rPr sz="1100" b="0" i="0">
+                <a:solidFill>
+                  <a:srgbClr val="595959"/>
+                </a:solidFill>
+                <a:latin typeface="Cambria"/>
+              </a:rPr>
+              <a:t>2 / 5</a:t>
+            </a:r>
+          </a:p>
+        </p:txBody>
+      </p:sp>
+    </p:spTree>
+  </p:cSld>
+  <p:clrMapOvr>
+    <a:masterClrMapping/>
+  </p:clrMapOvr>
+</p:sld>
+</file>
+
+<file path=ppt/slides/slide3.xml><?xml version="1.0" encoding="utf-8"?>
+<p:sld xmlns:a="http://schemas.openxmlformats.org/drawingml/2006/main" xmlns:p="http://schemas.openxmlformats.org/presentationml/2006/main" xmlns:r="http://schemas.openxmlformats.org/officeDocument/2006/relationships">
+  <p:cSld>
+    <p:spTree>
+      <p:nvGrpSpPr>
+        <p:cNvPr id="1" name=""/>
+        <p:cNvGrpSpPr/>
+        <p:nvPr/>
+      </p:nvGrpSpPr>
+      <p:grpSpPr/>
+      <p:sp>
+        <p:nvSpPr>
+          <p:cNvPr id="2" name="Title 1"/>
+          <p:cNvSpPr>
+            <a:spLocks noGrp="1"/>
+          </p:cNvSpPr>
+          <p:nvPr>
+            <p:ph type="title"/>
+          </p:nvPr>
+        </p:nvSpPr>
+        <p:spPr>
+          <a:xfrm>
+            <a:off x="548640" y="274320"/>
+            <a:ext cx="11091672" cy="960120"/>
+          </a:xfrm>
+        </p:spPr>
+        <p:txBody>
+          <a:bodyPr wrap="square" anchor="b"/>
+          <a:lstStyle/>
+          <a:p>
+            <a:pPr algn="l"/>
+            <a:r>
+              <a:rPr sz="2800" b="1">
+                <a:solidFill>
+                  <a:srgbClr val="111111"/>
+                </a:solidFill>
+                <a:latin typeface="Cambria"/>
+              </a:rPr>
+              <a:t>Three bodies name 73%; when sure, 99.8% are right</a:t>
+            </a:r>
+          </a:p>
+        </p:txBody>
+      </p:sp>
+      <p:pic>
+        <p:nvPicPr>
+          <p:cNvPr id="3" name="Figure: exact_slide_ceiling" descr="Share of fields named exactly by the exact rule (solid) and named at posterior 0.99 (dashed), both planes, by consecutive bodies in view; crosses, a linear classifier fitted on other synthetic columns, scored on the first 1,000. 2,000 synthetic columns."/>
+          <p:cNvPicPr>
+            <a:picLocks noChangeAspect="1"/>
+          </p:cNvPicPr>
+          <p:nvPr/>
+        </p:nvPicPr>
+        <p:blipFill>
+          <a:blip r:embed="rId2"/>
+          <a:stretch>
+            <a:fillRect/>
+          </a:stretch>
+        </p:blipFill>
+        <p:spPr>
+          <a:xfrm>
+            <a:off x="548640" y="1325880"/>
+            <a:ext cx="5120640" cy="3794760"/>
+          </a:xfrm>
+          <a:prstGeom prst="rect">
+            <a:avLst/>
+          </a:prstGeom>
+        </p:spPr>
+      </p:pic>
+      <p:pic>
+        <p:nvPicPr>
+          <p:cNvPr id="4" name="Figure: exact_slide_calibration" descr="The posterior is the chance of being right: error the posterior predicts against error counted, by posterior bin, one, three and nine bodies, both planes; dotted, exact agreement; a bin with no error counted sits on the floor. 2,000 synthetic columns."/>
+          <p:cNvPicPr>
+            <a:picLocks noChangeAspect="1"/>
+          </p:cNvPicPr>
+          <p:nvPr/>
+        </p:nvPicPr>
+        <p:blipFill>
+          <a:blip r:embed="rId3"/>
+          <a:stretch>
+            <a:fillRect/>
+          </a:stretch>
+        </p:blipFill>
+        <p:spPr>
+          <a:xfrm>
+            <a:off x="5715000" y="1371600"/>
+            <a:ext cx="3337560" cy="3291840"/>
+          </a:xfrm>
+          <a:prstGeom prst="rect">
+            <a:avLst/>
+          </a:prstGeom>
+        </p:spPr>
+      </p:pic>
+      <p:sp>
+        <p:nvSpPr>
+          <p:cNvPr id="5" name="Text: stat three bodies"/>
+          <p:cNvSpPr txBox="1"/>
+          <p:nvPr/>
+        </p:nvSpPr>
+        <p:spPr>
+          <a:xfrm>
+            <a:off x="9189720" y="1371600"/>
+            <a:ext cx="2450592" cy="1325880"/>
+          </a:xfrm>
+          <a:prstGeom prst="rect">
+            <a:avLst/>
+          </a:prstGeom>
+          <a:noFill/>
+        </p:spPr>
+        <p:txBody>
+          <a:bodyPr wrap="square" anchor="t" lIns="18288" rIns="18288" tIns="18288" bIns="18288">
+            <a:spAutoFit/>
+          </a:bodyPr>
+          <a:lstStyle/>
+          <a:p>
+            <a:pPr algn="l">
+              <a:lnSpc>
+                <a:spcPct val="95000"/>
+              </a:lnSpc>
+              <a:spcAft>
+                <a:spcPts val="100"/>
+              </a:spcAft>
+            </a:pPr>
+            <a:r>
+              <a:rPr sz="3600" b="1" i="0">
+                <a:solidFill>
+                  <a:srgbClr val="1B4F8C"/>
+                </a:solidFill>
+                <a:latin typeface="Cambria"/>
+              </a:rPr>
+              <a:t>73%</a:t>
+            </a:r>
+          </a:p>
+          <a:p>
+            <a:pPr algn="l">
+              <a:lnSpc>
+                <a:spcPct val="95000"/>
+              </a:lnSpc>
+              <a:spcAft>
+                <a:spcPts val="100"/>
+              </a:spcAft>
+            </a:pPr>
+            <a:r>
+              <a:rPr sz="1300" b="0" i="0">
+                <a:solidFill>
+                  <a:srgbClr val="111111"/>
+                </a:solidFill>
+                <a:latin typeface="Cambria"/>
+              </a:rPr>
+              <a:t>of three-body fields named exactly (a linear classifier: 58.2%; a fitted network: 71.6%)</a:t>
+            </a:r>
+          </a:p>
+        </p:txBody>
+      </p:sp>
+      <p:sp>
+        <p:nvSpPr>
+          <p:cNvPr id="6" name="Text: stat precision"/>
+          <p:cNvSpPr txBox="1"/>
+          <p:nvPr/>
+        </p:nvSpPr>
+        <p:spPr>
+          <a:xfrm>
+            <a:off x="9189720" y="2743200"/>
+            <a:ext cx="2450592" cy="1371600"/>
+          </a:xfrm>
+          <a:prstGeom prst="rect">
+            <a:avLst/>
+          </a:prstGeom>
+          <a:noFill/>
+        </p:spPr>
+        <p:txBody>
+          <a:bodyPr wrap="square" anchor="t" lIns="18288" rIns="18288" tIns="18288" bIns="18288">
+            <a:spAutoFit/>
+          </a:bodyPr>
+          <a:lstStyle/>
+          <a:p>
+            <a:pPr algn="l">
+              <a:lnSpc>
+                <a:spcPct val="95000"/>
+              </a:lnSpc>
+              <a:spcAft>
+                <a:spcPts val="100"/>
+              </a:spcAft>
+            </a:pPr>
+            <a:r>
+              <a:rPr sz="3600" b="1" i="0">
+                <a:solidFill>
+                  <a:srgbClr val="1B4F8C"/>
+                </a:solidFill>
+                <a:latin typeface="Cambria"/>
+              </a:rPr>
+              <a:t>99.8%</a:t>
+            </a:r>
+          </a:p>
+          <a:p>
+            <a:pPr algn="l">
+              <a:lnSpc>
+                <a:spcPct val="95000"/>
+              </a:lnSpc>
+              <a:spcAft>
+                <a:spcPts val="100"/>
+              </a:spcAft>
+            </a:pPr>
+            <a:r>
+              <a:rPr sz="1300" b="0" i="0">
+                <a:solidFill>
+                  <a:srgbClr val="111111"/>
+                </a:solidFill>
+                <a:latin typeface="Cambria"/>
+              </a:rPr>
+              <a:t>of three-body names given at posterior 0.99 right (15 wrong of 6,848; named for 17% of fields)</a:t>
+            </a:r>
+          </a:p>
+        </p:txBody>
+      </p:sp>
+      <p:sp>
+        <p:nvSpPr>
+          <p:cNvPr id="7" name="Text: stat nine bodies"/>
+          <p:cNvSpPr txBox="1"/>
+          <p:nvPr/>
+        </p:nvSpPr>
+        <p:spPr>
+          <a:xfrm>
+            <a:off x="9189720" y="4160520"/>
+            <a:ext cx="2450592" cy="868680"/>
+          </a:xfrm>
+          <a:prstGeom prst="rect">
+            <a:avLst/>
+          </a:prstGeom>
+          <a:noFill/>
+        </p:spPr>
+        <p:txBody>
+          <a:bodyPr wrap="square" anchor="t" lIns="18288" rIns="18288" tIns="18288" bIns="18288">
+            <a:spAutoFit/>
+          </a:bodyPr>
+          <a:lstStyle/>
+          <a:p>
+            <a:pPr algn="l">
+              <a:lnSpc>
+                <a:spcPct val="95000"/>
+              </a:lnSpc>
+              <a:spcAft>
+                <a:spcPts val="100"/>
+              </a:spcAft>
+            </a:pPr>
+            <a:r>
+              <a:rPr sz="3600" b="1" i="0">
+                <a:solidFill>
+                  <a:srgbClr val="1B4F8C"/>
+                </a:solidFill>
+                <a:latin typeface="Cambria"/>
+              </a:rPr>
+              <a:t>96%</a:t>
+            </a:r>
+          </a:p>
+          <a:p>
+            <a:pPr algn="l">
+              <a:lnSpc>
+                <a:spcPct val="95000"/>
+              </a:lnSpc>
+              <a:spcAft>
+                <a:spcPts val="100"/>
+              </a:spcAft>
+            </a:pPr>
+            <a:r>
+              <a:rPr sz="1300" b="0" i="0">
+                <a:solidFill>
+                  <a:srgbClr val="111111"/>
+                </a:solidFill>
+                <a:latin typeface="Cambria"/>
+              </a:rPr>
+              <a:t>named exactly from nine bodies</a:t>
+            </a:r>
+          </a:p>
+        </p:txBody>
+      </p:sp>
+      <p:sp>
+        <p:nvSpPr>
+          <p:cNvPr id="8" name="Text: guarantee"/>
+          <p:cNvSpPr txBox="1"/>
+          <p:nvPr/>
+        </p:nvSpPr>
+        <p:spPr>
+          <a:xfrm>
+            <a:off x="548640" y="5230368"/>
+            <a:ext cx="5029200" cy="960120"/>
+          </a:xfrm>
+          <a:prstGeom prst="rect">
+            <a:avLst/>
+          </a:prstGeom>
+          <a:noFill/>
+        </p:spPr>
+        <p:txBody>
+          <a:bodyPr wrap="square" anchor="t" lIns="18288" rIns="18288" tIns="18288" bIns="18288">
+            <a:spAutoFit/>
+          </a:bodyPr>
+          <a:lstStyle/>
+          <a:p>
+            <a:pPr algn="l">
+              <a:spcAft>
+                <a:spcPts val="600"/>
+              </a:spcAft>
+            </a:pPr>
+            <a:r>
+              <a:rPr sz="1400" b="0" i="0">
+                <a:solidFill>
+                  <a:srgbClr val="111111"/>
+                </a:solidFill>
+                <a:latin typeface="Cambria"/>
+              </a:rPr>
+              <a:t>Answer only when </a:t>
+            </a:r>
+            <a:r>
+              <a:rPr sz="1400" b="0" i="1">
+                <a:solidFill>
+                  <a:srgbClr val="111111"/>
+                </a:solidFill>
+                <a:latin typeface="Cambria"/>
+              </a:rPr>
+              <a:t>p̂</a:t>
+            </a:r>
+            <a:r>
+              <a:rPr sz="1400" b="0" i="0">
+                <a:solidFill>
+                  <a:srgbClr val="111111"/>
+                </a:solidFill>
+                <a:latin typeface="Cambria"/>
+              </a:rPr>
+              <a:t> reaches 0.99, and the name is right at least 99% of the times it is given, in expectation, while the generator is the truth.</a:t>
+            </a:r>
+          </a:p>
+        </p:txBody>
+      </p:sp>
+      <mc:AlternateContent xmlns:mc="http://schemas.openxmlformats.org/markup-compatibility/2006">
+        <mc:Choice xmlns:a14="http://schemas.microsoft.com/office/drawing/2010/main" Requires="a14">
+          <p:sp>
+            <p:nvSpPr>
+              <p:cNvPr id="9" name="Equation: selective" descr="LaTeX: \Pr\left(\hat{k} = k \mid \hat{p} \geq 1-\varepsilon\right) = \mathbb{E}\left[\hat{p} \mid \hat{p} \geq 1-\varepsilon\right] \geq 1-\varepsilon"/>
+              <p:cNvSpPr txBox="1"/>
+              <p:nvPr/>
+            </p:nvSpPr>
+            <p:spPr>
+              <a:xfrm>
+                <a:off x="5715000" y="5193792"/>
+                <a:ext cx="4282440" cy="323088"/>
+              </a:xfrm>
+              <a:prstGeom prst="rect">
+                <a:avLst/>
+              </a:prstGeom>
+              <a:noFill/>
+            </p:spPr>
+            <p:txBody>
+              <a:bodyPr wrap="none" lIns="0" tIns="0" rIns="0" bIns="0" anchor="ctr">
+                <a:noAutofit/>
+              </a:bodyPr>
+              <a:lstStyle/>
+              <a:p>
+                <a:pPr algn="l"/>
+                <a14:m>
+                  <m:oMathPara xmlns:m="http://schemas.openxmlformats.org/officeDocument/2006/math">
+                    <m:oMathParaPr>
+                      <m:jc m:val="left"/>
+                    </m:oMathParaPr>
+                    <m:oMath>
+                      <m:r>
+                        <m:rPr>
+                          <m:sty m:val="p"/>
+                        </m:rPr>
+                        <a:rPr lang="en-US" i="1" sz="1700">
+                          <a:solidFill>
+                            <a:srgbClr val="111111"/>
+                          </a:solidFill>
+                          <a:latin typeface="Cambria Math"/>
+                          <a:cs typeface="Cambria Math"/>
+                        </a:rPr>
+                        <m:t>Pr</m:t>
+                      </m:r>
+                      <m:d>
+                        <m:dPr>
+                          <m:begChr m:val="("/>
+                          <m:endChr m:val=")"/>
+                          <m:sepChr m:val=""/>
+                          <m:grow/>
+                        </m:dPr>
+                        <m:e>
+                          <m:acc>
+                            <m:accPr>
+                              <m:chr m:val="̂"/>
+                            </m:accPr>
+                            <m:e>
+                              <m:r>
+                                <a:rPr lang="en-US" i="1" sz="1700">
+                                  <a:solidFill>
+                                    <a:srgbClr val="111111"/>
+                                  </a:solidFill>
+                                  <a:latin typeface="Cambria Math"/>
+                                  <a:cs typeface="Cambria Math"/>
+                                </a:rPr>
+                                <m:t>k</m:t>
+                              </m:r>
+                            </m:e>
+                          </m:acc>
+                          <m:r>
+                            <m:rPr>
+                              <m:sty m:val="p"/>
+                            </m:rPr>
+                            <a:rPr lang="en-US" i="1" sz="1700">
+                              <a:solidFill>
+                                <a:srgbClr val="111111"/>
+                              </a:solidFill>
+                              <a:latin typeface="Cambria Math"/>
+                              <a:cs typeface="Cambria Math"/>
+                            </a:rPr>
+                            <m:t>=</m:t>
+                          </m:r>
+                          <m:r>
+                            <a:rPr lang="en-US" i="1" sz="1700">
+                              <a:solidFill>
+                                <a:srgbClr val="111111"/>
+                              </a:solidFill>
+                              <a:latin typeface="Cambria Math"/>
+                              <a:cs typeface="Cambria Math"/>
+                            </a:rPr>
+                            <m:t>k</m:t>
+                          </m:r>
+                          <m:r>
+                            <m:rPr>
+                              <m:sty m:val="p"/>
+                            </m:rPr>
+                            <a:rPr lang="en-US" i="1" sz="1700">
+                              <a:solidFill>
+                                <a:srgbClr val="111111"/>
+                              </a:solidFill>
+                              <a:latin typeface="Cambria Math"/>
+                              <a:cs typeface="Cambria Math"/>
+                            </a:rPr>
+                            <m:t>∣</m:t>
+                          </m:r>
+                          <m:acc>
+                            <m:accPr>
+                              <m:chr m:val="̂"/>
+                            </m:accPr>
+                            <m:e>
+                              <m:r>
+                                <a:rPr lang="en-US" i="1" sz="1700">
+                                  <a:solidFill>
+                                    <a:srgbClr val="111111"/>
+                                  </a:solidFill>
+                                  <a:latin typeface="Cambria Math"/>
+                                  <a:cs typeface="Cambria Math"/>
+                                </a:rPr>
+                                <m:t>p</m:t>
+                              </m:r>
+                            </m:e>
+                          </m:acc>
+                          <m:r>
+                            <m:rPr>
+                              <m:sty m:val="p"/>
+                            </m:rPr>
+                            <a:rPr lang="en-US" i="1" sz="1700">
+                              <a:solidFill>
+                                <a:srgbClr val="111111"/>
+                              </a:solidFill>
+                              <a:latin typeface="Cambria Math"/>
+                              <a:cs typeface="Cambria Math"/>
+                            </a:rPr>
+                            <m:t>≥</m:t>
+                          </m:r>
+                          <m:r>
+                            <a:rPr lang="en-US" i="1" sz="1700">
+                              <a:solidFill>
+                                <a:srgbClr val="111111"/>
+                              </a:solidFill>
+                              <a:latin typeface="Cambria Math"/>
+                              <a:cs typeface="Cambria Math"/>
+                            </a:rPr>
+                            <m:t>1</m:t>
+                          </m:r>
+                          <m:r>
+                            <m:rPr>
+                              <m:sty m:val="p"/>
+                            </m:rPr>
+                            <a:rPr lang="en-US" i="1" sz="1700">
+                              <a:solidFill>
+                                <a:srgbClr val="111111"/>
+                              </a:solidFill>
+                              <a:latin typeface="Cambria Math"/>
+                              <a:cs typeface="Cambria Math"/>
+                            </a:rPr>
+                            <m:t>−</m:t>
+                          </m:r>
+                          <m:r>
+                            <a:rPr lang="en-US" i="1" sz="1700">
+                              <a:solidFill>
+                                <a:srgbClr val="111111"/>
+                              </a:solidFill>
+                              <a:latin typeface="Cambria Math"/>
+                              <a:cs typeface="Cambria Math"/>
+                            </a:rPr>
+                            <m:t>ε</m:t>
+                          </m:r>
+                        </m:e>
+                      </m:d>
+                      <m:r>
+                        <m:rPr>
+                          <m:sty m:val="p"/>
+                        </m:rPr>
+                        <a:rPr lang="en-US" i="1" sz="1700">
+                          <a:solidFill>
+                            <a:srgbClr val="111111"/>
+                          </a:solidFill>
+                          <a:latin typeface="Cambria Math"/>
+                          <a:cs typeface="Cambria Math"/>
+                        </a:rPr>
+                        <m:t>=</m:t>
+                      </m:r>
+                      <m:r>
+                        <m:rPr>
+                          <m:sty m:val="p"/>
+                          <m:scr m:val="double-struck"/>
+                        </m:rPr>
+                        <a:rPr lang="en-US" i="1" sz="1700">
+                          <a:solidFill>
+                            <a:srgbClr val="111111"/>
+                          </a:solidFill>
+                          <a:latin typeface="Cambria Math"/>
+                          <a:cs typeface="Cambria Math"/>
+                        </a:rPr>
+                        <m:t>E</m:t>
+                      </m:r>
+                      <m:d>
+                        <m:dPr>
+                          <m:begChr m:val="["/>
+                          <m:endChr m:val="]"/>
+                          <m:sepChr m:val=""/>
+                          <m:grow/>
+                        </m:dPr>
+                        <m:e>
+                          <m:acc>
+                            <m:accPr>
+                              <m:chr m:val="̂"/>
+                            </m:accPr>
+                            <m:e>
+                              <m:r>
+                                <a:rPr lang="en-US" i="1" sz="1700">
+                                  <a:solidFill>
+                                    <a:srgbClr val="111111"/>
+                                  </a:solidFill>
+                                  <a:latin typeface="Cambria Math"/>
+                                  <a:cs typeface="Cambria Math"/>
+                                </a:rPr>
+                                <m:t>p</m:t>
+                              </m:r>
+                            </m:e>
+                          </m:acc>
+                          <m:r>
+                            <m:rPr>
+                              <m:sty m:val="p"/>
+                            </m:rPr>
+                            <a:rPr lang="en-US" i="1" sz="1700">
+                              <a:solidFill>
+                                <a:srgbClr val="111111"/>
+                              </a:solidFill>
+                              <a:latin typeface="Cambria Math"/>
+                              <a:cs typeface="Cambria Math"/>
+                            </a:rPr>
+                            <m:t>∣</m:t>
+                          </m:r>
+                          <m:acc>
+                            <m:accPr>
+                              <m:chr m:val="̂"/>
+                            </m:accPr>
+                            <m:e>
+                              <m:r>
+                                <a:rPr lang="en-US" i="1" sz="1700">
+                                  <a:solidFill>
+                                    <a:srgbClr val="111111"/>
+                                  </a:solidFill>
+                                  <a:latin typeface="Cambria Math"/>
+                                  <a:cs typeface="Cambria Math"/>
+                                </a:rPr>
+                                <m:t>p</m:t>
+                              </m:r>
+                            </m:e>
+                          </m:acc>
+                          <m:r>
+                            <m:rPr>
+                              <m:sty m:val="p"/>
+                            </m:rPr>
+                            <a:rPr lang="en-US" i="1" sz="1700">
+                              <a:solidFill>
+                                <a:srgbClr val="111111"/>
+                              </a:solidFill>
+                              <a:latin typeface="Cambria Math"/>
+                              <a:cs typeface="Cambria Math"/>
+                            </a:rPr>
+                            <m:t>≥</m:t>
+                          </m:r>
+                          <m:r>
+                            <a:rPr lang="en-US" i="1" sz="1700">
+                              <a:solidFill>
+                                <a:srgbClr val="111111"/>
+                              </a:solidFill>
+                              <a:latin typeface="Cambria Math"/>
+                              <a:cs typeface="Cambria Math"/>
+                            </a:rPr>
+                            <m:t>1</m:t>
+                          </m:r>
+                          <m:r>
+                            <m:rPr>
+                              <m:sty m:val="p"/>
+                            </m:rPr>
+                            <a:rPr lang="en-US" i="1" sz="1700">
+                              <a:solidFill>
+                                <a:srgbClr val="111111"/>
+                              </a:solidFill>
+                              <a:latin typeface="Cambria Math"/>
+                              <a:cs typeface="Cambria Math"/>
+                            </a:rPr>
+                            <m:t>−</m:t>
+                          </m:r>
+                          <m:r>
+                            <a:rPr lang="en-US" i="1" sz="1700">
+                              <a:solidFill>
+                                <a:srgbClr val="111111"/>
+                              </a:solidFill>
+                              <a:latin typeface="Cambria Math"/>
+                              <a:cs typeface="Cambria Math"/>
+                            </a:rPr>
+                            <m:t>ε</m:t>
+                          </m:r>
+                        </m:e>
+                      </m:d>
+                      <m:r>
+                        <m:rPr>
+                          <m:sty m:val="p"/>
+                        </m:rPr>
+                        <a:rPr lang="en-US" i="1" sz="1700">
+                          <a:solidFill>
+                            <a:srgbClr val="111111"/>
+                          </a:solidFill>
+                          <a:latin typeface="Cambria Math"/>
+                          <a:cs typeface="Cambria Math"/>
+                        </a:rPr>
+                        <m:t>≥</m:t>
+                      </m:r>
+                      <m:r>
+                        <a:rPr lang="en-US" i="1" sz="1700">
+                          <a:solidFill>
+                            <a:srgbClr val="111111"/>
+                          </a:solidFill>
+                          <a:latin typeface="Cambria Math"/>
+                          <a:cs typeface="Cambria Math"/>
+                        </a:rPr>
+                        <m:t>1</m:t>
+                      </m:r>
+                      <m:r>
+                        <m:rPr>
+                          <m:sty m:val="p"/>
+                        </m:rPr>
+                        <a:rPr lang="en-US" i="1" sz="1700">
+                          <a:solidFill>
+                            <a:srgbClr val="111111"/>
+                          </a:solidFill>
+                          <a:latin typeface="Cambria Math"/>
+                          <a:cs typeface="Cambria Math"/>
+                        </a:rPr>
+                        <m:t>−</m:t>
+                      </m:r>
+                      <m:r>
+                        <a:rPr lang="en-US" i="1" sz="1700">
+                          <a:solidFill>
+                            <a:srgbClr val="111111"/>
+                          </a:solidFill>
+                          <a:latin typeface="Cambria Math"/>
+                          <a:cs typeface="Cambria Math"/>
+                        </a:rPr>
+                        <m:t>ε</m:t>
+                      </m:r>
+                    </m:oMath>
+                  </m:oMathPara>
+                </a14:m>
+                <a:endParaRPr lang="en-US" sz="1700"/>
+              </a:p>
+            </p:txBody>
+          </p:sp>
+        </mc:Choice>
+        <mc:Fallback>
+          <p:sp>
+            <p:nvSpPr>
+              <p:cNvPr id="9" name="Equation: selective" descr="LaTeX: \Pr\left(\hat{k} = k \mid \hat{p} \geq 1-\varepsilon\right) = \mathbb{E}\left[\hat{p} \mid \hat{p} \geq 1-\varepsilon\right] \geq 1-\varepsilon"/>
+              <p:cNvSpPr txBox="1">
+                <a:spLocks noRot="1" noChangeAspect="1" noMove="1" noResize="1" noEditPoints="1" noAdjustHandles="1" noChangeArrowheads="1" noChangeShapeType="1" noTextEdit="1"/>
+              </p:cNvSpPr>
+              <p:nvPr/>
+            </p:nvSpPr>
+            <p:spPr>
+              <a:xfrm>
+                <a:off x="5715000" y="5193792"/>
+                <a:ext cx="4282440" cy="323088"/>
+              </a:xfrm>
+              <a:prstGeom prst="rect">
+                <a:avLst/>
+              </a:prstGeom>
+              <a:blipFill>
+                <a:blip r:embed="rId4"/>
+                <a:stretch>
+                  <a:fillRect/>
+                </a:stretch>
+              </a:blipFill>
+            </p:spPr>
+            <p:txBody>
+              <a:bodyPr/>
+              <a:lstStyle/>
+              <a:p>
+                <a:r>
+                  <a:rPr lang="en-US">
+                    <a:noFill/>
+                  </a:rPr>
+                  <a:t> </a:t>
+                </a:r>
+              </a:p>
+            </p:txBody>
+          </p:sp>
+        </mc:Fallback>
+      </mc:AlternateContent>
+      <mc:AlternateContent xmlns:mc="http://schemas.openxmlformats.org/markup-compatibility/2006">
+        <mc:Choice xmlns:a14="http://schemas.microsoft.com/office/drawing/2010/main" Requires="a14">
+          <p:sp>
+            <p:nvSpPr>
+              <p:cNvPr id="10" name="Equation: estimate" descr="LaTeX: \hat{k} = \arg\max_{k}\, p(k \mid x_{1:n}),\qquad \hat{p} = p(\hat{k} \mid x_{1:n})"/>
+              <p:cNvSpPr txBox="1"/>
+              <p:nvPr/>
+            </p:nvSpPr>
+            <p:spPr>
+              <a:xfrm>
+                <a:off x="5715000" y="5590032"/>
+                <a:ext cx="3541776" cy="374904"/>
+              </a:xfrm>
+              <a:prstGeom prst="rect">
+                <a:avLst/>
+              </a:prstGeom>
+              <a:noFill/>
+            </p:spPr>
+            <p:txBody>
+              <a:bodyPr wrap="none" lIns="0" tIns="0" rIns="0" bIns="0" anchor="ctr">
+                <a:noAutofit/>
+              </a:bodyPr>
+              <a:lstStyle/>
+              <a:p>
+                <a:pPr algn="l"/>
+                <a14:m>
+                  <m:oMathPara xmlns:m="http://schemas.openxmlformats.org/officeDocument/2006/math">
+                    <m:oMathParaPr>
+                      <m:jc m:val="left"/>
+                    </m:oMathParaPr>
+                    <m:oMath>
+                      <m:acc>
+                        <m:accPr>
+                          <m:chr m:val="̂"/>
+                        </m:accPr>
+                        <m:e>
+                          <m:r>
+                            <a:rPr lang="en-US" i="1" sz="1500">
+                              <a:solidFill>
+                                <a:srgbClr val="111111"/>
+                              </a:solidFill>
+                              <a:latin typeface="Cambria Math"/>
+                              <a:cs typeface="Cambria Math"/>
+                            </a:rPr>
+                            <m:t>k</m:t>
+                          </m:r>
+                        </m:e>
+                      </m:acc>
+                      <m:r>
+                        <m:rPr>
+                          <m:sty m:val="p"/>
+                        </m:rPr>
+                        <a:rPr lang="en-US" i="1" sz="1500">
+                          <a:solidFill>
+                            <a:srgbClr val="111111"/>
+                          </a:solidFill>
+                          <a:latin typeface="Cambria Math"/>
+                          <a:cs typeface="Cambria Math"/>
+                        </a:rPr>
+                        <m:t>=</m:t>
+                      </m:r>
+                      <m:r>
+                        <m:rPr>
+                          <m:sty m:val="p"/>
+                        </m:rPr>
+                        <a:rPr lang="en-US" i="1" sz="1500">
+                          <a:solidFill>
+                            <a:srgbClr val="111111"/>
+                          </a:solidFill>
+                          <a:latin typeface="Cambria Math"/>
+                          <a:cs typeface="Cambria Math"/>
+                        </a:rPr>
+                        <m:t>arg</m:t>
+                      </m:r>
+                      <m:limLow>
+                        <m:e>
+                          <m:r>
+                            <m:rPr>
+                              <m:sty m:val="p"/>
+                            </m:rPr>
+                            <a:rPr lang="en-US" i="1" sz="1500">
+                              <a:solidFill>
+                                <a:srgbClr val="111111"/>
+                              </a:solidFill>
+                              <a:latin typeface="Cambria Math"/>
+                              <a:cs typeface="Cambria Math"/>
+                            </a:rPr>
+                            <m:t>max</m:t>
+                          </m:r>
+                        </m:e>
+                        <m:lim>
+                          <m:r>
+                            <a:rPr lang="en-US" i="1" sz="1500">
+                              <a:solidFill>
+                                <a:srgbClr val="111111"/>
+                              </a:solidFill>
+                              <a:latin typeface="Cambria Math"/>
+                              <a:cs typeface="Cambria Math"/>
+                            </a:rPr>
+                            <m:t>k</m:t>
+                          </m:r>
+                        </m:lim>
+                      </m:limLow>
+                      <m:r>
+                        <a:rPr lang="en-US" i="1" sz="1500">
+                          <a:solidFill>
+                            <a:srgbClr val="111111"/>
+                          </a:solidFill>
+                          <a:latin typeface="Cambria Math"/>
+                          <a:cs typeface="Cambria Math"/>
+                        </a:rPr>
+                        <m:t> </m:t>
+                      </m:r>
+                      <m:r>
+                        <a:rPr lang="en-US" i="1" sz="1500">
+                          <a:solidFill>
+                            <a:srgbClr val="111111"/>
+                          </a:solidFill>
+                          <a:latin typeface="Cambria Math"/>
+                          <a:cs typeface="Cambria Math"/>
+                        </a:rPr>
+                        <m:t>p</m:t>
+                      </m:r>
+                      <m:d>
+                        <m:dPr>
+                          <m:begChr m:val="("/>
+                          <m:endChr m:val=")"/>
+                          <m:sepChr m:val=""/>
+                          <m:grow/>
+                        </m:dPr>
+                        <m:e>
+                          <m:r>
+                            <a:rPr lang="en-US" i="1" sz="1500">
+                              <a:solidFill>
+                                <a:srgbClr val="111111"/>
+                              </a:solidFill>
+                              <a:latin typeface="Cambria Math"/>
+                              <a:cs typeface="Cambria Math"/>
+                            </a:rPr>
+                            <m:t>k</m:t>
+                          </m:r>
+                          <m:r>
+                            <m:rPr>
+                              <m:sty m:val="p"/>
+                            </m:rPr>
+                            <a:rPr lang="en-US" i="1" sz="1500">
+                              <a:solidFill>
+                                <a:srgbClr val="111111"/>
+                              </a:solidFill>
+                              <a:latin typeface="Cambria Math"/>
+                              <a:cs typeface="Cambria Math"/>
+                            </a:rPr>
+                            <m:t>∣</m:t>
+                          </m:r>
+                          <m:sSub>
+                            <m:e>
+                              <m:r>
+                                <a:rPr lang="en-US" i="1" sz="1500">
+                                  <a:solidFill>
+                                    <a:srgbClr val="111111"/>
+                                  </a:solidFill>
+                                  <a:latin typeface="Cambria Math"/>
+                                  <a:cs typeface="Cambria Math"/>
+                                </a:rPr>
+                                <m:t>x</m:t>
+                              </m:r>
+                            </m:e>
+                            <m:sub>
+                              <m:r>
+                                <a:rPr lang="en-US" i="1" sz="1500">
+                                  <a:solidFill>
+                                    <a:srgbClr val="111111"/>
+                                  </a:solidFill>
+                                  <a:latin typeface="Cambria Math"/>
+                                  <a:cs typeface="Cambria Math"/>
+                                </a:rPr>
+                                <m:t>1</m:t>
+                              </m:r>
+                              <m:r>
+                                <m:rPr>
+                                  <m:sty m:val="p"/>
+                                </m:rPr>
+                                <a:rPr lang="en-US" i="1" sz="1500">
+                                  <a:solidFill>
+                                    <a:srgbClr val="111111"/>
+                                  </a:solidFill>
+                                  <a:latin typeface="Cambria Math"/>
+                                  <a:cs typeface="Cambria Math"/>
+                                </a:rPr>
+                                <m:t>:</m:t>
+                              </m:r>
+                              <m:r>
+                                <a:rPr lang="en-US" i="1" sz="1500">
+                                  <a:solidFill>
+                                    <a:srgbClr val="111111"/>
+                                  </a:solidFill>
+                                  <a:latin typeface="Cambria Math"/>
+                                  <a:cs typeface="Cambria Math"/>
+                                </a:rPr>
+                                <m:t>n</m:t>
+                              </m:r>
+                            </m:sub>
+                          </m:sSub>
+                        </m:e>
+                      </m:d>
+                      <m:r>
+                        <m:rPr>
+                          <m:sty m:val="p"/>
+                        </m:rPr>
+                        <a:rPr lang="en-US" i="1" sz="1500">
+                          <a:solidFill>
+                            <a:srgbClr val="111111"/>
+                          </a:solidFill>
+                          <a:latin typeface="Cambria Math"/>
+                          <a:cs typeface="Cambria Math"/>
+                        </a:rPr>
+                        <m:t>,</m:t>
+                      </m:r>
+                      <m:r>
+                        <a:rPr lang="en-US" i="1" sz="1500">
+                          <a:solidFill>
+                            <a:srgbClr val="111111"/>
+                          </a:solidFill>
+                          <a:latin typeface="Cambria Math"/>
+                          <a:cs typeface="Cambria Math"/>
+                        </a:rPr>
+                        <m:t>  </m:t>
+                      </m:r>
+                      <m:acc>
+                        <m:accPr>
+                          <m:chr m:val="̂"/>
+                        </m:accPr>
+                        <m:e>
+                          <m:r>
+                            <a:rPr lang="en-US" i="1" sz="1500">
+                              <a:solidFill>
+                                <a:srgbClr val="111111"/>
+                              </a:solidFill>
+                              <a:latin typeface="Cambria Math"/>
+                              <a:cs typeface="Cambria Math"/>
+                            </a:rPr>
+                            <m:t>p</m:t>
+                          </m:r>
+                        </m:e>
+                      </m:acc>
+                      <m:r>
+                        <m:rPr>
+                          <m:sty m:val="p"/>
+                        </m:rPr>
+                        <a:rPr lang="en-US" i="1" sz="1500">
+                          <a:solidFill>
+                            <a:srgbClr val="111111"/>
+                          </a:solidFill>
+                          <a:latin typeface="Cambria Math"/>
+                          <a:cs typeface="Cambria Math"/>
+                        </a:rPr>
+                        <m:t>=</m:t>
+                      </m:r>
+                      <m:r>
+                        <a:rPr lang="en-US" i="1" sz="1500">
+                          <a:solidFill>
+                            <a:srgbClr val="111111"/>
+                          </a:solidFill>
+                          <a:latin typeface="Cambria Math"/>
+                          <a:cs typeface="Cambria Math"/>
+                        </a:rPr>
+                        <m:t>p</m:t>
+                      </m:r>
+                      <m:d>
+                        <m:dPr>
+                          <m:begChr m:val="("/>
+                          <m:endChr m:val=")"/>
+                          <m:sepChr m:val=""/>
+                          <m:grow/>
+                        </m:dPr>
+                        <m:e>
+                          <m:acc>
+                            <m:accPr>
+                              <m:chr m:val="̂"/>
+                            </m:accPr>
+                            <m:e>
+                              <m:r>
+                                <a:rPr lang="en-US" i="1" sz="1500">
+                                  <a:solidFill>
+                                    <a:srgbClr val="111111"/>
+                                  </a:solidFill>
+                                  <a:latin typeface="Cambria Math"/>
+                                  <a:cs typeface="Cambria Math"/>
+                                </a:rPr>
+                                <m:t>k</m:t>
+                              </m:r>
+                            </m:e>
+                          </m:acc>
+                          <m:r>
+                            <m:rPr>
+                              <m:sty m:val="p"/>
+                            </m:rPr>
+                            <a:rPr lang="en-US" i="1" sz="1500">
+                              <a:solidFill>
+                                <a:srgbClr val="111111"/>
+                              </a:solidFill>
+                              <a:latin typeface="Cambria Math"/>
+                              <a:cs typeface="Cambria Math"/>
+                            </a:rPr>
+                            <m:t>∣</m:t>
+                          </m:r>
+                          <m:sSub>
+                            <m:e>
+                              <m:r>
+                                <a:rPr lang="en-US" i="1" sz="1500">
+                                  <a:solidFill>
+                                    <a:srgbClr val="111111"/>
+                                  </a:solidFill>
+                                  <a:latin typeface="Cambria Math"/>
+                                  <a:cs typeface="Cambria Math"/>
+                                </a:rPr>
+                                <m:t>x</m:t>
+                              </m:r>
+                            </m:e>
+                            <m:sub>
+                              <m:r>
+                                <a:rPr lang="en-US" i="1" sz="1500">
+                                  <a:solidFill>
+                                    <a:srgbClr val="111111"/>
+                                  </a:solidFill>
+                                  <a:latin typeface="Cambria Math"/>
+                                  <a:cs typeface="Cambria Math"/>
+                                </a:rPr>
+                                <m:t>1</m:t>
+                              </m:r>
+                              <m:r>
+                                <m:rPr>
+                                  <m:sty m:val="p"/>
+                                </m:rPr>
+                                <a:rPr lang="en-US" i="1" sz="1500">
+                                  <a:solidFill>
+                                    <a:srgbClr val="111111"/>
+                                  </a:solidFill>
+                                  <a:latin typeface="Cambria Math"/>
+                                  <a:cs typeface="Cambria Math"/>
+                                </a:rPr>
+                                <m:t>:</m:t>
+                              </m:r>
+                              <m:r>
+                                <a:rPr lang="en-US" i="1" sz="1500">
+                                  <a:solidFill>
+                                    <a:srgbClr val="111111"/>
+                                  </a:solidFill>
+                                  <a:latin typeface="Cambria Math"/>
+                                  <a:cs typeface="Cambria Math"/>
+                                </a:rPr>
+                                <m:t>n</m:t>
+                              </m:r>
+                            </m:sub>
+                          </m:sSub>
+                        </m:e>
+                      </m:d>
+                    </m:oMath>
+                  </m:oMathPara>
+                </a14:m>
+                <a:endParaRPr lang="en-US" sz="1500"/>
+              </a:p>
+            </p:txBody>
+          </p:sp>
+        </mc:Choice>
+        <mc:Fallback>
+          <p:sp>
+            <p:nvSpPr>
+              <p:cNvPr id="10" name="Equation: estimate" descr="LaTeX: \hat{k} = \arg\max_{k}\, p(k \mid x_{1:n}),\qquad \hat{p} = p(\hat{k} \mid x_{1:n})"/>
+              <p:cNvSpPr txBox="1">
+                <a:spLocks noRot="1" noChangeAspect="1" noMove="1" noResize="1" noEditPoints="1" noAdjustHandles="1" noChangeArrowheads="1" noChangeShapeType="1" noTextEdit="1"/>
+              </p:cNvSpPr>
+              <p:nvPr/>
+            </p:nvSpPr>
+            <p:spPr>
+              <a:xfrm>
+                <a:off x="5715000" y="5590032"/>
+                <a:ext cx="3541776" cy="374904"/>
+              </a:xfrm>
+              <a:prstGeom prst="rect">
+                <a:avLst/>
+              </a:prstGeom>
+              <a:blipFill>
+                <a:blip r:embed="rId5"/>
+                <a:stretch>
+                  <a:fillRect/>
+                </a:stretch>
+              </a:blipFill>
+            </p:spPr>
+            <p:txBody>
+              <a:bodyPr/>
+              <a:lstStyle/>
+              <a:p>
+                <a:r>
+                  <a:rPr lang="en-US">
+                    <a:noFill/>
+                  </a:rPr>
+                  <a:t> </a:t>
+                </a:r>
+              </a:p>
+            </p:txBody>
+          </p:sp>
+        </mc:Fallback>
+      </mc:AlternateContent>
+      <p:sp>
+        <p:nvSpPr>
+          <p:cNvPr id="11" name="Text: footer"/>
+          <p:cNvSpPr txBox="1"/>
+          <p:nvPr/>
+        </p:nvSpPr>
+        <p:spPr>
+          <a:xfrm>
+            <a:off x="548640" y="6272784"/>
+            <a:ext cx="9966960" cy="411480"/>
+          </a:xfrm>
+          <a:prstGeom prst="rect">
+            <a:avLst/>
+          </a:prstGeom>
+          <a:noFill/>
+        </p:spPr>
+        <p:txBody>
+          <a:bodyPr wrap="square" anchor="t" lIns="18288" rIns="18288" tIns="18288" bIns="18288">
+            <a:spAutoFit/>
+          </a:bodyPr>
+          <a:lstStyle/>
+          <a:p>
+            <a:pPr algn="l">
+              <a:spcAft>
+                <a:spcPts val="0"/>
+              </a:spcAft>
+            </a:pPr>
+            <a:r>
+              <a:rPr sz="1100" b="0" i="0">
+                <a:solidFill>
+                  <a:srgbClr val="595959"/>
+                </a:solidFill>
+                <a:latin typeface="Cambria"/>
+              </a:rPr>
+              <a:t>Synthetic columns from Panjabi's published tables (Spine 1991;16:861, 888; 1992;17:299); no patient data.</a:t>
+            </a:r>
+          </a:p>
+          <a:p>
+            <a:pPr algn="l">
+              <a:spcAft>
+                <a:spcPts val="0"/>
+              </a:spcAft>
+            </a:pPr>
+            <a:r>
+              <a:rPr sz="1100" b="1" i="0">
+                <a:solidFill>
+                  <a:srgbClr val="111111"/>
+                </a:solidFill>
+                <a:latin typeface="Cambria"/>
+              </a:rPr>
+              <a:t>Confidential: pre-filing draft, not for distribution</a:t>
+            </a:r>
+          </a:p>
+        </p:txBody>
+      </p:sp>
+      <p:sp>
+        <p:nvSpPr>
+          <p:cNvPr id="12" name="Text: slide number"/>
+          <p:cNvSpPr txBox="1"/>
+          <p:nvPr/>
+        </p:nvSpPr>
+        <p:spPr>
+          <a:xfrm>
+            <a:off x="10725912" y="6272784"/>
+            <a:ext cx="914400" cy="274320"/>
+          </a:xfrm>
+          <a:prstGeom prst="rect">
+            <a:avLst/>
+          </a:prstGeom>
+          <a:noFill/>
+        </p:spPr>
+        <p:txBody>
+          <a:bodyPr wrap="square" anchor="t" lIns="18288" rIns="18288" tIns="18288" bIns="18288">
+            <a:spAutoFit/>
+          </a:bodyPr>
+          <a:lstStyle/>
+          <a:p>
+            <a:pPr algn="r">
+              <a:spcAft>
+                <a:spcPts val="0"/>
+              </a:spcAft>
+            </a:pPr>
+            <a:r>
+              <a:rPr sz="1100" b="0" i="0">
                 <a:solidFill>
                   <a:srgbClr val="595959"/>
                 </a:solidFill>
@@ -6985,7 +8733,7 @@
       </p:sp>
       <p:pic>
         <p:nvPicPr>
-          <p:cNvPr id="3" name="Figure: exact_slide_claims" descr="What a field says for certain about its middle body: at each border, the share of fields whose middle body lies within two levels of it that say which side at probability 0.99, by bodies in view, both planes. 2000 synthetic columns."/>
+          <p:cNvPr id="3" name="Figure: exact_slide_claims" descr="What a field says for certain about its middle body: at each border, the share of fields whose middle body lies within two levels of it that say which side at probability 0.99, by bodies in view, both planes. 2,000 synthetic columns."/>
           <p:cNvPicPr>
             <a:picLocks noChangeAspect="1"/>
           </p:cNvPicPr>
@@ -7011,14 +8759,14 @@
         <mc:Choice xmlns:a14="http://schemas.microsoft.com/office/drawing/2010/main" Requires="a14">
           <p:sp>
             <p:nvSpPr>
-              <p:cNvPr id="4" name="Equation: claim" descr="LaTeX: \Pr(\ell \geq c \mid x_{1:n}) = \sum_{j \geq c} p(\ell = j \mid x_{1:n}) \geq 0.99"/>
+              <p:cNvPr id="4" name="Equation: claim" descr="LaTeX: \Pr(\ell \geq c \mid x_{1:n}) = \sum_{k:\, \ell \geq c} p(k \mid x_{1:n})"/>
               <p:cNvSpPr txBox="1"/>
               <p:nvPr/>
             </p:nvSpPr>
             <p:spPr>
               <a:xfrm>
-                <a:off x="5715000" y="1463040"/>
-                <a:ext cx="4123944" cy="560832"/>
+                <a:off x="5715000" y="1417320"/>
+                <a:ext cx="3328416" cy="554736"/>
               </a:xfrm>
               <a:prstGeom prst="rect">
                 <a:avLst/>
@@ -7188,7 +8936,43 @@
                               <a:latin typeface="Cambria Math"/>
                               <a:cs typeface="Cambria Math"/>
                             </a:rPr>
-                            <m:t>j</m:t>
+                            <m:t>k</m:t>
+                          </m:r>
+                          <m:r>
+                            <m:rPr>
+                              <m:sty m:val="p"/>
+                            </m:rPr>
+                            <a:rPr lang="en-US" i="1" sz="1800">
+                              <a:solidFill>
+                                <a:srgbClr val="111111"/>
+                              </a:solidFill>
+                              <a:latin typeface="Cambria Math"/>
+                              <a:cs typeface="Cambria Math"/>
+                            </a:rPr>
+                            <m:t>:</m:t>
+                          </m:r>
+                          <m:r>
+                            <a:rPr lang="en-US" i="1" sz="1800">
+                              <a:solidFill>
+                                <a:srgbClr val="111111"/>
+                              </a:solidFill>
+                              <a:latin typeface="Cambria Math"/>
+                              <a:cs typeface="Cambria Math"/>
+                            </a:rPr>
+                            <m:t> </m:t>
+                          </m:r>
+                          <m:r>
+                            <m:rPr>
+                              <m:sty m:val="p"/>
+                            </m:rPr>
+                            <a:rPr lang="en-US" i="1" sz="1800">
+                              <a:solidFill>
+                                <a:srgbClr val="111111"/>
+                              </a:solidFill>
+                              <a:latin typeface="Cambria Math"/>
+                              <a:cs typeface="Cambria Math"/>
+                            </a:rPr>
+                            <m:t>ℓ</m:t>
                           </m:r>
                           <m:r>
                             <m:rPr>
@@ -7248,9 +9032,6 @@
                         </m:dPr>
                         <m:e>
                           <m:r>
-                            <m:rPr>
-                              <m:sty m:val="p"/>
-                            </m:rPr>
                             <a:rPr lang="en-US" i="1" sz="1800">
                               <a:solidFill>
                                 <a:srgbClr val="111111"/>
@@ -7258,30 +9039,7 @@
                               <a:latin typeface="Cambria Math"/>
                               <a:cs typeface="Cambria Math"/>
                             </a:rPr>
-                            <m:t>ℓ</m:t>
-                          </m:r>
-                          <m:r>
-                            <m:rPr>
-                              <m:sty m:val="p"/>
-                            </m:rPr>
-                            <a:rPr lang="en-US" i="1" sz="1800">
-                              <a:solidFill>
-                                <a:srgbClr val="111111"/>
-                              </a:solidFill>
-                              <a:latin typeface="Cambria Math"/>
-                              <a:cs typeface="Cambria Math"/>
-                            </a:rPr>
-                            <m:t>=</m:t>
-                          </m:r>
-                          <m:r>
-                            <a:rPr lang="en-US" i="1" sz="1800">
-                              <a:solidFill>
-                                <a:srgbClr val="111111"/>
-                              </a:solidFill>
-                              <a:latin typeface="Cambria Math"/>
-                              <a:cs typeface="Cambria Math"/>
-                            </a:rPr>
-                            <m:t>j</m:t>
+                            <m:t>k</m:t>
                           </m:r>
                           <m:r>
                             <m:rPr>
@@ -7347,29 +9105,6 @@
                           </m:sSub>
                         </m:e>
                       </m:d>
-                      <m:r>
-                        <m:rPr>
-                          <m:sty m:val="p"/>
-                        </m:rPr>
-                        <a:rPr lang="en-US" i="1" sz="1800">
-                          <a:solidFill>
-                            <a:srgbClr val="111111"/>
-                          </a:solidFill>
-                          <a:latin typeface="Cambria Math"/>
-                          <a:cs typeface="Cambria Math"/>
-                        </a:rPr>
-                        <m:t>≥</m:t>
-                      </m:r>
-                      <m:r>
-                        <a:rPr lang="en-US" i="1" sz="1800">
-                          <a:solidFill>
-                            <a:srgbClr val="111111"/>
-                          </a:solidFill>
-                          <a:latin typeface="Cambria Math"/>
-                          <a:cs typeface="Cambria Math"/>
-                        </a:rPr>
-                        <m:t>0.99</m:t>
-                      </m:r>
                     </m:oMath>
                   </m:oMathPara>
                 </a14:m>
@@ -7381,7 +9116,7 @@
         <mc:Fallback>
           <p:sp>
             <p:nvSpPr>
-              <p:cNvPr id="4" name="Equation: claim" descr="LaTeX: \Pr(\ell \geq c \mid x_{1:n}) = \sum_{j \geq c} p(\ell = j \mid x_{1:n}) \geq 0.99"/>
+              <p:cNvPr id="4" name="Equation: claim" descr="LaTeX: \Pr(\ell \geq c \mid x_{1:n}) = \sum_{k:\, \ell \geq c} p(k \mid x_{1:n})"/>
               <p:cNvSpPr txBox="1">
                 <a:spLocks noRot="1" noChangeAspect="1" noMove="1" noResize="1" noEditPoints="1" noAdjustHandles="1" noChangeArrowheads="1" noChangeShapeType="1" noTextEdit="1"/>
               </p:cNvSpPr>
@@ -7389,8 +9124,8 @@
             </p:nvSpPr>
             <p:spPr>
               <a:xfrm>
-                <a:off x="5715000" y="1463040"/>
-                <a:ext cx="4123944" cy="560832"/>
+                <a:off x="5715000" y="1417320"/>
+                <a:ext cx="3328416" cy="554736"/>
               </a:xfrm>
               <a:prstGeom prst="rect">
                 <a:avLst/>
@@ -7417,16 +9152,235 @@
           </p:sp>
         </mc:Fallback>
       </mc:AlternateContent>
-      <p:sp>
-        <p:nvSpPr>
-          <p:cNvPr id="5" name="Text: claim rule"/>
+      <mc:AlternateContent xmlns:mc="http://schemas.openxmlformats.org/markup-compatibility/2006">
+        <mc:Choice xmlns:a14="http://schemas.microsoft.com/office/drawing/2010/main" Requires="a14">
+          <p:sp>
+            <p:nvSpPr>
+              <p:cNvPr id="5" name="Equation: middle" descr="LaTeX: \ell = k + \lfloor (n-1)/2 \rfloor"/>
+              <p:cNvSpPr txBox="1"/>
+              <p:nvPr/>
+            </p:nvSpPr>
+            <p:spPr>
+              <a:xfrm>
+                <a:off x="9454896" y="1557528"/>
+                <a:ext cx="1728216" cy="301752"/>
+              </a:xfrm>
+              <a:prstGeom prst="rect">
+                <a:avLst/>
+              </a:prstGeom>
+              <a:noFill/>
+            </p:spPr>
+            <p:txBody>
+              <a:bodyPr wrap="none" lIns="0" tIns="0" rIns="0" bIns="0" anchor="ctr">
+                <a:noAutofit/>
+              </a:bodyPr>
+              <a:lstStyle/>
+              <a:p>
+                <a:pPr algn="l"/>
+                <a14:m>
+                  <m:oMathPara xmlns:m="http://schemas.openxmlformats.org/officeDocument/2006/math">
+                    <m:oMathParaPr>
+                      <m:jc m:val="left"/>
+                    </m:oMathParaPr>
+                    <m:oMath>
+                      <m:r>
+                        <m:rPr>
+                          <m:sty m:val="p"/>
+                        </m:rPr>
+                        <a:rPr lang="en-US" i="1" sz="1600">
+                          <a:solidFill>
+                            <a:srgbClr val="111111"/>
+                          </a:solidFill>
+                          <a:latin typeface="Cambria Math"/>
+                          <a:cs typeface="Cambria Math"/>
+                        </a:rPr>
+                        <m:t>ℓ</m:t>
+                      </m:r>
+                      <m:r>
+                        <m:rPr>
+                          <m:sty m:val="p"/>
+                        </m:rPr>
+                        <a:rPr lang="en-US" i="1" sz="1600">
+                          <a:solidFill>
+                            <a:srgbClr val="111111"/>
+                          </a:solidFill>
+                          <a:latin typeface="Cambria Math"/>
+                          <a:cs typeface="Cambria Math"/>
+                        </a:rPr>
+                        <m:t>=</m:t>
+                      </m:r>
+                      <m:r>
+                        <a:rPr lang="en-US" i="1" sz="1600">
+                          <a:solidFill>
+                            <a:srgbClr val="111111"/>
+                          </a:solidFill>
+                          <a:latin typeface="Cambria Math"/>
+                          <a:cs typeface="Cambria Math"/>
+                        </a:rPr>
+                        <m:t>k</m:t>
+                      </m:r>
+                      <m:r>
+                        <m:rPr>
+                          <m:sty m:val="p"/>
+                        </m:rPr>
+                        <a:rPr lang="en-US" i="1" sz="1600">
+                          <a:solidFill>
+                            <a:srgbClr val="111111"/>
+                          </a:solidFill>
+                          <a:latin typeface="Cambria Math"/>
+                          <a:cs typeface="Cambria Math"/>
+                        </a:rPr>
+                        <m:t>+</m:t>
+                      </m:r>
+                      <m:r>
+                        <m:rPr>
+                          <m:sty m:val="p"/>
+                        </m:rPr>
+                        <a:rPr lang="en-US" i="1" sz="1600">
+                          <a:solidFill>
+                            <a:srgbClr val="111111"/>
+                          </a:solidFill>
+                          <a:latin typeface="Cambria Math"/>
+                          <a:cs typeface="Cambria Math"/>
+                        </a:rPr>
+                        <m:t>⌊</m:t>
+                      </m:r>
+                      <m:d>
+                        <m:dPr>
+                          <m:begChr m:val="("/>
+                          <m:endChr m:val=")"/>
+                          <m:sepChr m:val=""/>
+                          <m:grow/>
+                        </m:dPr>
+                        <m:e>
+                          <m:r>
+                            <a:rPr lang="en-US" i="1" sz="1600">
+                              <a:solidFill>
+                                <a:srgbClr val="111111"/>
+                              </a:solidFill>
+                              <a:latin typeface="Cambria Math"/>
+                              <a:cs typeface="Cambria Math"/>
+                            </a:rPr>
+                            <m:t>n</m:t>
+                          </m:r>
+                          <m:r>
+                            <m:rPr>
+                              <m:sty m:val="p"/>
+                            </m:rPr>
+                            <a:rPr lang="en-US" i="1" sz="1600">
+                              <a:solidFill>
+                                <a:srgbClr val="111111"/>
+                              </a:solidFill>
+                              <a:latin typeface="Cambria Math"/>
+                              <a:cs typeface="Cambria Math"/>
+                            </a:rPr>
+                            <m:t>−</m:t>
+                          </m:r>
+                          <m:r>
+                            <a:rPr lang="en-US" i="1" sz="1600">
+                              <a:solidFill>
+                                <a:srgbClr val="111111"/>
+                              </a:solidFill>
+                              <a:latin typeface="Cambria Math"/>
+                              <a:cs typeface="Cambria Math"/>
+                            </a:rPr>
+                            <m:t>1</m:t>
+                          </m:r>
+                        </m:e>
+                      </m:d>
+                      <m:r>
+                        <m:rPr>
+                          <m:sty m:val="p"/>
+                        </m:rPr>
+                        <a:rPr lang="en-US" i="1" sz="1600">
+                          <a:solidFill>
+                            <a:srgbClr val="111111"/>
+                          </a:solidFill>
+                          <a:latin typeface="Cambria Math"/>
+                          <a:cs typeface="Cambria Math"/>
+                        </a:rPr>
+                        <m:t>/</m:t>
+                      </m:r>
+                      <m:r>
+                        <a:rPr lang="en-US" i="1" sz="1600">
+                          <a:solidFill>
+                            <a:srgbClr val="111111"/>
+                          </a:solidFill>
+                          <a:latin typeface="Cambria Math"/>
+                          <a:cs typeface="Cambria Math"/>
+                        </a:rPr>
+                        <m:t>2</m:t>
+                      </m:r>
+                      <m:r>
+                        <m:rPr>
+                          <m:sty m:val="p"/>
+                        </m:rPr>
+                        <a:rPr lang="en-US" i="1" sz="1600">
+                          <a:solidFill>
+                            <a:srgbClr val="111111"/>
+                          </a:solidFill>
+                          <a:latin typeface="Cambria Math"/>
+                          <a:cs typeface="Cambria Math"/>
+                        </a:rPr>
+                        <m:t>⌋</m:t>
+                      </m:r>
+                    </m:oMath>
+                  </m:oMathPara>
+                </a14:m>
+                <a:endParaRPr lang="en-US" sz="1600"/>
+              </a:p>
+            </p:txBody>
+          </p:sp>
+        </mc:Choice>
+        <mc:Fallback>
+          <p:sp>
+            <p:nvSpPr>
+              <p:cNvPr id="5" name="Equation: middle" descr="LaTeX: \ell = k + \lfloor (n-1)/2 \rfloor"/>
+              <p:cNvSpPr txBox="1">
+                <a:spLocks noRot="1" noChangeAspect="1" noMove="1" noResize="1" noEditPoints="1" noAdjustHandles="1" noChangeArrowheads="1" noChangeShapeType="1" noTextEdit="1"/>
+              </p:cNvSpPr>
+              <p:nvPr/>
+            </p:nvSpPr>
+            <p:spPr>
+              <a:xfrm>
+                <a:off x="9454896" y="1557528"/>
+                <a:ext cx="1728216" cy="301752"/>
+              </a:xfrm>
+              <a:prstGeom prst="rect">
+                <a:avLst/>
+              </a:prstGeom>
+              <a:blipFill>
+                <a:blip r:embed="rId4"/>
+                <a:stretch>
+                  <a:fillRect/>
+                </a:stretch>
+              </a:blipFill>
+            </p:spPr>
+            <p:txBody>
+              <a:bodyPr/>
+              <a:lstStyle/>
+              <a:p>
+                <a:r>
+                  <a:rPr lang="en-US">
+                    <a:noFill/>
+                  </a:rPr>
+                  <a:t> </a:t>
+                </a:r>
+              </a:p>
+            </p:txBody>
+          </p:sp>
+        </mc:Fallback>
+      </mc:AlternateContent>
+      <p:sp>
+        <p:nvSpPr>
+          <p:cNvPr id="6" name="Text: claim rule"/>
           <p:cNvSpPr txBox="1"/>
           <p:nvPr/>
         </p:nvSpPr>
         <p:spPr>
           <a:xfrm>
-            <a:off x="5715000" y="2057400"/>
-            <a:ext cx="5925312" cy="731520"/>
+            <a:off x="5715000" y="2063496"/>
+            <a:ext cx="5925312" cy="1143000"/>
           </a:xfrm>
           <a:prstGeom prst="rect">
             <a:avLst/>
@@ -7445,27 +9399,72 @@
               </a:spcAft>
             </a:pPr>
             <a:r>
+              <a:rPr sz="1400" b="0" i="1">
+                <a:solidFill>
+                  <a:srgbClr val="111111"/>
+                </a:solidFill>
+                <a:latin typeface="Cambria"/>
+              </a:rPr>
+              <a:t>ℓ</a:t>
+            </a:r>
+            <a:r>
               <a:rPr sz="1400" b="0" i="0">
                 <a:solidFill>
                   <a:srgbClr val="111111"/>
                 </a:solidFill>
                 <a:latin typeface="Cambria"/>
               </a:rPr>
-              <a:t>A border claim sums the same posterior, so a claim made at 0.99 is right at least 99% of the times it is made.</a:t>
+              <a:t> is the middle body. Claim </a:t>
+            </a:r>
+            <a:r>
+              <a:rPr sz="1400" b="0" i="1">
+                <a:solidFill>
+                  <a:srgbClr val="111111"/>
+                </a:solidFill>
+                <a:latin typeface="Cambria"/>
+              </a:rPr>
+              <a:t>ℓ ≥ c</a:t>
+            </a:r>
+            <a:r>
+              <a:rPr sz="1400" b="0" i="0">
+                <a:solidFill>
+                  <a:srgbClr val="111111"/>
+                </a:solidFill>
+                <a:latin typeface="Cambria"/>
+              </a:rPr>
+              <a:t> when this reaches 0.99 and </a:t>
+            </a:r>
+            <a:r>
+              <a:rPr sz="1400" b="0" i="1">
+                <a:solidFill>
+                  <a:srgbClr val="111111"/>
+                </a:solidFill>
+                <a:latin typeface="Cambria"/>
+              </a:rPr>
+              <a:t>ℓ &lt; c</a:t>
+            </a:r>
+            <a:r>
+              <a:rPr sz="1400" b="0" i="0">
+                <a:solidFill>
+                  <a:srgbClr val="111111"/>
+                </a:solidFill>
+                <a:latin typeface="Cambria"/>
+              </a:rPr>
+              <a:t> when it falls to 0.01: right at least 99% of the times made, over all fields (T12/L1 from one body: 99.96%, 13 wrong of 30,943). Below, bodies within two levels of a border, a group chosen by the true level, where it need not hold.</a:t>
             </a:r>
           </a:p>
         </p:txBody>
       </p:sp>
       <p:sp>
         <p:nvSpPr>
-          <p:cNvPr id="6" name="Text: stat C7/T1"/>
+          <p:cNvPr id="7" name="Text: stat C7/T1"/>
           <p:cNvSpPr txBox="1"/>
           <p:nvPr/>
         </p:nvSpPr>
         <p:spPr>
           <a:xfrm>
-            <a:off x="5715000" y="2926080"/>
-            <a:ext cx="2834640" cy="1371600"/>
+            <a:off x="5715000" y="3252216"/>
+            <a:ext cx="2834640" cy="1325880"/>
           </a:xfrm>
           <a:prstGeom prst="rect">
             <a:avLst/>
@@ -7512,21 +9511,21 @@
                 </a:solidFill>
                 <a:latin typeface="Cambria"/>
               </a:rPr>
-              <a:t>of single bodies within two levels of C7/T1 say which side; right 99.84% (7 wrong of 4,514)</a:t>
+              <a:t>of single bodies within two levels of C7/T1 say which side; right 99.8% (7 wrong of 4,514)</a:t>
             </a:r>
           </a:p>
         </p:txBody>
       </p:sp>
       <p:sp>
         <p:nvSpPr>
-          <p:cNvPr id="7" name="Text: stat T12/L1"/>
+          <p:cNvPr id="8" name="Text: stat T12/L1"/>
           <p:cNvSpPr txBox="1"/>
           <p:nvPr/>
         </p:nvSpPr>
         <p:spPr>
           <a:xfrm>
-            <a:off x="8805672" y="2926080"/>
-            <a:ext cx="2834640" cy="1371600"/>
+            <a:off x="8805672" y="3252216"/>
+            <a:ext cx="2834640" cy="1325880"/>
           </a:xfrm>
           <a:prstGeom prst="rect">
             <a:avLst/>
@@ -7550,7 +9549,7 @@
             <a:r>
               <a:rPr sz="3600" b="1" i="0">
                 <a:solidFill>
-                  <a:srgbClr val="A4262C"/>
+                  <a:srgbClr val="1B4F8C"/>
                 </a:solidFill>
                 <a:latin typeface="Cambria"/>
               </a:rPr>
@@ -7573,21 +9572,30 @@
                 </a:solidFill>
                 <a:latin typeface="Cambria"/>
               </a:rPr>
-              <a:t>at T12/L1, right 97.9% (12 wrong of 568): not near-certain</a:t>
+              <a:t>of single bodies within two levels of T12/L1 say which side; right </a:t>
+            </a:r>
+            <a:r>
+              <a:rPr sz="1400" b="1" i="0">
+                <a:solidFill>
+                  <a:srgbClr val="A4262C"/>
+                </a:solidFill>
+                <a:latin typeface="Cambria"/>
+              </a:rPr>
+              <a:t>97.9% (12 wrong of 568), short of 99%</a:t>
             </a:r>
           </a:p>
         </p:txBody>
       </p:sp>
       <p:sp>
         <p:nvSpPr>
-          <p:cNvPr id="8" name="Text: stat region"/>
+          <p:cNvPr id="9" name="Text: stat region"/>
           <p:cNvSpPr txBox="1"/>
           <p:nvPr/>
         </p:nvSpPr>
         <p:spPr>
           <a:xfrm>
-            <a:off x="5715000" y="4434840"/>
-            <a:ext cx="2834640" cy="1371600"/>
+            <a:off x="5715000" y="4669536"/>
+            <a:ext cx="2834640" cy="1325880"/>
           </a:xfrm>
           <a:prstGeom prst="rect">
             <a:avLst/>
@@ -7634,21 +9642,21 @@
                 </a:solidFill>
                 <a:latin typeface="Cambria"/>
               </a:rPr>
-              <a:t>of single bodies say their region; right 99.92% (21 wrong of 26,786), only 2 of them far from both junctions</a:t>
+              <a:t>of single bodies say their region; right 99.9% (21 wrong of 26,786), only 2 of them far from both junctions</a:t>
             </a:r>
           </a:p>
         </p:txBody>
       </p:sp>
       <p:sp>
         <p:nvSpPr>
-          <p:cNvPr id="9" name="Text: stat nine bodies"/>
+          <p:cNvPr id="10" name="Text: stat nine bodies"/>
           <p:cNvSpPr txBox="1"/>
           <p:nvPr/>
         </p:nvSpPr>
         <p:spPr>
           <a:xfrm>
-            <a:off x="8805672" y="4434840"/>
-            <a:ext cx="2834640" cy="1371600"/>
+            <a:off x="8805672" y="4669536"/>
+            <a:ext cx="2834640" cy="1325880"/>
           </a:xfrm>
           <a:prstGeom prst="rect">
             <a:avLst/>
@@ -7695,21 +9703,21 @@
                 </a:solidFill>
                 <a:latin typeface="Cambria"/>
               </a:rPr>
-              <a:t>near T12/L1 say which side from nine bodies (1 wrong of 5,279)</a:t>
+              <a:t>of fields with middle body T11 to L1 say which side of T12/L1 from nine bodies (1 wrong of 5,279)</a:t>
             </a:r>
           </a:p>
         </p:txBody>
       </p:sp>
       <p:sp>
         <p:nvSpPr>
-          <p:cNvPr id="10" name="Text: citation"/>
+          <p:cNvPr id="11" name="Text: footer"/>
           <p:cNvSpPr txBox="1"/>
           <p:nvPr/>
         </p:nvSpPr>
         <p:spPr>
           <a:xfrm>
-            <a:off x="548640" y="6327648"/>
-            <a:ext cx="9692640" cy="365760"/>
+            <a:off x="548640" y="6272784"/>
+            <a:ext cx="9966960" cy="411480"/>
           </a:xfrm>
           <a:prstGeom prst="rect">
             <a:avLst/>
@@ -7728,27 +9736,43 @@
               </a:spcAft>
             </a:pPr>
             <a:r>
-              <a:rPr sz="900" b="0" i="0">
+              <a:rPr sz="1100" b="0" i="0">
                 <a:solidFill>
                   <a:srgbClr val="595959"/>
                 </a:solidFill>
                 <a:latin typeface="Cambria"/>
               </a:rPr>
-              <a:t>Synthetic columns drawn from Panjabi's published means and spreads (Spine 1991;16:861, 888; 1992;17:299); no patient data. Retrospective modelling, 2026.</a:t>
+              <a:t>Synthetic columns from Panjabi's published tables (Spine 1991;16:861, 888; 1992;17:299); no patient data.</a:t>
+            </a:r>
+          </a:p>
+          <a:p>
+            <a:pPr algn="l">
+              <a:spcAft>
+                <a:spcPts val="0"/>
+              </a:spcAft>
+            </a:pPr>
+            <a:r>
+              <a:rPr sz="1100" b="1" i="0">
+                <a:solidFill>
+                  <a:srgbClr val="111111"/>
+                </a:solidFill>
+                <a:latin typeface="Cambria"/>
+              </a:rPr>
+              <a:t>Confidential: pre-filing draft, not for distribution</a:t>
             </a:r>
           </a:p>
         </p:txBody>
       </p:sp>
       <p:sp>
         <p:nvSpPr>
-          <p:cNvPr id="11" name="Text: slide number"/>
+          <p:cNvPr id="12" name="Text: slide number"/>
           <p:cNvSpPr txBox="1"/>
           <p:nvPr/>
         </p:nvSpPr>
         <p:spPr>
           <a:xfrm>
-            <a:off x="10725912" y="6327648"/>
-            <a:ext cx="914400" cy="365760"/>
+            <a:off x="10725912" y="6272784"/>
+            <a:ext cx="914400" cy="274320"/>
           </a:xfrm>
           <a:prstGeom prst="rect">
             <a:avLst/>
@@ -7767,7 +9791,7 @@
               </a:spcAft>
             </a:pPr>
             <a:r>
-              <a:rPr sz="900" b="0" i="0">
+              <a:rPr sz="1100" b="0" i="0">
                 <a:solidFill>
                   <a:srgbClr val="595959"/>
                 </a:solidFill>
@@ -7831,7 +9855,7 @@
       </p:sp>
       <p:pic>
         <p:nvPicPr>
-          <p:cNvPr id="3" name="Figure: exact_slide_robust" descr="When the table or error model is wrong, three bodies, both planes: the name's precision at posterior 0.99 (A) and the share named (B), for the printed table and for spreads widened by the root of 13/12 with 2 mm error. Bars, two standard errors; dotted, 99 per cent."/>
+          <p:cNvPr id="3" name="Figure: exact_slide_robust" descr="Three bodies, when the table or error model is wrong: precision at posterior 0.99 (A) and share named (B), printed table and spreads widened by the root of 1 + 1/12 with 2 mm error (chosen on a pilot); combined, measures correlated 0.4. Separate columns: 500 per error world, 40 x 100 per table world. Bars, two SE."/>
           <p:cNvPicPr>
             <a:picLocks noChangeAspect="1"/>
           </p:cNvPicPr>
@@ -7862,7 +9886,7 @@
         <p:spPr>
           <a:xfrm>
             <a:off x="7498079" y="1371600"/>
-            <a:ext cx="4142232" cy="1143000"/>
+            <a:ext cx="4142232" cy="1188720"/>
           </a:xfrm>
           <a:prstGeom prst="rect">
             <a:avLst/>
@@ -7909,7 +9933,7 @@
                 </a:solidFill>
                 <a:latin typeface="Cambria"/>
               </a:rPr>
-              <a:t>of names at 0.99 right when the rule's table is estimated from 12 spines, as Panjabi's tables are</a:t>
+              <a:t>of three-body names at posterior 0.99 right when the rule's table is estimated from 12 spines, as Panjabi's tables are</a:t>
             </a:r>
           </a:p>
         </p:txBody>
@@ -7922,8 +9946,8 @@
         </p:nvSpPr>
         <p:spPr>
           <a:xfrm>
-            <a:off x="7498079" y="2697480"/>
-            <a:ext cx="4142232" cy="1280160"/>
+            <a:off x="7498079" y="2651760"/>
+            <a:ext cx="4142232" cy="1463040"/>
           </a:xfrm>
           <a:prstGeom prst="rect">
             <a:avLst/>
@@ -7947,7 +9971,7 @@
             <a:r>
               <a:rPr sz="3600" b="1" i="0">
                 <a:solidFill>
-                  <a:srgbClr val="1B4F8C"/>
+                  <a:srgbClr val="111111"/>
                 </a:solidFill>
                 <a:latin typeface="Cambria"/>
               </a:rPr>
@@ -7970,7 +9994,7 @@
                 </a:solidFill>
                 <a:latin typeface="Cambria"/>
               </a:rPr>
-              <a:t>with spreads widened and 2 mm of error, but 5.5% of fields named, not 19.5%, and lumbar names right 96.7%</a:t>
+              <a:t>with spreads widened and 2 mm of error (the 2 mm chosen on a separate pilot), but 5.5% of fields named, not 19.5%, and lumbar names right 96.7% (8 wrong of 246)</a:t>
             </a:r>
           </a:p>
         </p:txBody>
@@ -7979,14 +10003,14 @@
         <mc:Choice xmlns:a14="http://schemas.microsoft.com/office/drawing/2010/main" Requires="a14">
           <p:sp>
             <p:nvSpPr>
-              <p:cNvPr id="6" name="Equation: honest" descr="LaTeX: \tilde{\sigma}_{m,\ell} = \sigma_{m,\ell}\sqrt{1 + 1/12},\qquad \sigma_{\mathrm{error}} = 2\ \mathrm{mm}"/>
+              <p:cNvPr id="6" name="Equation: honest" descr="LaTeX: \tilde{\sigma}_{m,\ell} = \sigma_{m,\ell}\sqrt{1 + 1/12},\qquad \sigma_{\mathrm{err}} = 2\ \mathrm{mm}"/>
               <p:cNvSpPr txBox="1"/>
               <p:nvPr/>
             </p:nvSpPr>
             <p:spPr>
               <a:xfrm>
-                <a:off x="7498079" y="4160520"/>
-                <a:ext cx="3688080" cy="344424"/>
+                <a:off x="7498079" y="4251960"/>
+                <a:ext cx="3560064" cy="344424"/>
               </a:xfrm>
               <a:prstGeom prst="rect">
                 <a:avLst/>
@@ -8270,32 +10294,6 @@
                             </a:rPr>
                             <m:t>r</m:t>
                           </m:r>
-                          <m:r>
-                            <m:rPr>
-                              <m:sty m:val="p"/>
-                            </m:rPr>
-                            <a:rPr lang="en-US" i="1" sz="1600">
-                              <a:solidFill>
-                                <a:srgbClr val="111111"/>
-                              </a:solidFill>
-                              <a:latin typeface="Cambria Math"/>
-                              <a:cs typeface="Cambria Math"/>
-                            </a:rPr>
-                            <m:t>o</m:t>
-                          </m:r>
-                          <m:r>
-                            <m:rPr>
-                              <m:sty m:val="p"/>
-                            </m:rPr>
-                            <a:rPr lang="en-US" i="1" sz="1600">
-                              <a:solidFill>
-                                <a:srgbClr val="111111"/>
-                              </a:solidFill>
-                              <a:latin typeface="Cambria Math"/>
-                              <a:cs typeface="Cambria Math"/>
-                            </a:rPr>
-                            <m:t>r</m:t>
-                          </m:r>
                         </m:sub>
                       </m:sSub>
                       <m:r>
@@ -8368,7 +10366,7 @@
         <mc:Fallback>
           <p:sp>
             <p:nvSpPr>
-              <p:cNvPr id="6" name="Equation: honest" descr="LaTeX: \tilde{\sigma}_{m,\ell} = \sigma_{m,\ell}\sqrt{1 + 1/12},\qquad \sigma_{\mathrm{error}} = 2\ \mathrm{mm}"/>
+              <p:cNvPr id="6" name="Equation: honest" descr="LaTeX: \tilde{\sigma}_{m,\ell} = \sigma_{m,\ell}\sqrt{1 + 1/12},\qquad \sigma_{\mathrm{err}} = 2\ \mathrm{mm}"/>
               <p:cNvSpPr txBox="1">
                 <a:spLocks noRot="1" noChangeAspect="1" noMove="1" noResize="1" noEditPoints="1" noAdjustHandles="1" noChangeArrowheads="1" noChangeShapeType="1" noTextEdit="1"/>
               </p:cNvSpPr>
@@ -8376,8 +10374,8 @@
             </p:nvSpPr>
             <p:spPr>
               <a:xfrm>
-                <a:off x="7498079" y="4160520"/>
-                <a:ext cx="3688080" cy="344424"/>
+                <a:off x="7498079" y="4251960"/>
+                <a:ext cx="3560064" cy="344424"/>
               </a:xfrm>
               <a:prstGeom prst="rect">
                 <a:avLst/>
@@ -8412,8 +10410,8 @@
         </p:nvSpPr>
         <p:spPr>
           <a:xfrm>
-            <a:off x="548640" y="5138928"/>
-            <a:ext cx="11091672" cy="1097280"/>
+            <a:off x="548640" y="5257800"/>
+            <a:ext cx="11091672" cy="822960"/>
           </a:xfrm>
           <a:prstGeom prst="rect">
             <a:avLst/>
@@ -8447,21 +10445,21 @@
                 </a:solidFill>
                 <a:latin typeface="Cambria"/>
               </a:rPr>
-              <a:t>measure the table on full-spine CTs counted from C2; carry a real series' prior over places; add the anomalous columns (four or six lumbar bodies, a thirteenth rib-bearing body) as places of their own.</a:t>
+              <a:t>measure the table on full-spine CTs counted from C2, and carry a real series' prior over places.</a:t>
             </a:r>
           </a:p>
         </p:txBody>
       </p:sp>
       <p:sp>
         <p:nvSpPr>
-          <p:cNvPr id="8" name="Text: citation"/>
+          <p:cNvPr id="8" name="Text: footer"/>
           <p:cNvSpPr txBox="1"/>
           <p:nvPr/>
         </p:nvSpPr>
         <p:spPr>
           <a:xfrm>
-            <a:off x="548640" y="6327648"/>
-            <a:ext cx="9692640" cy="365760"/>
+            <a:off x="548640" y="6272784"/>
+            <a:ext cx="9966960" cy="411480"/>
           </a:xfrm>
           <a:prstGeom prst="rect">
             <a:avLst/>
@@ -8480,13 +10478,29 @@
               </a:spcAft>
             </a:pPr>
             <a:r>
-              <a:rPr sz="900" b="0" i="0">
+              <a:rPr sz="1100" b="0" i="0">
                 <a:solidFill>
                   <a:srgbClr val="595959"/>
                 </a:solidFill>
                 <a:latin typeface="Cambria"/>
               </a:rPr>
-              <a:t>Synthetic columns drawn from Panjabi's published means and spreads (Spine 1991;16:861, 888; 1992;17:299); no patient data. Retrospective modelling, 2026.</a:t>
+              <a:t>Synthetic columns from Panjabi's published tables (Spine 1991;16:861, 888; 1992;17:299); no patient data.</a:t>
+            </a:r>
+          </a:p>
+          <a:p>
+            <a:pPr algn="l">
+              <a:spcAft>
+                <a:spcPts val="0"/>
+              </a:spcAft>
+            </a:pPr>
+            <a:r>
+              <a:rPr sz="1100" b="1" i="0">
+                <a:solidFill>
+                  <a:srgbClr val="111111"/>
+                </a:solidFill>
+                <a:latin typeface="Cambria"/>
+              </a:rPr>
+              <a:t>Confidential: pre-filing draft, not for distribution</a:t>
             </a:r>
           </a:p>
         </p:txBody>
@@ -8499,8 +10513,8 @@
         </p:nvSpPr>
         <p:spPr>
           <a:xfrm>
-            <a:off x="10725912" y="6327648"/>
-            <a:ext cx="914400" cy="365760"/>
+            <a:off x="10725912" y="6272784"/>
+            <a:ext cx="914400" cy="274320"/>
           </a:xfrm>
           <a:prstGeom prst="rect">
             <a:avLst/>
@@ -8519,7 +10533,7 @@
               </a:spcAft>
             </a:pPr>
             <a:r>
-              <a:rPr sz="900" b="0" i="0">
+              <a:rPr sz="1100" b="0" i="0">
                 <a:solidFill>
                   <a:srgbClr val="595959"/>
                 </a:solidFill>

--- a/slides/exact/exact_slides_neurips.pptx
+++ b/slides/exact/exact_slides_neurips.pptx
@@ -4036,7 +4036,7 @@
                             <m:rPr>
                               <m:sty m:val="p"/>
                             </m:rPr>
-                            <a:rPr lang="en-US" i="1" sz="1767">
+                            <a:rPr lang="en-US" i="0" sz="1767">
                               <a:solidFill>
                                 <a:srgbClr val="111111"/>
                               </a:solidFill>
@@ -4061,7 +4061,7 @@
                         <m:rPr>
                           <m:sty m:val="p"/>
                         </m:rPr>
-                        <a:rPr lang="en-US" i="1" sz="1767">
+                        <a:rPr lang="en-US" i="0" sz="1767">
                           <a:solidFill>
                             <a:srgbClr val="111111"/>
                           </a:solidFill>
@@ -4108,7 +4108,7 @@
                             <m:rPr>
                               <m:sty m:val="p"/>
                             </m:rPr>
-                            <a:rPr lang="en-US" i="1" sz="1767">
+                            <a:rPr lang="en-US" i="0" sz="1767">
                               <a:solidFill>
                                 <a:srgbClr val="111111"/>
                               </a:solidFill>
@@ -4121,7 +4121,7 @@
                             <m:rPr>
                               <m:sty m:val="p"/>
                             </m:rPr>
-                            <a:rPr lang="en-US" i="1" sz="1767">
+                            <a:rPr lang="en-US" i="0" sz="1767">
                               <a:solidFill>
                                 <a:srgbClr val="111111"/>
                               </a:solidFill>
@@ -4134,7 +4134,7 @@
                             <m:rPr>
                               <m:sty m:val="p"/>
                             </m:rPr>
-                            <a:rPr lang="en-US" i="1" sz="1767">
+                            <a:rPr lang="en-US" i="0" sz="1767">
                               <a:solidFill>
                                 <a:srgbClr val="111111"/>
                               </a:solidFill>
@@ -4175,7 +4175,7 @@
                         <m:rPr>
                           <m:sty m:val="p"/>
                         </m:rPr>
-                        <a:rPr lang="en-US" i="1" sz="1767">
+                        <a:rPr lang="en-US" i="0" sz="1767">
                           <a:solidFill>
                             <a:srgbClr val="111111"/>
                           </a:solidFill>
@@ -4224,7 +4224,7 @@
                         <m:rPr>
                           <m:sty m:val="p"/>
                         </m:rPr>
-                        <a:rPr lang="en-US" i="1" sz="1767">
+                        <a:rPr lang="en-US" i="0" sz="1767">
                           <a:solidFill>
                             <a:srgbClr val="111111"/>
                           </a:solidFill>
@@ -4240,7 +4240,7 @@
                               <m:sty m:val="p"/>
                               <m:scr m:val="double-struck"/>
                             </m:rPr>
-                            <a:rPr lang="en-US" i="1" sz="1767">
+                            <a:rPr lang="en-US" i="0" sz="1767">
                               <a:solidFill>
                                 <a:srgbClr val="111111"/>
                               </a:solidFill>
@@ -4267,7 +4267,7 @@
                         <m:rPr>
                           <m:sty m:val="p"/>
                         </m:rPr>
-                        <a:rPr lang="en-US" i="1" sz="1767">
+                        <a:rPr lang="en-US" i="0" sz="1767">
                           <a:solidFill>
                             <a:srgbClr val="111111"/>
                           </a:solidFill>
@@ -4300,7 +4300,7 @@
                         <m:rPr>
                           <m:sty m:val="p"/>
                         </m:rPr>
-                        <a:rPr lang="en-US" i="1" sz="1767">
+                        <a:rPr lang="en-US" i="0" sz="1767">
                           <a:solidFill>
                             <a:srgbClr val="111111"/>
                           </a:solidFill>
@@ -4313,7 +4313,7 @@
                         <m:rPr>
                           <m:sty m:val="p"/>
                         </m:rPr>
-                        <a:rPr lang="en-US" i="1" sz="1767">
+                        <a:rPr lang="en-US" i="0" sz="1767">
                           <a:solidFill>
                             <a:srgbClr val="111111"/>
                           </a:solidFill>
@@ -4336,7 +4336,7 @@
                         <m:rPr>
                           <m:sty m:val="p"/>
                         </m:rPr>
-                        <a:rPr lang="en-US" i="1" sz="1767">
+                        <a:rPr lang="en-US" i="0" sz="1767">
                           <a:solidFill>
                             <a:srgbClr val="111111"/>
                           </a:solidFill>
@@ -4349,7 +4349,7 @@
                         <m:rPr>
                           <m:sty m:val="p"/>
                         </m:rPr>
-                        <a:rPr lang="en-US" i="1" sz="1767">
+                        <a:rPr lang="en-US" i="0" sz="1767">
                           <a:solidFill>
                             <a:srgbClr val="111111"/>
                           </a:solidFill>
@@ -4362,7 +4362,7 @@
                         <m:rPr>
                           <m:sty m:val="p"/>
                         </m:rPr>
-                        <a:rPr lang="en-US" i="1" sz="1767">
+                        <a:rPr lang="en-US" i="0" sz="1767">
                           <a:solidFill>
                             <a:srgbClr val="111111"/>
                           </a:solidFill>
@@ -4385,7 +4385,7 @@
                         <m:rPr>
                           <m:sty m:val="p"/>
                         </m:rPr>
-                        <a:rPr lang="en-US" i="1" sz="1767">
+                        <a:rPr lang="en-US" i="0" sz="1767">
                           <a:solidFill>
                             <a:srgbClr val="111111"/>
                           </a:solidFill>
@@ -4408,7 +4408,7 @@
                         <m:rPr>
                           <m:sty m:val="p"/>
                         </m:rPr>
-                        <a:rPr lang="en-US" i="1" sz="1767">
+                        <a:rPr lang="en-US" i="0" sz="1767">
                           <a:solidFill>
                             <a:srgbClr val="111111"/>
                           </a:solidFill>
@@ -4822,7 +4822,7 @@
                             <m:rPr>
                               <m:sty m:val="p"/>
                             </m:rPr>
-                            <a:rPr lang="en-US" i="1" sz="2400">
+                            <a:rPr lang="en-US" i="0" sz="2400">
                               <a:solidFill>
                                 <a:srgbClr val="111111"/>
                               </a:solidFill>
@@ -4859,7 +4859,7 @@
                                 <m:rPr>
                                   <m:sty m:val="p"/>
                                 </m:rPr>
-                                <a:rPr lang="en-US" i="1" sz="2400">
+                                <a:rPr lang="en-US" i="0" sz="2400">
                                   <a:solidFill>
                                     <a:srgbClr val="111111"/>
                                   </a:solidFill>
@@ -4886,7 +4886,7 @@
                         <m:rPr>
                           <m:sty m:val="p"/>
                         </m:rPr>
-                        <a:rPr lang="en-US" i="1" sz="2400">
+                        <a:rPr lang="en-US" i="0" sz="2400">
                           <a:solidFill>
                             <a:srgbClr val="111111"/>
                           </a:solidFill>
@@ -4946,7 +4946,7 @@
                                     <m:rPr>
                                       <m:sty m:val="p"/>
                                     </m:rPr>
-                                    <a:rPr lang="en-US" i="1" sz="2400">
+                                    <a:rPr lang="en-US" i="0" sz="2400">
                                       <a:solidFill>
                                         <a:srgbClr val="111111"/>
                                       </a:solidFill>
@@ -4971,7 +4971,7 @@
                                 <m:rPr>
                                   <m:sty m:val="p"/>
                                 </m:rPr>
-                                <a:rPr lang="en-US" i="1" sz="2400">
+                                <a:rPr lang="en-US" i="0" sz="2400">
                                   <a:solidFill>
                                     <a:srgbClr val="111111"/>
                                   </a:solidFill>
@@ -5056,7 +5056,7 @@
                                 <m:rPr>
                                   <m:sty m:val="p"/>
                                 </m:rPr>
-                                <a:rPr lang="en-US" i="1" sz="2400">
+                                <a:rPr lang="en-US" i="0" sz="2400">
                                   <a:solidFill>
                                     <a:srgbClr val="111111"/>
                                   </a:solidFill>
@@ -5137,7 +5137,7 @@
                                     <m:rPr>
                                       <m:sty m:val="p"/>
                                     </m:rPr>
-                                    <a:rPr lang="en-US" i="1" sz="2400">
+                                    <a:rPr lang="en-US" i="0" sz="2400">
                                       <a:solidFill>
                                         <a:srgbClr val="111111"/>
                                       </a:solidFill>
@@ -5162,7 +5162,7 @@
                                 <m:rPr>
                                   <m:sty m:val="p"/>
                                 </m:rPr>
-                                <a:rPr lang="en-US" i="1" sz="2400">
+                                <a:rPr lang="en-US" i="0" sz="2400">
                                   <a:solidFill>
                                     <a:srgbClr val="111111"/>
                                   </a:solidFill>
@@ -5185,7 +5185,7 @@
                                 <m:rPr>
                                   <m:sty m:val="p"/>
                                 </m:rPr>
-                                <a:rPr lang="en-US" i="1" sz="2400">
+                                <a:rPr lang="en-US" i="0" sz="2400">
                                   <a:solidFill>
                                     <a:srgbClr val="111111"/>
                                   </a:solidFill>
@@ -5238,7 +5238,7 @@
                                 <m:rPr>
                                   <m:sty m:val="p"/>
                                 </m:rPr>
-                                <a:rPr lang="en-US" i="1" sz="2400">
+                                <a:rPr lang="en-US" i="0" sz="2400">
                                   <a:solidFill>
                                     <a:srgbClr val="111111"/>
                                   </a:solidFill>
@@ -5450,7 +5450,7 @@
                                 <m:rPr>
                                   <m:sty m:val="p"/>
                                 </m:rPr>
-                                <a:rPr lang="en-US" i="1" sz="1409">
+                                <a:rPr lang="en-US" i="0" sz="1409">
                                   <a:solidFill>
                                     <a:srgbClr val="111111"/>
                                   </a:solidFill>
@@ -5475,7 +5475,7 @@
                             <m:rPr>
                               <m:sty m:val="p"/>
                             </m:rPr>
-                            <a:rPr lang="en-US" i="1" sz="1409">
+                            <a:rPr lang="en-US" i="0" sz="1409">
                               <a:solidFill>
                                 <a:srgbClr val="111111"/>
                               </a:solidFill>
@@ -5500,7 +5500,7 @@
                         <m:rPr>
                           <m:sty m:val="p"/>
                         </m:rPr>
-                        <a:rPr lang="en-US" i="1" sz="1409">
+                        <a:rPr lang="en-US" i="0" sz="1409">
                           <a:solidFill>
                             <a:srgbClr val="111111"/>
                           </a:solidFill>
@@ -5513,7 +5513,7 @@
                         <m:rPr>
                           <m:sty m:val="p"/>
                         </m:rPr>
-                        <a:rPr lang="en-US" i="1" sz="1409">
+                        <a:rPr lang="en-US" i="0" sz="1409">
                           <a:solidFill>
                             <a:srgbClr val="111111"/>
                           </a:solidFill>
@@ -5544,7 +5544,7 @@
                             <m:rPr>
                               <m:sty m:val="p"/>
                             </m:rPr>
-                            <a:rPr lang="en-US" i="1" sz="1409">
+                            <a:rPr lang="en-US" i="0" sz="1409">
                               <a:solidFill>
                                 <a:srgbClr val="111111"/>
                               </a:solidFill>
@@ -5582,7 +5582,7 @@
                               <m:sty m:val="p"/>
                               <m:scr m:val="script"/>
                             </m:rPr>
-                            <a:rPr lang="en-US" i="1" sz="1409">
+                            <a:rPr lang="en-US" i="0" sz="1409">
                               <a:solidFill>
                                 <a:srgbClr val="111111"/>
                               </a:solidFill>
@@ -5629,7 +5629,7 @@
                                 <m:rPr>
                                   <m:sty m:val="p"/>
                                 </m:rPr>
-                                <a:rPr lang="en-US" i="1" sz="1409">
+                                <a:rPr lang="en-US" i="0" sz="1409">
                                   <a:solidFill>
                                     <a:srgbClr val="111111"/>
                                   </a:solidFill>
@@ -5652,7 +5652,7 @@
                                 <m:rPr>
                                   <m:sty m:val="p"/>
                                 </m:rPr>
-                                <a:rPr lang="en-US" i="1" sz="1409">
+                                <a:rPr lang="en-US" i="0" sz="1409">
                                   <a:solidFill>
                                     <a:srgbClr val="111111"/>
                                   </a:solidFill>
@@ -5677,7 +5677,7 @@
                             <m:rPr>
                               <m:sty m:val="p"/>
                             </m:rPr>
-                            <a:rPr lang="en-US" i="1" sz="1409">
+                            <a:rPr lang="en-US" i="0" sz="1409">
                               <a:solidFill>
                                 <a:srgbClr val="111111"/>
                               </a:solidFill>
@@ -5734,7 +5734,7 @@
                                 <m:rPr>
                                   <m:sty m:val="p"/>
                                 </m:rPr>
-                                <a:rPr lang="en-US" i="1" sz="1409">
+                                <a:rPr lang="en-US" i="0" sz="1409">
                                   <a:solidFill>
                                     <a:srgbClr val="111111"/>
                                   </a:solidFill>
@@ -5757,7 +5757,7 @@
                                 <m:rPr>
                                   <m:sty m:val="p"/>
                                 </m:rPr>
-                                <a:rPr lang="en-US" i="1" sz="1409">
+                                <a:rPr lang="en-US" i="0" sz="1409">
                                   <a:solidFill>
                                     <a:srgbClr val="111111"/>
                                   </a:solidFill>
@@ -5780,7 +5780,7 @@
                                 <m:rPr>
                                   <m:sty m:val="p"/>
                                 </m:rPr>
-                                <a:rPr lang="en-US" i="1" sz="1409">
+                                <a:rPr lang="en-US" i="0" sz="1409">
                                   <a:solidFill>
                                     <a:srgbClr val="111111"/>
                                   </a:solidFill>
@@ -5803,7 +5803,7 @@
                                 <m:rPr>
                                   <m:sty m:val="p"/>
                                 </m:rPr>
-                                <a:rPr lang="en-US" i="1" sz="1409">
+                                <a:rPr lang="en-US" i="0" sz="1409">
                                   <a:solidFill>
                                     <a:srgbClr val="111111"/>
                                   </a:solidFill>
@@ -5828,7 +5828,7 @@
                             <m:rPr>
                               <m:sty m:val="p"/>
                             </m:rPr>
-                            <a:rPr lang="en-US" i="1" sz="1409">
+                            <a:rPr lang="en-US" i="0" sz="1409">
                               <a:solidFill>
                                 <a:srgbClr val="111111"/>
                               </a:solidFill>
@@ -5875,7 +5875,7 @@
                                 <m:rPr>
                                   <m:sty m:val="p"/>
                                 </m:rPr>
-                                <a:rPr lang="en-US" i="1" sz="1409">
+                                <a:rPr lang="en-US" i="0" sz="1409">
                                   <a:solidFill>
                                     <a:srgbClr val="111111"/>
                                   </a:solidFill>
@@ -5898,7 +5898,7 @@
                                 <m:rPr>
                                   <m:sty m:val="p"/>
                                 </m:rPr>
-                                <a:rPr lang="en-US" i="1" sz="1409">
+                                <a:rPr lang="en-US" i="0" sz="1409">
                                   <a:solidFill>
                                     <a:srgbClr val="111111"/>
                                   </a:solidFill>
@@ -5921,7 +5921,7 @@
                                 <m:rPr>
                                   <m:sty m:val="p"/>
                                 </m:rPr>
-                                <a:rPr lang="en-US" i="1" sz="1409">
+                                <a:rPr lang="en-US" i="0" sz="1409">
                                   <a:solidFill>
                                     <a:srgbClr val="111111"/>
                                   </a:solidFill>
@@ -5944,7 +5944,7 @@
                                 <m:rPr>
                                   <m:sty m:val="p"/>
                                 </m:rPr>
-                                <a:rPr lang="en-US" i="1" sz="1409">
+                                <a:rPr lang="en-US" i="0" sz="1409">
                                   <a:solidFill>
                                     <a:srgbClr val="111111"/>
                                   </a:solidFill>
@@ -6105,7 +6105,7 @@
             <p:spPr>
               <a:xfrm>
                 <a:off x="548640" y="3682289"/>
-                <a:ext cx="4949952" cy="310896"/>
+                <a:ext cx="4949952" cy="298704"/>
               </a:xfrm>
               <a:prstGeom prst="rect">
                 <a:avLst/>
@@ -6153,7 +6153,7 @@
                             <m:rPr>
                               <m:sty m:val="p"/>
                             </m:rPr>
-                            <a:rPr lang="en-US" i="1" sz="1600">
+                            <a:rPr lang="en-US" i="0" sz="1600">
                               <a:solidFill>
                                 <a:srgbClr val="111111"/>
                               </a:solidFill>
@@ -6176,7 +6176,7 @@
                             <m:rPr>
                               <m:sty m:val="p"/>
                             </m:rPr>
-                            <a:rPr lang="en-US" i="1" sz="1600">
+                            <a:rPr lang="en-US" i="0" sz="1600">
                               <a:solidFill>
                                 <a:srgbClr val="111111"/>
                               </a:solidFill>
@@ -6199,7 +6199,7 @@
                             <m:rPr>
                               <m:sty m:val="p"/>
                             </m:rPr>
-                            <a:rPr lang="en-US" i="1" sz="1600">
+                            <a:rPr lang="en-US" i="0" sz="1600">
                               <a:solidFill>
                                 <a:srgbClr val="111111"/>
                               </a:solidFill>
@@ -6222,7 +6222,7 @@
                             <m:rPr>
                               <m:sty m:val="p"/>
                             </m:rPr>
-                            <a:rPr lang="en-US" i="1" sz="1600">
+                            <a:rPr lang="en-US" i="0" sz="1600">
                               <a:solidFill>
                                 <a:srgbClr val="111111"/>
                               </a:solidFill>
@@ -6267,7 +6267,7 @@
                         <m:rPr>
                           <m:sty m:val="p"/>
                         </m:rPr>
-                        <a:rPr lang="en-US" i="1" sz="1600">
+                        <a:rPr lang="en-US" i="0" sz="1600">
                           <a:solidFill>
                             <a:srgbClr val="111111"/>
                           </a:solidFill>
@@ -6366,7 +6366,7 @@
                             <m:rPr>
                               <m:sty m:val="p"/>
                             </m:rPr>
-                            <a:rPr lang="en-US" i="1" sz="1600">
+                            <a:rPr lang="en-US" i="0" sz="1600">
                               <a:solidFill>
                                 <a:srgbClr val="111111"/>
                               </a:solidFill>
@@ -6381,7 +6381,7 @@
                         <m:rPr>
                           <m:sty m:val="p"/>
                         </m:rPr>
-                        <a:rPr lang="en-US" i="1" sz="1600">
+                        <a:rPr lang="en-US" i="0" sz="1600">
                           <a:solidFill>
                             <a:srgbClr val="111111"/>
                           </a:solidFill>
@@ -6394,7 +6394,7 @@
                         <m:rPr>
                           <m:sty m:val="p"/>
                         </m:rPr>
-                        <a:rPr lang="en-US" i="1" sz="1600">
+                        <a:rPr lang="en-US" i="0" sz="1600">
                           <a:solidFill>
                             <a:srgbClr val="111111"/>
                           </a:solidFill>
@@ -6407,7 +6407,7 @@
                         <m:rPr>
                           <m:sty m:val="p"/>
                         </m:rPr>
-                        <a:rPr lang="en-US" i="1" sz="1600">
+                        <a:rPr lang="en-US" i="0" sz="1600">
                           <a:solidFill>
                             <a:srgbClr val="111111"/>
                           </a:solidFill>
@@ -6420,7 +6420,7 @@
                         <m:rPr>
                           <m:sty m:val="p"/>
                         </m:rPr>
-                        <a:rPr lang="en-US" i="1" sz="1600">
+                        <a:rPr lang="en-US" i="0" sz="1600">
                           <a:solidFill>
                             <a:srgbClr val="111111"/>
                           </a:solidFill>
@@ -6433,7 +6433,7 @@
                         <m:rPr>
                           <m:sty m:val="p"/>
                         </m:rPr>
-                        <a:rPr lang="en-US" i="1" sz="1600">
+                        <a:rPr lang="en-US" i="0" sz="1600">
                           <a:solidFill>
                             <a:srgbClr val="111111"/>
                           </a:solidFill>
@@ -6498,7 +6498,7 @@
                                 <m:rPr>
                                   <m:sty m:val="p"/>
                                 </m:rPr>
-                                <a:rPr lang="en-US" i="1" sz="1600">
+                                <a:rPr lang="en-US" i="0" sz="1600">
                                   <a:solidFill>
                                     <a:srgbClr val="111111"/>
                                   </a:solidFill>
@@ -6575,7 +6575,7 @@
                             <m:rPr>
                               <m:sty m:val="p"/>
                             </m:rPr>
-                            <a:rPr lang="en-US" i="1" sz="1600">
+                            <a:rPr lang="en-US" i="0" sz="1600">
                               <a:solidFill>
                                 <a:srgbClr val="111111"/>
                               </a:solidFill>
@@ -6602,7 +6602,7 @@
                                 <m:rPr>
                                   <m:sty m:val="p"/>
                                 </m:rPr>
-                                <a:rPr lang="en-US" i="1" sz="1600">
+                                <a:rPr lang="en-US" i="0" sz="1600">
                                   <a:solidFill>
                                     <a:srgbClr val="111111"/>
                                   </a:solidFill>
@@ -6615,7 +6615,7 @@
                                 <m:rPr>
                                   <m:sty m:val="p"/>
                                 </m:rPr>
-                                <a:rPr lang="en-US" i="1" sz="1600">
+                                <a:rPr lang="en-US" i="0" sz="1600">
                                   <a:solidFill>
                                     <a:srgbClr val="111111"/>
                                   </a:solidFill>
@@ -6628,7 +6628,7 @@
                                 <m:rPr>
                                   <m:sty m:val="p"/>
                                 </m:rPr>
-                                <a:rPr lang="en-US" i="1" sz="1600">
+                                <a:rPr lang="en-US" i="0" sz="1600">
                                   <a:solidFill>
                                     <a:srgbClr val="111111"/>
                                   </a:solidFill>
@@ -6673,7 +6673,7 @@
             <p:spPr>
               <a:xfrm>
                 <a:off x="548640" y="3682289"/>
-                <a:ext cx="4949952" cy="310896"/>
+                <a:ext cx="4949952" cy="298704"/>
               </a:xfrm>
               <a:prstGeom prst="rect">
                 <a:avLst/>
@@ -6710,8 +6710,8 @@
             </p:nvSpPr>
             <p:spPr>
               <a:xfrm>
-                <a:off x="548640" y="4066337"/>
-                <a:ext cx="4084320" cy="286512"/>
+                <a:off x="548640" y="4054144"/>
+                <a:ext cx="4084320" cy="271272"/>
               </a:xfrm>
               <a:prstGeom prst="rect">
                 <a:avLst/>
@@ -6735,7 +6735,7 @@
                         <m:rPr>
                           <m:sty m:val="p"/>
                         </m:rPr>
-                        <a:rPr lang="en-US" i="1" sz="1500">
+                        <a:rPr lang="en-US" i="0" sz="1500">
                           <a:solidFill>
                             <a:srgbClr val="111111"/>
                           </a:solidFill>
@@ -6758,7 +6758,7 @@
                         <m:rPr>
                           <m:sty m:val="p"/>
                         </m:rPr>
-                        <a:rPr lang="en-US" i="1" sz="1500">
+                        <a:rPr lang="en-US" i="0" sz="1500">
                           <a:solidFill>
                             <a:srgbClr val="111111"/>
                           </a:solidFill>
@@ -6772,7 +6772,7 @@
                           <m:sty m:val="p"/>
                           <m:scr m:val="script"/>
                         </m:rPr>
-                        <a:rPr lang="en-US" i="1" sz="1500">
+                        <a:rPr lang="en-US" i="0" sz="1500">
                           <a:solidFill>
                             <a:srgbClr val="111111"/>
                           </a:solidFill>
@@ -6803,7 +6803,7 @@
                             <m:rPr>
                               <m:sty m:val="p"/>
                             </m:rPr>
-                            <a:rPr lang="en-US" i="1" sz="1500">
+                            <a:rPr lang="en-US" i="0" sz="1500">
                               <a:solidFill>
                                 <a:srgbClr val="111111"/>
                               </a:solidFill>
@@ -6854,7 +6854,7 @@
                         <m:rPr>
                           <m:sty m:val="p"/>
                         </m:rPr>
-                        <a:rPr lang="en-US" i="1" sz="1500">
+                        <a:rPr lang="en-US" i="0" sz="1500">
                           <a:solidFill>
                             <a:srgbClr val="111111"/>
                           </a:solidFill>
@@ -6887,7 +6887,7 @@
                         <m:rPr>
                           <m:sty m:val="p"/>
                         </m:rPr>
-                        <a:rPr lang="en-US" i="1" sz="1500">
+                        <a:rPr lang="en-US" i="0" sz="1500">
                           <a:solidFill>
                             <a:srgbClr val="111111"/>
                           </a:solidFill>
@@ -6910,7 +6910,7 @@
                         <m:rPr>
                           <m:sty m:val="p"/>
                         </m:rPr>
-                        <a:rPr lang="en-US" i="1" sz="1500">
+                        <a:rPr lang="en-US" i="0" sz="1500">
                           <a:solidFill>
                             <a:srgbClr val="111111"/>
                           </a:solidFill>
@@ -6947,7 +6947,7 @@
                             <m:rPr>
                               <m:sty m:val="p"/>
                             </m:rPr>
-                            <a:rPr lang="en-US" i="1" sz="1500">
+                            <a:rPr lang="en-US" i="0" sz="1500">
                               <a:solidFill>
                                 <a:srgbClr val="111111"/>
                               </a:solidFill>
@@ -6960,7 +6960,7 @@
                             <m:rPr>
                               <m:sty m:val="p"/>
                             </m:rPr>
-                            <a:rPr lang="en-US" i="1" sz="1500">
+                            <a:rPr lang="en-US" i="0" sz="1500">
                               <a:solidFill>
                                 <a:srgbClr val="111111"/>
                               </a:solidFill>
@@ -6973,7 +6973,7 @@
                             <m:rPr>
                               <m:sty m:val="p"/>
                             </m:rPr>
-                            <a:rPr lang="en-US" i="1" sz="1500">
+                            <a:rPr lang="en-US" i="0" sz="1500">
                               <a:solidFill>
                                 <a:srgbClr val="111111"/>
                               </a:solidFill>
@@ -6988,7 +6988,7 @@
                         <m:rPr>
                           <m:sty m:val="p"/>
                         </m:rPr>
-                        <a:rPr lang="en-US" i="1" sz="1500">
+                        <a:rPr lang="en-US" i="0" sz="1500">
                           <a:solidFill>
                             <a:srgbClr val="111111"/>
                           </a:solidFill>
@@ -7021,7 +7021,7 @@
                         <m:rPr>
                           <m:sty m:val="p"/>
                         </m:rPr>
-                        <a:rPr lang="en-US" i="1" sz="1500">
+                        <a:rPr lang="en-US" i="0" sz="1500">
                           <a:solidFill>
                             <a:srgbClr val="111111"/>
                           </a:solidFill>
@@ -7034,7 +7034,7 @@
                         <m:rPr>
                           <m:sty m:val="p"/>
                         </m:rPr>
-                        <a:rPr lang="en-US" i="1" sz="1500">
+                        <a:rPr lang="en-US" i="0" sz="1500">
                           <a:solidFill>
                             <a:srgbClr val="111111"/>
                           </a:solidFill>
@@ -7062,8 +7062,8 @@
             </p:nvSpPr>
             <p:spPr>
               <a:xfrm>
-                <a:off x="548640" y="4066337"/>
-                <a:ext cx="4084320" cy="286512"/>
+                <a:off x="548640" y="4054144"/>
+                <a:ext cx="4084320" cy="271272"/>
               </a:xfrm>
               <a:prstGeom prst="rect">
                 <a:avLst/>
@@ -7098,8 +7098,8 @@
         </p:nvSpPr>
         <p:spPr>
           <a:xfrm>
-            <a:off x="548640" y="4462577"/>
-            <a:ext cx="5257800" cy="1755342"/>
+            <a:off x="548640" y="4435145"/>
+            <a:ext cx="5257800" cy="1782775"/>
           </a:xfrm>
           <a:prstGeom prst="rect">
             <a:avLst/>
@@ -7824,7 +7824,7 @@
                         <m:rPr>
                           <m:sty m:val="p"/>
                         </m:rPr>
-                        <a:rPr lang="en-US" i="1" sz="1700">
+                        <a:rPr lang="en-US" i="0" sz="1700">
                           <a:solidFill>
                             <a:srgbClr val="111111"/>
                           </a:solidFill>
@@ -7862,7 +7862,7 @@
                             <m:rPr>
                               <m:sty m:val="p"/>
                             </m:rPr>
-                            <a:rPr lang="en-US" i="1" sz="1700">
+                            <a:rPr lang="en-US" i="0" sz="1700">
                               <a:solidFill>
                                 <a:srgbClr val="111111"/>
                               </a:solidFill>
@@ -7885,7 +7885,7 @@
                             <m:rPr>
                               <m:sty m:val="p"/>
                             </m:rPr>
-                            <a:rPr lang="en-US" i="1" sz="1700">
+                            <a:rPr lang="en-US" i="0" sz="1700">
                               <a:solidFill>
                                 <a:srgbClr val="111111"/>
                               </a:solidFill>
@@ -7915,7 +7915,7 @@
                             <m:rPr>
                               <m:sty m:val="p"/>
                             </m:rPr>
-                            <a:rPr lang="en-US" i="1" sz="1700">
+                            <a:rPr lang="en-US" i="0" sz="1700">
                               <a:solidFill>
                                 <a:srgbClr val="111111"/>
                               </a:solidFill>
@@ -7938,7 +7938,7 @@
                             <m:rPr>
                               <m:sty m:val="p"/>
                             </m:rPr>
-                            <a:rPr lang="en-US" i="1" sz="1700">
+                            <a:rPr lang="en-US" i="0" sz="1700">
                               <a:solidFill>
                                 <a:srgbClr val="111111"/>
                               </a:solidFill>
@@ -7963,7 +7963,7 @@
                         <m:rPr>
                           <m:sty m:val="p"/>
                         </m:rPr>
-                        <a:rPr lang="en-US" i="1" sz="1700">
+                        <a:rPr lang="en-US" i="0" sz="1700">
                           <a:solidFill>
                             <a:srgbClr val="111111"/>
                           </a:solidFill>
@@ -7977,7 +7977,7 @@
                           <m:sty m:val="p"/>
                           <m:scr m:val="double-struck"/>
                         </m:rPr>
-                        <a:rPr lang="en-US" i="1" sz="1700">
+                        <a:rPr lang="en-US" i="0" sz="1700">
                           <a:solidFill>
                             <a:srgbClr val="111111"/>
                           </a:solidFill>
@@ -8015,7 +8015,7 @@
                             <m:rPr>
                               <m:sty m:val="p"/>
                             </m:rPr>
-                            <a:rPr lang="en-US" i="1" sz="1700">
+                            <a:rPr lang="en-US" i="0" sz="1700">
                               <a:solidFill>
                                 <a:srgbClr val="111111"/>
                               </a:solidFill>
@@ -8045,7 +8045,7 @@
                             <m:rPr>
                               <m:sty m:val="p"/>
                             </m:rPr>
-                            <a:rPr lang="en-US" i="1" sz="1700">
+                            <a:rPr lang="en-US" i="0" sz="1700">
                               <a:solidFill>
                                 <a:srgbClr val="111111"/>
                               </a:solidFill>
@@ -8068,7 +8068,7 @@
                             <m:rPr>
                               <m:sty m:val="p"/>
                             </m:rPr>
-                            <a:rPr lang="en-US" i="1" sz="1700">
+                            <a:rPr lang="en-US" i="0" sz="1700">
                               <a:solidFill>
                                 <a:srgbClr val="111111"/>
                               </a:solidFill>
@@ -8093,7 +8093,7 @@
                         <m:rPr>
                           <m:sty m:val="p"/>
                         </m:rPr>
-                        <a:rPr lang="en-US" i="1" sz="1700">
+                        <a:rPr lang="en-US" i="0" sz="1700">
                           <a:solidFill>
                             <a:srgbClr val="111111"/>
                           </a:solidFill>
@@ -8116,7 +8116,7 @@
                         <m:rPr>
                           <m:sty m:val="p"/>
                         </m:rPr>
-                        <a:rPr lang="en-US" i="1" sz="1700">
+                        <a:rPr lang="en-US" i="0" sz="1700">
                           <a:solidFill>
                             <a:srgbClr val="111111"/>
                           </a:solidFill>
@@ -8234,7 +8234,7 @@
                         <m:rPr>
                           <m:sty m:val="p"/>
                         </m:rPr>
-                        <a:rPr lang="en-US" i="1" sz="1500">
+                        <a:rPr lang="en-US" i="0" sz="1500">
                           <a:solidFill>
                             <a:srgbClr val="111111"/>
                           </a:solidFill>
@@ -8247,7 +8247,7 @@
                         <m:rPr>
                           <m:sty m:val="p"/>
                         </m:rPr>
-                        <a:rPr lang="en-US" i="1" sz="1500">
+                        <a:rPr lang="en-US" i="0" sz="1500">
                           <a:solidFill>
                             <a:srgbClr val="111111"/>
                           </a:solidFill>
@@ -8262,7 +8262,7 @@
                             <m:rPr>
                               <m:sty m:val="p"/>
                             </m:rPr>
-                            <a:rPr lang="en-US" i="1" sz="1500">
+                            <a:rPr lang="en-US" i="0" sz="1500">
                               <a:solidFill>
                                 <a:srgbClr val="111111"/>
                               </a:solidFill>
@@ -8327,7 +8327,7 @@
                             <m:rPr>
                               <m:sty m:val="p"/>
                             </m:rPr>
-                            <a:rPr lang="en-US" i="1" sz="1500">
+                            <a:rPr lang="en-US" i="0" sz="1500">
                               <a:solidFill>
                                 <a:srgbClr val="111111"/>
                               </a:solidFill>
@@ -8364,7 +8364,7 @@
                                 <m:rPr>
                                   <m:sty m:val="p"/>
                                 </m:rPr>
-                                <a:rPr lang="en-US" i="1" sz="1500">
+                                <a:rPr lang="en-US" i="0" sz="1500">
                                   <a:solidFill>
                                     <a:srgbClr val="111111"/>
                                   </a:solidFill>
@@ -8391,7 +8391,7 @@
                         <m:rPr>
                           <m:sty m:val="p"/>
                         </m:rPr>
-                        <a:rPr lang="en-US" i="1" sz="1500">
+                        <a:rPr lang="en-US" i="0" sz="1500">
                           <a:solidFill>
                             <a:srgbClr val="111111"/>
                           </a:solidFill>
@@ -8431,7 +8431,7 @@
                         <m:rPr>
                           <m:sty m:val="p"/>
                         </m:rPr>
-                        <a:rPr lang="en-US" i="1" sz="1500">
+                        <a:rPr lang="en-US" i="0" sz="1500">
                           <a:solidFill>
                             <a:srgbClr val="111111"/>
                           </a:solidFill>
@@ -8479,7 +8479,7 @@
                             <m:rPr>
                               <m:sty m:val="p"/>
                             </m:rPr>
-                            <a:rPr lang="en-US" i="1" sz="1500">
+                            <a:rPr lang="en-US" i="0" sz="1500">
                               <a:solidFill>
                                 <a:srgbClr val="111111"/>
                               </a:solidFill>
@@ -8516,7 +8516,7 @@
                                 <m:rPr>
                                   <m:sty m:val="p"/>
                                 </m:rPr>
-                                <a:rPr lang="en-US" i="1" sz="1500">
+                                <a:rPr lang="en-US" i="0" sz="1500">
                                   <a:solidFill>
                                     <a:srgbClr val="111111"/>
                                   </a:solidFill>
@@ -8790,7 +8790,7 @@
                         <m:rPr>
                           <m:sty m:val="p"/>
                         </m:rPr>
-                        <a:rPr lang="en-US" i="1" sz="1800">
+                        <a:rPr lang="en-US" i="0" sz="1800">
                           <a:solidFill>
                             <a:srgbClr val="111111"/>
                           </a:solidFill>
@@ -8811,7 +8811,7 @@
                             <m:rPr>
                               <m:sty m:val="p"/>
                             </m:rPr>
-                            <a:rPr lang="en-US" i="1" sz="1800">
+                            <a:rPr lang="en-US" i="0" sz="1800">
                               <a:solidFill>
                                 <a:srgbClr val="111111"/>
                               </a:solidFill>
@@ -8824,7 +8824,7 @@
                             <m:rPr>
                               <m:sty m:val="p"/>
                             </m:rPr>
-                            <a:rPr lang="en-US" i="1" sz="1800">
+                            <a:rPr lang="en-US" i="0" sz="1800">
                               <a:solidFill>
                                 <a:srgbClr val="111111"/>
                               </a:solidFill>
@@ -8847,7 +8847,7 @@
                             <m:rPr>
                               <m:sty m:val="p"/>
                             </m:rPr>
-                            <a:rPr lang="en-US" i="1" sz="1800">
+                            <a:rPr lang="en-US" i="0" sz="1800">
                               <a:solidFill>
                                 <a:srgbClr val="111111"/>
                               </a:solidFill>
@@ -8884,7 +8884,7 @@
                                 <m:rPr>
                                   <m:sty m:val="p"/>
                                 </m:rPr>
-                                <a:rPr lang="en-US" i="1" sz="1800">
+                                <a:rPr lang="en-US" i="0" sz="1800">
                                   <a:solidFill>
                                     <a:srgbClr val="111111"/>
                                   </a:solidFill>
@@ -8911,7 +8911,7 @@
                         <m:rPr>
                           <m:sty m:val="p"/>
                         </m:rPr>
-                        <a:rPr lang="en-US" i="1" sz="1800">
+                        <a:rPr lang="en-US" i="0" sz="1800">
                           <a:solidFill>
                             <a:srgbClr val="111111"/>
                           </a:solidFill>
@@ -8942,7 +8942,7 @@
                             <m:rPr>
                               <m:sty m:val="p"/>
                             </m:rPr>
-                            <a:rPr lang="en-US" i="1" sz="1800">
+                            <a:rPr lang="en-US" i="0" sz="1800">
                               <a:solidFill>
                                 <a:srgbClr val="111111"/>
                               </a:solidFill>
@@ -8965,7 +8965,7 @@
                             <m:rPr>
                               <m:sty m:val="p"/>
                             </m:rPr>
-                            <a:rPr lang="en-US" i="1" sz="1800">
+                            <a:rPr lang="en-US" i="0" sz="1800">
                               <a:solidFill>
                                 <a:srgbClr val="111111"/>
                               </a:solidFill>
@@ -8978,7 +8978,7 @@
                             <m:rPr>
                               <m:sty m:val="p"/>
                             </m:rPr>
-                            <a:rPr lang="en-US" i="1" sz="1800">
+                            <a:rPr lang="en-US" i="0" sz="1800">
                               <a:solidFill>
                                 <a:srgbClr val="111111"/>
                               </a:solidFill>
@@ -9045,7 +9045,7 @@
                             <m:rPr>
                               <m:sty m:val="p"/>
                             </m:rPr>
-                            <a:rPr lang="en-US" i="1" sz="1800">
+                            <a:rPr lang="en-US" i="0" sz="1800">
                               <a:solidFill>
                                 <a:srgbClr val="111111"/>
                               </a:solidFill>
@@ -9082,7 +9082,7 @@
                                 <m:rPr>
                                   <m:sty m:val="p"/>
                                 </m:rPr>
-                                <a:rPr lang="en-US" i="1" sz="1800">
+                                <a:rPr lang="en-US" i="0" sz="1800">
                                   <a:solidFill>
                                     <a:srgbClr val="111111"/>
                                   </a:solidFill>
@@ -9163,7 +9163,7 @@
             <p:spPr>
               <a:xfrm>
                 <a:off x="9454896" y="1557528"/>
-                <a:ext cx="1728216" cy="301752"/>
+                <a:ext cx="1728216" cy="259080"/>
               </a:xfrm>
               <a:prstGeom prst="rect">
                 <a:avLst/>
@@ -9187,7 +9187,7 @@
                         <m:rPr>
                           <m:sty m:val="p"/>
                         </m:rPr>
-                        <a:rPr lang="en-US" i="1" sz="1600">
+                        <a:rPr lang="en-US" i="0" sz="1600">
                           <a:solidFill>
                             <a:srgbClr val="111111"/>
                           </a:solidFill>
@@ -9200,7 +9200,7 @@
                         <m:rPr>
                           <m:sty m:val="p"/>
                         </m:rPr>
-                        <a:rPr lang="en-US" i="1" sz="1600">
+                        <a:rPr lang="en-US" i="0" sz="1600">
                           <a:solidFill>
                             <a:srgbClr val="111111"/>
                           </a:solidFill>
@@ -9223,7 +9223,7 @@
                         <m:rPr>
                           <m:sty m:val="p"/>
                         </m:rPr>
-                        <a:rPr lang="en-US" i="1" sz="1600">
+                        <a:rPr lang="en-US" i="0" sz="1600">
                           <a:solidFill>
                             <a:srgbClr val="111111"/>
                           </a:solidFill>
@@ -9236,7 +9236,7 @@
                         <m:rPr>
                           <m:sty m:val="p"/>
                         </m:rPr>
-                        <a:rPr lang="en-US" i="1" sz="1600">
+                        <a:rPr lang="en-US" i="0" sz="1600">
                           <a:solidFill>
                             <a:srgbClr val="111111"/>
                           </a:solidFill>
@@ -9267,7 +9267,7 @@
                             <m:rPr>
                               <m:sty m:val="p"/>
                             </m:rPr>
-                            <a:rPr lang="en-US" i="1" sz="1600">
+                            <a:rPr lang="en-US" i="0" sz="1600">
                               <a:solidFill>
                                 <a:srgbClr val="111111"/>
                               </a:solidFill>
@@ -9292,7 +9292,7 @@
                         <m:rPr>
                           <m:sty m:val="p"/>
                         </m:rPr>
-                        <a:rPr lang="en-US" i="1" sz="1600">
+                        <a:rPr lang="en-US" i="0" sz="1600">
                           <a:solidFill>
                             <a:srgbClr val="111111"/>
                           </a:solidFill>
@@ -9315,7 +9315,7 @@
                         <m:rPr>
                           <m:sty m:val="p"/>
                         </m:rPr>
-                        <a:rPr lang="en-US" i="1" sz="1600">
+                        <a:rPr lang="en-US" i="0" sz="1600">
                           <a:solidFill>
                             <a:srgbClr val="111111"/>
                           </a:solidFill>
@@ -9344,7 +9344,7 @@
             <p:spPr>
               <a:xfrm>
                 <a:off x="9454896" y="1557528"/>
-                <a:ext cx="1728216" cy="301752"/>
+                <a:ext cx="1728216" cy="259080"/>
               </a:xfrm>
               <a:prstGeom prst="rect">
                 <a:avLst/>
@@ -10065,7 +10065,7 @@
                             <m:rPr>
                               <m:sty m:val="p"/>
                             </m:rPr>
-                            <a:rPr lang="en-US" i="1" sz="1600">
+                            <a:rPr lang="en-US" i="0" sz="1600">
                               <a:solidFill>
                                 <a:srgbClr val="111111"/>
                               </a:solidFill>
@@ -10078,7 +10078,7 @@
                             <m:rPr>
                               <m:sty m:val="p"/>
                             </m:rPr>
-                            <a:rPr lang="en-US" i="1" sz="1600">
+                            <a:rPr lang="en-US" i="0" sz="1600">
                               <a:solidFill>
                                 <a:srgbClr val="111111"/>
                               </a:solidFill>
@@ -10093,7 +10093,7 @@
                         <m:rPr>
                           <m:sty m:val="p"/>
                         </m:rPr>
-                        <a:rPr lang="en-US" i="1" sz="1600">
+                        <a:rPr lang="en-US" i="0" sz="1600">
                           <a:solidFill>
                             <a:srgbClr val="111111"/>
                           </a:solidFill>
@@ -10130,7 +10130,7 @@
                             <m:rPr>
                               <m:sty m:val="p"/>
                             </m:rPr>
-                            <a:rPr lang="en-US" i="1" sz="1600">
+                            <a:rPr lang="en-US" i="0" sz="1600">
                               <a:solidFill>
                                 <a:srgbClr val="111111"/>
                               </a:solidFill>
@@ -10143,7 +10143,7 @@
                             <m:rPr>
                               <m:sty m:val="p"/>
                             </m:rPr>
-                            <a:rPr lang="en-US" i="1" sz="1600">
+                            <a:rPr lang="en-US" i="0" sz="1600">
                               <a:solidFill>
                                 <a:srgbClr val="111111"/>
                               </a:solidFill>
@@ -10174,7 +10174,7 @@
                             <m:rPr>
                               <m:sty m:val="p"/>
                             </m:rPr>
-                            <a:rPr lang="en-US" i="1" sz="1600">
+                            <a:rPr lang="en-US" i="0" sz="1600">
                               <a:solidFill>
                                 <a:srgbClr val="111111"/>
                               </a:solidFill>
@@ -10197,7 +10197,7 @@
                             <m:rPr>
                               <m:sty m:val="p"/>
                             </m:rPr>
-                            <a:rPr lang="en-US" i="1" sz="1600">
+                            <a:rPr lang="en-US" i="0" sz="1600">
                               <a:solidFill>
                                 <a:srgbClr val="111111"/>
                               </a:solidFill>
@@ -10222,7 +10222,7 @@
                         <m:rPr>
                           <m:sty m:val="p"/>
                         </m:rPr>
-                        <a:rPr lang="en-US" i="1" sz="1600">
+                        <a:rPr lang="en-US" i="0" sz="1600">
                           <a:solidFill>
                             <a:srgbClr val="111111"/>
                           </a:solidFill>
@@ -10259,7 +10259,7 @@
                             <m:rPr>
                               <m:sty m:val="p"/>
                             </m:rPr>
-                            <a:rPr lang="en-US" i="1" sz="1600">
+                            <a:rPr lang="en-US" i="0" sz="1600">
                               <a:solidFill>
                                 <a:srgbClr val="111111"/>
                               </a:solidFill>
@@ -10272,7 +10272,7 @@
                             <m:rPr>
                               <m:sty m:val="p"/>
                             </m:rPr>
-                            <a:rPr lang="en-US" i="1" sz="1600">
+                            <a:rPr lang="en-US" i="0" sz="1600">
                               <a:solidFill>
                                 <a:srgbClr val="111111"/>
                               </a:solidFill>
@@ -10285,7 +10285,7 @@
                             <m:rPr>
                               <m:sty m:val="p"/>
                             </m:rPr>
-                            <a:rPr lang="en-US" i="1" sz="1600">
+                            <a:rPr lang="en-US" i="0" sz="1600">
                               <a:solidFill>
                                 <a:srgbClr val="111111"/>
                               </a:solidFill>
@@ -10300,7 +10300,7 @@
                         <m:rPr>
                           <m:sty m:val="p"/>
                         </m:rPr>
-                        <a:rPr lang="en-US" i="1" sz="1600">
+                        <a:rPr lang="en-US" i="0" sz="1600">
                           <a:solidFill>
                             <a:srgbClr val="111111"/>
                           </a:solidFill>
@@ -10333,7 +10333,7 @@
                         <m:rPr>
                           <m:sty m:val="p"/>
                         </m:rPr>
-                        <a:rPr lang="en-US" i="1" sz="1600">
+                        <a:rPr lang="en-US" i="0" sz="1600">
                           <a:solidFill>
                             <a:srgbClr val="111111"/>
                           </a:solidFill>
@@ -10346,7 +10346,7 @@
                         <m:rPr>
                           <m:sty m:val="p"/>
                         </m:rPr>
-                        <a:rPr lang="en-US" i="1" sz="1600">
+                        <a:rPr lang="en-US" i="0" sz="1600">
                           <a:solidFill>
                             <a:srgbClr val="111111"/>
                           </a:solidFill>
